--- a/output/wordlabs-help-3day.pptx
+++ b/output/wordlabs-help-3day.pptx
@@ -4240,7 +4240,7 @@
                 <a:ea typeface="Calibri" pitchFamily="34" charset="-122"/>
                 <a:cs typeface="Calibri" pitchFamily="34" charset="-120"/>
               </a:rPr>
-              <a:t>"to assist or support someone"</a:t>
+              <a:t>"assist, support, or aid"</a:t>
             </a:r>
             <a:endParaRPr lang="en-US" sz="2200" dirty="0"/>
           </a:p>
@@ -4279,7 +4279,7 @@
                 <a:ea typeface="Calibri" pitchFamily="34" charset="-122"/>
                 <a:cs typeface="Calibri" pitchFamily="34" charset="-120"/>
               </a:rPr>
-              <a:t>Origin: Old English: helpan</a:t>
+              <a:t>Origin: Latin: helpan</a:t>
             </a:r>
             <a:endParaRPr lang="en-US" sz="1300" dirty="0"/>
           </a:p>
@@ -5288,7 +5288,7 @@
                 <a:ea typeface="Calibri" pitchFamily="34" charset="-122"/>
                 <a:cs typeface="Calibri" pitchFamily="34" charset="-120"/>
               </a:rPr>
-              <a:t>Word Labs  •  wordlabs.app  •  Root: 'help' = to assist or support someone</a:t>
+              <a:t>Word Labs  •  wordlabs.app  •  Root: 'help' = assist, support, or aid</a:t>
             </a:r>
             <a:endParaRPr lang="en-US" sz="800" dirty="0"/>
           </a:p>
@@ -5622,7 +5622,7 @@
                 <a:ea typeface="Trebuchet MS" pitchFamily="34" charset="-122"/>
                 <a:cs typeface="Trebuchet MS" pitchFamily="34" charset="-120"/>
               </a:rPr>
-              <a:t>0</a:t>
+              <a:t>1</a:t>
             </a:r>
             <a:pPr algn="ctr" indent="0" marL="0">
               <a:buNone/>
@@ -5928,7 +5928,7 @@
                 <a:ea typeface="Calibri" pitchFamily="34" charset="-122"/>
                 <a:cs typeface="Calibri" pitchFamily="34" charset="-120"/>
               </a:rPr>
-              <a:t>Word Labs  •  wordlabs.app  •  Root: 'help' = to assist or support someone</a:t>
+              <a:t>Word Labs  •  wordlabs.app  •  Root: 'help' = assist, support, or aid</a:t>
             </a:r>
             <a:endParaRPr lang="en-US" sz="800" dirty="0"/>
           </a:p>
@@ -6071,7 +6071,7 @@
                 <a:ea typeface="Calibri" pitchFamily="34" charset="-122"/>
                 <a:cs typeface="Calibri" pitchFamily="34" charset="-120"/>
               </a:rPr>
-              <a:t> volunteer was busy </a:t>
+              <a:t> student was always assisting others, but felt </a:t>
             </a:r>
             <a:pPr algn="l" indent="0" marL="0">
               <a:buNone/>
@@ -6088,7 +6088,7 @@
                 <a:ea typeface="Calibri" pitchFamily="34" charset="-122"/>
                 <a:cs typeface="Calibri" pitchFamily="34" charset="-120"/>
               </a:rPr>
-              <a:t>helping</a:t>
+              <a:t>helpless</a:t>
             </a:r>
             <a:pPr algn="l" indent="0" marL="0">
               <a:buNone/>
@@ -6102,7 +6102,7 @@
                 <a:ea typeface="Calibri" pitchFamily="34" charset="-122"/>
                 <a:cs typeface="Calibri" pitchFamily="34" charset="-120"/>
               </a:rPr>
-              <a:t> the elderly woman carry her groceries.</a:t>
+              <a:t> when she couldn't solve the puzzle.</a:t>
             </a:r>
             <a:endParaRPr lang="en-US" sz="1800" dirty="0"/>
           </a:p>
@@ -6385,7 +6385,7 @@
                 <a:ea typeface="Trebuchet MS" pitchFamily="34" charset="-122"/>
                 <a:cs typeface="Trebuchet MS" pitchFamily="34" charset="-120"/>
               </a:rPr>
-              <a:t>helping</a:t>
+              <a:t>helpless</a:t>
             </a:r>
             <a:endParaRPr lang="en-US" sz="1400" dirty="0"/>
           </a:p>
@@ -6716,7 +6716,7 @@
                 <a:ea typeface="Calibri" pitchFamily="34" charset="-122"/>
                 <a:cs typeface="Calibri" pitchFamily="34" charset="-120"/>
               </a:rPr>
-              <a:t>Word Labs  •  wordlabs.app  •  Root: 'help' = to assist or support someone</a:t>
+              <a:t>Word Labs  •  wordlabs.app  •  Root: 'help' = assist, support, or aid</a:t>
             </a:r>
             <a:endParaRPr lang="en-US" sz="800" dirty="0"/>
           </a:p>
@@ -7543,7 +7543,7 @@
                 <a:ea typeface="Calibri" pitchFamily="34" charset="-122"/>
                 <a:cs typeface="Calibri" pitchFamily="34" charset="-120"/>
               </a:rPr>
-              <a:t>Word Labs  •  wordlabs.app  •  Root: 'help' = to assist or support someone</a:t>
+              <a:t>Word Labs  •  wordlabs.app  •  Root: 'help' = assist, support, or aid</a:t>
             </a:r>
             <a:endParaRPr lang="en-US" sz="800" dirty="0"/>
           </a:p>
@@ -8528,7 +8528,7 @@
                 <a:ea typeface="Calibri" pitchFamily="34" charset="-122"/>
                 <a:cs typeface="Calibri" pitchFamily="34" charset="-120"/>
               </a:rPr>
-              <a:t>Word Labs  •  wordlabs.app  •  Root: 'help' = to assist or support someone</a:t>
+              <a:t>Word Labs  •  wordlabs.app  •  Root: 'help' = assist, support, or aid</a:t>
             </a:r>
             <a:endParaRPr lang="en-US" sz="800" dirty="0"/>
           </a:p>
@@ -9645,7 +9645,7 @@
                 <a:ea typeface="Calibri" pitchFamily="34" charset="-122"/>
                 <a:cs typeface="Calibri" pitchFamily="34" charset="-120"/>
               </a:rPr>
-              <a:t>Word Labs  •  wordlabs.app  •  Root: 'help' = to assist or support someone</a:t>
+              <a:t>Word Labs  •  wordlabs.app  •  Root: 'help' = assist, support, or aid</a:t>
             </a:r>
             <a:endParaRPr lang="en-US" sz="800" dirty="0"/>
           </a:p>
@@ -11185,7 +11185,7 @@
                 <a:ea typeface="Calibri" pitchFamily="34" charset="-122"/>
                 <a:cs typeface="Calibri" pitchFamily="34" charset="-120"/>
               </a:rPr>
-              <a:t>Word Labs  •  wordlabs.app  •  Root: 'help' = to assist or support someone</a:t>
+              <a:t>Word Labs  •  wordlabs.app  •  Root: 'help' = assist, support, or aid</a:t>
             </a:r>
             <a:endParaRPr lang="en-US" sz="800" dirty="0"/>
           </a:p>
@@ -11324,7 +11324,7 @@
                 <a:ea typeface="Trebuchet MS" pitchFamily="34" charset="-122"/>
                 <a:cs typeface="Trebuchet MS" pitchFamily="34" charset="-120"/>
               </a:rPr>
-              <a:t>helping</a:t>
+              <a:t>helpless</a:t>
             </a:r>
             <a:endParaRPr lang="en-US" sz="2800" dirty="0"/>
           </a:p>
@@ -12012,7 +12012,7 @@
                 <a:ea typeface="Calibri" pitchFamily="34" charset="-122"/>
                 <a:cs typeface="Calibri" pitchFamily="34" charset="-120"/>
               </a:rPr>
-              <a:t>Word Labs  •  wordlabs.app  •  Root: 'help' = to assist or support someone</a:t>
+              <a:t>Word Labs  •  wordlabs.app  •  Root: 'help' = assist, support, or aid</a:t>
             </a:r>
             <a:endParaRPr lang="en-US" sz="800" dirty="0"/>
           </a:p>
@@ -12151,7 +12151,7 @@
                 <a:ea typeface="Trebuchet MS" pitchFamily="34" charset="-122"/>
                 <a:cs typeface="Trebuchet MS" pitchFamily="34" charset="-120"/>
               </a:rPr>
-              <a:t>helping</a:t>
+              <a:t>helpless</a:t>
             </a:r>
             <a:endParaRPr lang="en-US" sz="2800" dirty="0"/>
           </a:p>
@@ -12352,11 +12352,11 @@
             </a:avLst>
           </a:prstGeom>
           <a:solidFill>
-            <a:srgbClr val="FCE7F3"/>
+            <a:srgbClr val="DDD6FE"/>
           </a:solidFill>
           <a:ln w="19050">
             <a:solidFill>
-              <a:srgbClr val="DB2777"/>
+              <a:srgbClr val="7C3AED"/>
             </a:solidFill>
             <a:prstDash val="solid"/>
           </a:ln>
@@ -12396,13 +12396,13 @@
             <a:r>
               <a:rPr lang="en-US" sz="1300" b="1" dirty="0">
                 <a:solidFill>
-                  <a:srgbClr val="9D174D"/>
+                  <a:srgbClr val="4C1D95"/>
                 </a:solidFill>
                 <a:latin typeface="Trebuchet MS" pitchFamily="34" charset="0"/>
                 <a:ea typeface="Trebuchet MS" pitchFamily="34" charset="-122"/>
                 <a:cs typeface="Trebuchet MS" pitchFamily="34" charset="-120"/>
               </a:rPr>
-              <a:t>ing</a:t>
+              <a:t>less</a:t>
             </a:r>
             <a:endParaRPr lang="en-US" sz="1300" dirty="0"/>
           </a:p>
@@ -12441,7 +12441,7 @@
                 <a:ea typeface="Calibri" pitchFamily="34" charset="-122"/>
                 <a:cs typeface="Calibri" pitchFamily="34" charset="-120"/>
               </a:rPr>
-              <a:t>ongoing action</a:t>
+              <a:t>without, lacking</a:t>
             </a:r>
             <a:endParaRPr lang="en-US" sz="850" dirty="0"/>
           </a:p>
@@ -12997,7 +12997,7 @@
                 <a:ea typeface="Calibri" pitchFamily="34" charset="-122"/>
                 <a:cs typeface="Calibri" pitchFamily="34" charset="-120"/>
               </a:rPr>
-              <a:t>Word Labs  •  wordlabs.app  •  Root: 'help' = to assist or support someone</a:t>
+              <a:t>Word Labs  •  wordlabs.app  •  Root: 'help' = assist, support, or aid</a:t>
             </a:r>
             <a:endParaRPr lang="en-US" sz="800" dirty="0"/>
           </a:p>
@@ -13136,7 +13136,7 @@
                 <a:ea typeface="Trebuchet MS" pitchFamily="34" charset="-122"/>
                 <a:cs typeface="Trebuchet MS" pitchFamily="34" charset="-120"/>
               </a:rPr>
-              <a:t>helping</a:t>
+              <a:t>helpless</a:t>
             </a:r>
             <a:endParaRPr lang="en-US" sz="2800" dirty="0"/>
           </a:p>
@@ -13337,11 +13337,11 @@
             </a:avLst>
           </a:prstGeom>
           <a:solidFill>
-            <a:srgbClr val="FCE7F3"/>
+            <a:srgbClr val="DDD6FE"/>
           </a:solidFill>
           <a:ln w="19050">
             <a:solidFill>
-              <a:srgbClr val="DB2777"/>
+              <a:srgbClr val="7C3AED"/>
             </a:solidFill>
             <a:prstDash val="solid"/>
           </a:ln>
@@ -13381,13 +13381,13 @@
             <a:r>
               <a:rPr lang="en-US" sz="1300" b="1" dirty="0">
                 <a:solidFill>
-                  <a:srgbClr val="9D174D"/>
+                  <a:srgbClr val="4C1D95"/>
                 </a:solidFill>
                 <a:latin typeface="Trebuchet MS" pitchFamily="34" charset="0"/>
                 <a:ea typeface="Trebuchet MS" pitchFamily="34" charset="-122"/>
                 <a:cs typeface="Trebuchet MS" pitchFamily="34" charset="-120"/>
               </a:rPr>
-              <a:t>ing</a:t>
+              <a:t>less</a:t>
             </a:r>
             <a:endParaRPr lang="en-US" sz="1300" dirty="0"/>
           </a:p>
@@ -13426,7 +13426,7 @@
                 <a:ea typeface="Calibri" pitchFamily="34" charset="-122"/>
                 <a:cs typeface="Calibri" pitchFamily="34" charset="-120"/>
               </a:rPr>
-              <a:t>ongoing action</a:t>
+              <a:t>without, lacking</a:t>
             </a:r>
             <a:endParaRPr lang="en-US" sz="850" dirty="0"/>
           </a:p>
@@ -13690,7 +13690,7 @@
                 <a:ea typeface="Trebuchet MS" pitchFamily="34" charset="-122"/>
                 <a:cs typeface="Trebuchet MS" pitchFamily="34" charset="-120"/>
               </a:rPr>
-              <a:t>ing</a:t>
+              <a:t>less</a:t>
             </a:r>
             <a:endParaRPr lang="en-US" sz="1400" dirty="0"/>
           </a:p>
@@ -14023,7 +14023,7 @@
                 <a:ea typeface="Calibri" pitchFamily="34" charset="-122"/>
                 <a:cs typeface="Calibri" pitchFamily="34" charset="-120"/>
               </a:rPr>
-              <a:t>Root 'help' — to assist or support someone</a:t>
+              <a:t>Root 'help' — assist, support, or aid</a:t>
             </a:r>
             <a:endParaRPr lang="en-US" sz="1600" dirty="0"/>
           </a:p>
@@ -14379,7 +14379,7 @@
                 <a:ea typeface="Calibri" pitchFamily="34" charset="-122"/>
                 <a:cs typeface="Calibri" pitchFamily="34" charset="-120"/>
               </a:rPr>
-              <a:t>Word Labs  •  wordlabs.app  •  Root: 'help' = to assist or support someone</a:t>
+              <a:t>Word Labs  •  wordlabs.app  •  Root: 'help' = assist, support, or aid</a:t>
             </a:r>
             <a:endParaRPr lang="en-US" sz="800" dirty="0"/>
           </a:p>
@@ -14518,7 +14518,7 @@
                 <a:ea typeface="Trebuchet MS" pitchFamily="34" charset="-122"/>
                 <a:cs typeface="Trebuchet MS" pitchFamily="34" charset="-120"/>
               </a:rPr>
-              <a:t>helping</a:t>
+              <a:t>helpless</a:t>
             </a:r>
             <a:endParaRPr lang="en-US" sz="2800" dirty="0"/>
           </a:p>
@@ -14719,11 +14719,11 @@
             </a:avLst>
           </a:prstGeom>
           <a:solidFill>
-            <a:srgbClr val="FCE7F3"/>
+            <a:srgbClr val="DDD6FE"/>
           </a:solidFill>
           <a:ln w="19050">
             <a:solidFill>
-              <a:srgbClr val="DB2777"/>
+              <a:srgbClr val="7C3AED"/>
             </a:solidFill>
             <a:prstDash val="solid"/>
           </a:ln>
@@ -14763,13 +14763,13 @@
             <a:r>
               <a:rPr lang="en-US" sz="1300" b="1" dirty="0">
                 <a:solidFill>
-                  <a:srgbClr val="9D174D"/>
+                  <a:srgbClr val="4C1D95"/>
                 </a:solidFill>
                 <a:latin typeface="Trebuchet MS" pitchFamily="34" charset="0"/>
                 <a:ea typeface="Trebuchet MS" pitchFamily="34" charset="-122"/>
                 <a:cs typeface="Trebuchet MS" pitchFamily="34" charset="-120"/>
               </a:rPr>
-              <a:t>ing</a:t>
+              <a:t>less</a:t>
             </a:r>
             <a:endParaRPr lang="en-US" sz="1300" dirty="0"/>
           </a:p>
@@ -14808,7 +14808,7 @@
                 <a:ea typeface="Calibri" pitchFamily="34" charset="-122"/>
                 <a:cs typeface="Calibri" pitchFamily="34" charset="-120"/>
               </a:rPr>
-              <a:t>ongoing action</a:t>
+              <a:t>without, lacking</a:t>
             </a:r>
             <a:endParaRPr lang="en-US" sz="850" dirty="0"/>
           </a:p>
@@ -15072,7 +15072,7 @@
                 <a:ea typeface="Trebuchet MS" pitchFamily="34" charset="-122"/>
                 <a:cs typeface="Trebuchet MS" pitchFamily="34" charset="-120"/>
               </a:rPr>
-              <a:t>ing</a:t>
+              <a:t>less</a:t>
             </a:r>
             <a:endParaRPr lang="en-US" sz="1400" dirty="0"/>
           </a:p>
@@ -15179,7 +15179,7 @@
         </p:nvSpPr>
         <p:spPr>
           <a:xfrm>
-            <a:off x="2254649" y="4169664"/>
+            <a:off x="2124837" y="4169664"/>
             <a:ext cx="685800" cy="475488"/>
           </a:xfrm>
           <a:prstGeom prst="rect">
@@ -15206,7 +15206,7 @@
         </p:nvSpPr>
         <p:spPr>
           <a:xfrm>
-            <a:off x="2254649" y="4169664"/>
+            <a:off x="2124837" y="4169664"/>
             <a:ext cx="685800" cy="475488"/>
           </a:xfrm>
           <a:prstGeom prst="rect">
@@ -15245,7 +15245,7 @@
         </p:nvSpPr>
         <p:spPr>
           <a:xfrm>
-            <a:off x="3293146" y="4169664"/>
+            <a:off x="3033522" y="4169664"/>
             <a:ext cx="685800" cy="475488"/>
           </a:xfrm>
           <a:prstGeom prst="rect">
@@ -15272,7 +15272,7 @@
         </p:nvSpPr>
         <p:spPr>
           <a:xfrm>
-            <a:off x="3293146" y="4169664"/>
+            <a:off x="3033522" y="4169664"/>
             <a:ext cx="685800" cy="475488"/>
           </a:xfrm>
           <a:prstGeom prst="rect">
@@ -15311,7 +15311,7 @@
         </p:nvSpPr>
         <p:spPr>
           <a:xfrm>
-            <a:off x="4331643" y="4169664"/>
+            <a:off x="3942207" y="4169664"/>
             <a:ext cx="685800" cy="475488"/>
           </a:xfrm>
           <a:prstGeom prst="rect">
@@ -15338,7 +15338,7 @@
         </p:nvSpPr>
         <p:spPr>
           <a:xfrm>
-            <a:off x="4331643" y="4169664"/>
+            <a:off x="3942207" y="4169664"/>
             <a:ext cx="685800" cy="475488"/>
           </a:xfrm>
           <a:prstGeom prst="rect">
@@ -15377,7 +15377,7 @@
         </p:nvSpPr>
         <p:spPr>
           <a:xfrm>
-            <a:off x="5370141" y="4169664"/>
+            <a:off x="4850892" y="4169664"/>
             <a:ext cx="685800" cy="475488"/>
           </a:xfrm>
           <a:prstGeom prst="rect">
@@ -15404,7 +15404,7 @@
         </p:nvSpPr>
         <p:spPr>
           <a:xfrm>
-            <a:off x="5370141" y="4169664"/>
+            <a:off x="4850892" y="4169664"/>
             <a:ext cx="685800" cy="475488"/>
           </a:xfrm>
           <a:prstGeom prst="rect">
@@ -15443,7 +15443,7 @@
         </p:nvSpPr>
         <p:spPr>
           <a:xfrm>
-            <a:off x="6408638" y="4169664"/>
+            <a:off x="5759577" y="4169664"/>
             <a:ext cx="685800" cy="475488"/>
           </a:xfrm>
           <a:prstGeom prst="rect">
@@ -15470,7 +15470,7 @@
         </p:nvSpPr>
         <p:spPr>
           <a:xfrm>
-            <a:off x="6408638" y="4169664"/>
+            <a:off x="5759577" y="4169664"/>
             <a:ext cx="685800" cy="475488"/>
           </a:xfrm>
           <a:prstGeom prst="rect">
@@ -15495,7 +15495,7 @@
                 <a:ea typeface="Trebuchet MS" pitchFamily="34" charset="-122"/>
                 <a:cs typeface="Trebuchet MS" pitchFamily="34" charset="-120"/>
               </a:rPr>
-              <a:t>i</a:t>
+              <a:t>l</a:t>
             </a:r>
             <a:endParaRPr lang="en-US" sz="900" dirty="0"/>
           </a:p>
@@ -15509,7 +15509,7 @@
         </p:nvSpPr>
         <p:spPr>
           <a:xfrm>
-            <a:off x="7447135" y="4169664"/>
+            <a:off x="6668262" y="4169664"/>
             <a:ext cx="685800" cy="475488"/>
           </a:xfrm>
           <a:prstGeom prst="rect">
@@ -15536,7 +15536,7 @@
         </p:nvSpPr>
         <p:spPr>
           <a:xfrm>
-            <a:off x="7447135" y="4169664"/>
+            <a:off x="6668262" y="4169664"/>
             <a:ext cx="685800" cy="475488"/>
           </a:xfrm>
           <a:prstGeom prst="rect">
@@ -15561,7 +15561,73 @@
                 <a:ea typeface="Trebuchet MS" pitchFamily="34" charset="-122"/>
                 <a:cs typeface="Trebuchet MS" pitchFamily="34" charset="-120"/>
               </a:rPr>
-              <a:t>ng</a:t>
+              <a:t>e</a:t>
+            </a:r>
+            <a:endParaRPr lang="en-US" sz="900" dirty="0"/>
+          </a:p>
+        </p:txBody>
+      </p:sp>
+      <p:sp>
+        <p:nvSpPr>
+          <p:cNvPr id="45" name="Shape 43"/>
+          <p:cNvSpPr/>
+          <p:nvPr/>
+        </p:nvSpPr>
+        <p:spPr>
+          <a:xfrm>
+            <a:off x="7576947" y="4169664"/>
+            <a:ext cx="685800" cy="475488"/>
+          </a:xfrm>
+          <a:prstGeom prst="rect">
+            <a:avLst>
+              <a:gd name="adj" fmla="val 7692"/>
+            </a:avLst>
+          </a:prstGeom>
+          <a:solidFill>
+            <a:srgbClr val="FFFFFF"/>
+          </a:solidFill>
+          <a:ln w="12700">
+            <a:solidFill>
+              <a:srgbClr val="DB2777"/>
+            </a:solidFill>
+            <a:prstDash val="solid"/>
+          </a:ln>
+        </p:spPr>
+      </p:sp>
+      <p:sp>
+        <p:nvSpPr>
+          <p:cNvPr id="46" name="Text 44"/>
+          <p:cNvSpPr/>
+          <p:nvPr/>
+        </p:nvSpPr>
+        <p:spPr>
+          <a:xfrm>
+            <a:off x="7576947" y="4169664"/>
+            <a:ext cx="685800" cy="475488"/>
+          </a:xfrm>
+          <a:prstGeom prst="rect">
+            <a:avLst/>
+          </a:prstGeom>
+          <a:noFill/>
+          <a:ln/>
+        </p:spPr>
+        <p:txBody>
+          <a:bodyPr wrap="square" lIns="0" tIns="0" rIns="0" bIns="0" rtlCol="0" anchor="ctr"/>
+          <a:lstStyle/>
+          <a:p>
+            <a:pPr algn="ctr" indent="0" marL="0">
+              <a:buNone/>
+            </a:pPr>
+            <a:r>
+              <a:rPr lang="en-US" sz="900" b="1" dirty="0">
+                <a:solidFill>
+                  <a:srgbClr val="9D174D"/>
+                </a:solidFill>
+                <a:latin typeface="Trebuchet MS" pitchFamily="34" charset="0"/>
+                <a:ea typeface="Trebuchet MS" pitchFamily="34" charset="-122"/>
+                <a:cs typeface="Trebuchet MS" pitchFamily="34" charset="-120"/>
+              </a:rPr>
+              <a:t>ss</a:t>
             </a:r>
             <a:endParaRPr lang="en-US" sz="900" dirty="0"/>
           </a:p>
@@ -16135,7 +16201,7 @@
                 <a:ea typeface="Calibri" pitchFamily="34" charset="-122"/>
                 <a:cs typeface="Calibri" pitchFamily="34" charset="-120"/>
               </a:rPr>
-              <a:t>Word Labs  •  wordlabs.app  •  Root: 'help' = to assist or support someone</a:t>
+              <a:t>Word Labs  •  wordlabs.app  •  Root: 'help' = assist, support, or aid</a:t>
             </a:r>
             <a:endParaRPr lang="en-US" sz="800" dirty="0"/>
           </a:p>
@@ -16469,7 +16535,7 @@
                 <a:ea typeface="Trebuchet MS" pitchFamily="34" charset="-122"/>
                 <a:cs typeface="Trebuchet MS" pitchFamily="34" charset="-120"/>
               </a:rPr>
-              <a:t>1</a:t>
+              <a:t>2</a:t>
             </a:r>
             <a:pPr algn="ctr" indent="0" marL="0">
               <a:buNone/>
@@ -16483,7 +16549,7 @@
                 <a:ea typeface="Trebuchet MS" pitchFamily="34" charset="-122"/>
                 <a:cs typeface="Trebuchet MS" pitchFamily="34" charset="-120"/>
               </a:rPr>
-              <a:t>  punctuation mark</a:t>
+              <a:t>  punctuation marks</a:t>
             </a:r>
             <a:endParaRPr lang="en-US" sz="2800" dirty="0"/>
           </a:p>
@@ -16775,7 +16841,7 @@
                 <a:ea typeface="Calibri" pitchFamily="34" charset="-122"/>
                 <a:cs typeface="Calibri" pitchFamily="34" charset="-120"/>
               </a:rPr>
-              <a:t>Word Labs  •  wordlabs.app  •  Root: 'help' = to assist or support someone</a:t>
+              <a:t>Word Labs  •  wordlabs.app  •  Root: 'help' = assist, support, or aid</a:t>
             </a:r>
             <a:endParaRPr lang="en-US" sz="800" dirty="0"/>
           </a:p>
@@ -16904,7 +16970,7 @@
                 <a:ea typeface="Calibri" pitchFamily="34" charset="-122"/>
                 <a:cs typeface="Calibri" pitchFamily="34" charset="-120"/>
               </a:rPr>
-              <a:t>unhelpful</a:t>
+              <a:t>helpfulness</a:t>
             </a:r>
             <a:pPr algn="l" indent="0" marL="0">
               <a:buNone/>
@@ -16918,7 +16984,7 @@
                 <a:ea typeface="Calibri" pitchFamily="34" charset="-122"/>
                 <a:cs typeface="Calibri" pitchFamily="34" charset="-120"/>
               </a:rPr>
-              <a:t> student refused to join in, but the </a:t>
+              <a:t> of the volunteers was clear; the </a:t>
             </a:r>
             <a:pPr algn="l" indent="0" marL="0">
               <a:buNone/>
@@ -16935,7 +17001,7 @@
                 <a:ea typeface="Calibri" pitchFamily="34" charset="-122"/>
                 <a:cs typeface="Calibri" pitchFamily="34" charset="-120"/>
               </a:rPr>
-              <a:t>helpers</a:t>
+              <a:t>helper</a:t>
             </a:r>
             <a:pPr algn="l" indent="0" marL="0">
               <a:buNone/>
@@ -16949,7 +17015,7 @@
                 <a:ea typeface="Calibri" pitchFamily="34" charset="-122"/>
                 <a:cs typeface="Calibri" pitchFamily="34" charset="-120"/>
               </a:rPr>
-              <a:t> worked together cheerfully and </a:t>
+              <a:t> worked tirelessly, yet the </a:t>
             </a:r>
             <a:pPr algn="l" indent="0" marL="0">
               <a:buNone/>
@@ -16966,7 +17032,7 @@
                 <a:ea typeface="Calibri" pitchFamily="34" charset="-122"/>
                 <a:cs typeface="Calibri" pitchFamily="34" charset="-120"/>
               </a:rPr>
-              <a:t>helpfully</a:t>
+              <a:t>unhelpful</a:t>
             </a:r>
             <a:pPr algn="l" indent="0" marL="0">
               <a:buNone/>
@@ -16980,7 +17046,7 @@
                 <a:ea typeface="Calibri" pitchFamily="34" charset="-122"/>
                 <a:cs typeface="Calibri" pitchFamily="34" charset="-120"/>
               </a:rPr>
-              <a:t>.</a:t>
+              <a:t> attitude of one person slowed everything down.</a:t>
             </a:r>
             <a:endParaRPr lang="en-US" sz="1800" dirty="0"/>
           </a:p>
@@ -17135,7 +17201,7 @@
                 <a:ea typeface="Trebuchet MS" pitchFamily="34" charset="-122"/>
                 <a:cs typeface="Trebuchet MS" pitchFamily="34" charset="-120"/>
               </a:rPr>
-              <a:t>unhelpful</a:t>
+              <a:t>helpfulness</a:t>
             </a:r>
             <a:endParaRPr lang="en-US" sz="1400" dirty="0"/>
           </a:p>
@@ -17263,7 +17329,7 @@
                 <a:ea typeface="Trebuchet MS" pitchFamily="34" charset="-122"/>
                 <a:cs typeface="Trebuchet MS" pitchFamily="34" charset="-120"/>
               </a:rPr>
-              <a:t>helpers</a:t>
+              <a:t>helper</a:t>
             </a:r>
             <a:endParaRPr lang="en-US" sz="1400" dirty="0"/>
           </a:p>
@@ -17391,7 +17457,7 @@
                 <a:ea typeface="Trebuchet MS" pitchFamily="34" charset="-122"/>
                 <a:cs typeface="Trebuchet MS" pitchFamily="34" charset="-120"/>
               </a:rPr>
-              <a:t>helpfully</a:t>
+              <a:t>unhelpful</a:t>
             </a:r>
             <a:endParaRPr lang="en-US" sz="1400" dirty="0"/>
           </a:p>
@@ -17722,7 +17788,7 @@
                 <a:ea typeface="Calibri" pitchFamily="34" charset="-122"/>
                 <a:cs typeface="Calibri" pitchFamily="34" charset="-120"/>
               </a:rPr>
-              <a:t>Word Labs  •  wordlabs.app  •  Root: 'help' = to assist or support someone</a:t>
+              <a:t>Word Labs  •  wordlabs.app  •  Root: 'help' = assist, support, or aid</a:t>
             </a:r>
             <a:endParaRPr lang="en-US" sz="800" dirty="0"/>
           </a:p>
@@ -17861,7 +17927,7 @@
                 <a:ea typeface="Trebuchet MS" pitchFamily="34" charset="-122"/>
                 <a:cs typeface="Trebuchet MS" pitchFamily="34" charset="-120"/>
               </a:rPr>
-              <a:t>unhelpful</a:t>
+              <a:t>helpfulness</a:t>
             </a:r>
             <a:endParaRPr lang="en-US" sz="2800" dirty="0"/>
           </a:p>
@@ -18549,7 +18615,7 @@
                 <a:ea typeface="Calibri" pitchFamily="34" charset="-122"/>
                 <a:cs typeface="Calibri" pitchFamily="34" charset="-120"/>
               </a:rPr>
-              <a:t>Word Labs  •  wordlabs.app  •  Root: 'help' = to assist or support someone</a:t>
+              <a:t>Word Labs  •  wordlabs.app  •  Root: 'help' = assist, support, or aid</a:t>
             </a:r>
             <a:endParaRPr lang="en-US" sz="800" dirty="0"/>
           </a:p>
@@ -18688,7 +18754,7 @@
                 <a:ea typeface="Trebuchet MS" pitchFamily="34" charset="-122"/>
                 <a:cs typeface="Trebuchet MS" pitchFamily="34" charset="-120"/>
               </a:rPr>
-              <a:t>unhelpful</a:t>
+              <a:t>helpfulness</a:t>
             </a:r>
             <a:endParaRPr lang="en-US" sz="2800" dirty="0"/>
           </a:p>
@@ -18777,11 +18843,11 @@
             </a:avLst>
           </a:prstGeom>
           <a:solidFill>
-            <a:srgbClr val="DDD6FE"/>
+            <a:srgbClr val="CCFBF1"/>
           </a:solidFill>
           <a:ln w="19050">
             <a:solidFill>
-              <a:srgbClr val="7C3AED"/>
+              <a:srgbClr val="0D9488"/>
             </a:solidFill>
             <a:prstDash val="solid"/>
           </a:ln>
@@ -18821,13 +18887,13 @@
             <a:r>
               <a:rPr lang="en-US" sz="1300" b="1" dirty="0">
                 <a:solidFill>
-                  <a:srgbClr val="4C1D95"/>
+                  <a:srgbClr val="0F766E"/>
                 </a:solidFill>
                 <a:latin typeface="Trebuchet MS" pitchFamily="34" charset="0"/>
                 <a:ea typeface="Trebuchet MS" pitchFamily="34" charset="-122"/>
                 <a:cs typeface="Trebuchet MS" pitchFamily="34" charset="-120"/>
               </a:rPr>
-              <a:t>un</a:t>
+              <a:t>help</a:t>
             </a:r>
             <a:endParaRPr lang="en-US" sz="1300" dirty="0"/>
           </a:p>
@@ -18866,7 +18932,7 @@
                 <a:ea typeface="Calibri" pitchFamily="34" charset="-122"/>
                 <a:cs typeface="Calibri" pitchFamily="34" charset="-120"/>
               </a:rPr>
-              <a:t>not, opposite of</a:t>
+              <a:t>to assist or support</a:t>
             </a:r>
             <a:endParaRPr lang="en-US" sz="850" dirty="0"/>
           </a:p>
@@ -18889,11 +18955,11 @@
             </a:avLst>
           </a:prstGeom>
           <a:solidFill>
-            <a:srgbClr val="CCFBF1"/>
+            <a:srgbClr val="FCE7F3"/>
           </a:solidFill>
           <a:ln w="19050">
             <a:solidFill>
-              <a:srgbClr val="0D9488"/>
+              <a:srgbClr val="DB2777"/>
             </a:solidFill>
             <a:prstDash val="solid"/>
           </a:ln>
@@ -18933,13 +18999,13 @@
             <a:r>
               <a:rPr lang="en-US" sz="1300" b="1" dirty="0">
                 <a:solidFill>
-                  <a:srgbClr val="0F766E"/>
+                  <a:srgbClr val="9D174D"/>
                 </a:solidFill>
                 <a:latin typeface="Trebuchet MS" pitchFamily="34" charset="0"/>
                 <a:ea typeface="Trebuchet MS" pitchFamily="34" charset="-122"/>
                 <a:cs typeface="Trebuchet MS" pitchFamily="34" charset="-120"/>
               </a:rPr>
-              <a:t>help</a:t>
+              <a:t>ful</a:t>
             </a:r>
             <a:endParaRPr lang="en-US" sz="1300" dirty="0"/>
           </a:p>
@@ -18978,7 +19044,7 @@
                 <a:ea typeface="Calibri" pitchFamily="34" charset="-122"/>
                 <a:cs typeface="Calibri" pitchFamily="34" charset="-120"/>
               </a:rPr>
-              <a:t>to assist or support</a:t>
+              <a:t>full of, having the quality of</a:t>
             </a:r>
             <a:endParaRPr lang="en-US" sz="850" dirty="0"/>
           </a:p>
@@ -19051,7 +19117,7 @@
                 <a:ea typeface="Trebuchet MS" pitchFamily="34" charset="-122"/>
                 <a:cs typeface="Trebuchet MS" pitchFamily="34" charset="-120"/>
               </a:rPr>
-              <a:t>ful</a:t>
+              <a:t>ness</a:t>
             </a:r>
             <a:endParaRPr lang="en-US" sz="1300" dirty="0"/>
           </a:p>
@@ -19090,7 +19156,7 @@
                 <a:ea typeface="Calibri" pitchFamily="34" charset="-122"/>
                 <a:cs typeface="Calibri" pitchFamily="34" charset="-120"/>
               </a:rPr>
-              <a:t>full of, having the quality of</a:t>
+              <a:t>the state or quality of</a:t>
             </a:r>
             <a:endParaRPr lang="en-US" sz="850" dirty="0"/>
           </a:p>
@@ -19646,7 +19712,7 @@
                 <a:ea typeface="Calibri" pitchFamily="34" charset="-122"/>
                 <a:cs typeface="Calibri" pitchFamily="34" charset="-120"/>
               </a:rPr>
-              <a:t>Word Labs  •  wordlabs.app  •  Root: 'help' = to assist or support someone</a:t>
+              <a:t>Word Labs  •  wordlabs.app  •  Root: 'help' = assist, support, or aid</a:t>
             </a:r>
             <a:endParaRPr lang="en-US" sz="800" dirty="0"/>
           </a:p>
@@ -19785,7 +19851,7 @@
                 <a:ea typeface="Trebuchet MS" pitchFamily="34" charset="-122"/>
                 <a:cs typeface="Trebuchet MS" pitchFamily="34" charset="-120"/>
               </a:rPr>
-              <a:t>unhelpful</a:t>
+              <a:t>helpfulness</a:t>
             </a:r>
             <a:endParaRPr lang="en-US" sz="2800" dirty="0"/>
           </a:p>
@@ -19874,11 +19940,11 @@
             </a:avLst>
           </a:prstGeom>
           <a:solidFill>
-            <a:srgbClr val="DDD6FE"/>
+            <a:srgbClr val="CCFBF1"/>
           </a:solidFill>
           <a:ln w="19050">
             <a:solidFill>
-              <a:srgbClr val="7C3AED"/>
+              <a:srgbClr val="0D9488"/>
             </a:solidFill>
             <a:prstDash val="solid"/>
           </a:ln>
@@ -19918,13 +19984,13 @@
             <a:r>
               <a:rPr lang="en-US" sz="1300" b="1" dirty="0">
                 <a:solidFill>
-                  <a:srgbClr val="4C1D95"/>
+                  <a:srgbClr val="0F766E"/>
                 </a:solidFill>
                 <a:latin typeface="Trebuchet MS" pitchFamily="34" charset="0"/>
                 <a:ea typeface="Trebuchet MS" pitchFamily="34" charset="-122"/>
                 <a:cs typeface="Trebuchet MS" pitchFamily="34" charset="-120"/>
               </a:rPr>
-              <a:t>un</a:t>
+              <a:t>help</a:t>
             </a:r>
             <a:endParaRPr lang="en-US" sz="1300" dirty="0"/>
           </a:p>
@@ -19963,7 +20029,7 @@
                 <a:ea typeface="Calibri" pitchFamily="34" charset="-122"/>
                 <a:cs typeface="Calibri" pitchFamily="34" charset="-120"/>
               </a:rPr>
-              <a:t>not, opposite of</a:t>
+              <a:t>to assist or support</a:t>
             </a:r>
             <a:endParaRPr lang="en-US" sz="850" dirty="0"/>
           </a:p>
@@ -19986,11 +20052,11 @@
             </a:avLst>
           </a:prstGeom>
           <a:solidFill>
-            <a:srgbClr val="CCFBF1"/>
+            <a:srgbClr val="FCE7F3"/>
           </a:solidFill>
           <a:ln w="19050">
             <a:solidFill>
-              <a:srgbClr val="0D9488"/>
+              <a:srgbClr val="DB2777"/>
             </a:solidFill>
             <a:prstDash val="solid"/>
           </a:ln>
@@ -20030,13 +20096,13 @@
             <a:r>
               <a:rPr lang="en-US" sz="1300" b="1" dirty="0">
                 <a:solidFill>
-                  <a:srgbClr val="0F766E"/>
+                  <a:srgbClr val="9D174D"/>
                 </a:solidFill>
                 <a:latin typeface="Trebuchet MS" pitchFamily="34" charset="0"/>
                 <a:ea typeface="Trebuchet MS" pitchFamily="34" charset="-122"/>
                 <a:cs typeface="Trebuchet MS" pitchFamily="34" charset="-120"/>
               </a:rPr>
-              <a:t>help</a:t>
+              <a:t>ful</a:t>
             </a:r>
             <a:endParaRPr lang="en-US" sz="1300" dirty="0"/>
           </a:p>
@@ -20075,7 +20141,7 @@
                 <a:ea typeface="Calibri" pitchFamily="34" charset="-122"/>
                 <a:cs typeface="Calibri" pitchFamily="34" charset="-120"/>
               </a:rPr>
-              <a:t>to assist or support</a:t>
+              <a:t>full of, having the quality of</a:t>
             </a:r>
             <a:endParaRPr lang="en-US" sz="850" dirty="0"/>
           </a:p>
@@ -20148,7 +20214,7 @@
                 <a:ea typeface="Trebuchet MS" pitchFamily="34" charset="-122"/>
                 <a:cs typeface="Trebuchet MS" pitchFamily="34" charset="-120"/>
               </a:rPr>
-              <a:t>ful</a:t>
+              <a:t>ness</a:t>
             </a:r>
             <a:endParaRPr lang="en-US" sz="1300" dirty="0"/>
           </a:p>
@@ -20187,7 +20253,7 @@
                 <a:ea typeface="Calibri" pitchFamily="34" charset="-122"/>
                 <a:cs typeface="Calibri" pitchFamily="34" charset="-120"/>
               </a:rPr>
-              <a:t>full of, having the quality of</a:t>
+              <a:t>the state or quality of</a:t>
             </a:r>
             <a:endParaRPr lang="en-US" sz="850" dirty="0"/>
           </a:p>
@@ -20346,7 +20412,7 @@
                 <a:ea typeface="Trebuchet MS" pitchFamily="34" charset="-122"/>
                 <a:cs typeface="Trebuchet MS" pitchFamily="34" charset="-120"/>
               </a:rPr>
-              <a:t>un</a:t>
+              <a:t>help</a:t>
             </a:r>
             <a:endParaRPr lang="en-US" sz="1400" dirty="0"/>
           </a:p>
@@ -20451,7 +20517,7 @@
                 <a:ea typeface="Trebuchet MS" pitchFamily="34" charset="-122"/>
                 <a:cs typeface="Trebuchet MS" pitchFamily="34" charset="-120"/>
               </a:rPr>
-              <a:t>help</a:t>
+              <a:t>ful</a:t>
             </a:r>
             <a:endParaRPr lang="en-US" sz="1400" dirty="0"/>
           </a:p>
@@ -20556,7 +20622,7 @@
                 <a:ea typeface="Trebuchet MS" pitchFamily="34" charset="-122"/>
                 <a:cs typeface="Trebuchet MS" pitchFamily="34" charset="-120"/>
               </a:rPr>
-              <a:t>ful</a:t>
+              <a:t>ness</a:t>
             </a:r>
             <a:endParaRPr lang="en-US" sz="1400" dirty="0"/>
           </a:p>
@@ -20980,7 +21046,7 @@
                 <a:ea typeface="Calibri" pitchFamily="34" charset="-122"/>
                 <a:cs typeface="Calibri" pitchFamily="34" charset="-120"/>
               </a:rPr>
-              <a:t>Word Labs  •  wordlabs.app  •  Root: 'help' = to assist or support someone</a:t>
+              <a:t>Word Labs  •  wordlabs.app  •  Root: 'help' = assist, support, or aid</a:t>
             </a:r>
             <a:endParaRPr lang="en-US" sz="800" dirty="0"/>
           </a:p>
@@ -21119,7 +21185,7 @@
                 <a:ea typeface="Trebuchet MS" pitchFamily="34" charset="-122"/>
                 <a:cs typeface="Trebuchet MS" pitchFamily="34" charset="-120"/>
               </a:rPr>
-              <a:t>unhelpful</a:t>
+              <a:t>helpfulness</a:t>
             </a:r>
             <a:endParaRPr lang="en-US" sz="2800" dirty="0"/>
           </a:p>
@@ -21208,11 +21274,11 @@
             </a:avLst>
           </a:prstGeom>
           <a:solidFill>
-            <a:srgbClr val="DDD6FE"/>
+            <a:srgbClr val="CCFBF1"/>
           </a:solidFill>
           <a:ln w="19050">
             <a:solidFill>
-              <a:srgbClr val="7C3AED"/>
+              <a:srgbClr val="0D9488"/>
             </a:solidFill>
             <a:prstDash val="solid"/>
           </a:ln>
@@ -21252,13 +21318,13 @@
             <a:r>
               <a:rPr lang="en-US" sz="1300" b="1" dirty="0">
                 <a:solidFill>
-                  <a:srgbClr val="4C1D95"/>
+                  <a:srgbClr val="0F766E"/>
                 </a:solidFill>
                 <a:latin typeface="Trebuchet MS" pitchFamily="34" charset="0"/>
                 <a:ea typeface="Trebuchet MS" pitchFamily="34" charset="-122"/>
                 <a:cs typeface="Trebuchet MS" pitchFamily="34" charset="-120"/>
               </a:rPr>
-              <a:t>un</a:t>
+              <a:t>help</a:t>
             </a:r>
             <a:endParaRPr lang="en-US" sz="1300" dirty="0"/>
           </a:p>
@@ -21297,7 +21363,7 @@
                 <a:ea typeface="Calibri" pitchFamily="34" charset="-122"/>
                 <a:cs typeface="Calibri" pitchFamily="34" charset="-120"/>
               </a:rPr>
-              <a:t>not, opposite of</a:t>
+              <a:t>to assist or support</a:t>
             </a:r>
             <a:endParaRPr lang="en-US" sz="850" dirty="0"/>
           </a:p>
@@ -21320,11 +21386,11 @@
             </a:avLst>
           </a:prstGeom>
           <a:solidFill>
-            <a:srgbClr val="CCFBF1"/>
+            <a:srgbClr val="FCE7F3"/>
           </a:solidFill>
           <a:ln w="19050">
             <a:solidFill>
-              <a:srgbClr val="0D9488"/>
+              <a:srgbClr val="DB2777"/>
             </a:solidFill>
             <a:prstDash val="solid"/>
           </a:ln>
@@ -21364,13 +21430,13 @@
             <a:r>
               <a:rPr lang="en-US" sz="1300" b="1" dirty="0">
                 <a:solidFill>
-                  <a:srgbClr val="0F766E"/>
+                  <a:srgbClr val="9D174D"/>
                 </a:solidFill>
                 <a:latin typeface="Trebuchet MS" pitchFamily="34" charset="0"/>
                 <a:ea typeface="Trebuchet MS" pitchFamily="34" charset="-122"/>
                 <a:cs typeface="Trebuchet MS" pitchFamily="34" charset="-120"/>
               </a:rPr>
-              <a:t>help</a:t>
+              <a:t>ful</a:t>
             </a:r>
             <a:endParaRPr lang="en-US" sz="1300" dirty="0"/>
           </a:p>
@@ -21409,7 +21475,7 @@
                 <a:ea typeface="Calibri" pitchFamily="34" charset="-122"/>
                 <a:cs typeface="Calibri" pitchFamily="34" charset="-120"/>
               </a:rPr>
-              <a:t>to assist or support</a:t>
+              <a:t>full of, having the quality of</a:t>
             </a:r>
             <a:endParaRPr lang="en-US" sz="850" dirty="0"/>
           </a:p>
@@ -21482,7 +21548,7 @@
                 <a:ea typeface="Trebuchet MS" pitchFamily="34" charset="-122"/>
                 <a:cs typeface="Trebuchet MS" pitchFamily="34" charset="-120"/>
               </a:rPr>
-              <a:t>ful</a:t>
+              <a:t>ness</a:t>
             </a:r>
             <a:endParaRPr lang="en-US" sz="1300" dirty="0"/>
           </a:p>
@@ -21521,7 +21587,7 @@
                 <a:ea typeface="Calibri" pitchFamily="34" charset="-122"/>
                 <a:cs typeface="Calibri" pitchFamily="34" charset="-120"/>
               </a:rPr>
-              <a:t>full of, having the quality of</a:t>
+              <a:t>the state or quality of</a:t>
             </a:r>
             <a:endParaRPr lang="en-US" sz="850" dirty="0"/>
           </a:p>
@@ -21680,7 +21746,7 @@
                 <a:ea typeface="Trebuchet MS" pitchFamily="34" charset="-122"/>
                 <a:cs typeface="Trebuchet MS" pitchFamily="34" charset="-120"/>
               </a:rPr>
-              <a:t>un</a:t>
+              <a:t>help</a:t>
             </a:r>
             <a:endParaRPr lang="en-US" sz="1400" dirty="0"/>
           </a:p>
@@ -21785,7 +21851,7 @@
                 <a:ea typeface="Trebuchet MS" pitchFamily="34" charset="-122"/>
                 <a:cs typeface="Trebuchet MS" pitchFamily="34" charset="-120"/>
               </a:rPr>
-              <a:t>help</a:t>
+              <a:t>ful</a:t>
             </a:r>
             <a:endParaRPr lang="en-US" sz="1400" dirty="0"/>
           </a:p>
@@ -21890,7 +21956,7 @@
                 <a:ea typeface="Trebuchet MS" pitchFamily="34" charset="-122"/>
                 <a:cs typeface="Trebuchet MS" pitchFamily="34" charset="-120"/>
               </a:rPr>
-              <a:t>ful</a:t>
+              <a:t>ness</a:t>
             </a:r>
             <a:endParaRPr lang="en-US" sz="1400" dirty="0"/>
           </a:p>
@@ -21997,8 +22063,8 @@
         </p:nvSpPr>
         <p:spPr>
           <a:xfrm>
-            <a:off x="1951330" y="4169664"/>
-            <a:ext cx="676656" cy="475488"/>
+            <a:off x="1951828" y="4169664"/>
+            <a:ext cx="603504" cy="475488"/>
           </a:xfrm>
           <a:prstGeom prst="rect">
             <a:avLst>
@@ -22024,8 +22090,8 @@
         </p:nvSpPr>
         <p:spPr>
           <a:xfrm>
-            <a:off x="1951330" y="4169664"/>
-            <a:ext cx="676656" cy="475488"/>
+            <a:off x="1951828" y="4169664"/>
+            <a:ext cx="603504" cy="475488"/>
           </a:xfrm>
           <a:prstGeom prst="rect">
             <a:avLst/>
@@ -22049,7 +22115,7 @@
                 <a:ea typeface="Trebuchet MS" pitchFamily="34" charset="-122"/>
                 <a:cs typeface="Trebuchet MS" pitchFamily="34" charset="-120"/>
               </a:rPr>
-              <a:t>u</a:t>
+              <a:t>h</a:t>
             </a:r>
             <a:endParaRPr lang="en-US" sz="900" dirty="0"/>
           </a:p>
@@ -22063,8 +22129,8 @@
         </p:nvSpPr>
         <p:spPr>
           <a:xfrm>
-            <a:off x="2677363" y="4169664"/>
-            <a:ext cx="676656" cy="475488"/>
+            <a:off x="2605209" y="4169664"/>
+            <a:ext cx="603504" cy="475488"/>
           </a:xfrm>
           <a:prstGeom prst="rect">
             <a:avLst>
@@ -22090,8 +22156,8 @@
         </p:nvSpPr>
         <p:spPr>
           <a:xfrm>
-            <a:off x="2677363" y="4169664"/>
-            <a:ext cx="676656" cy="475488"/>
+            <a:off x="2605209" y="4169664"/>
+            <a:ext cx="603504" cy="475488"/>
           </a:xfrm>
           <a:prstGeom prst="rect">
             <a:avLst/>
@@ -22115,7 +22181,7 @@
                 <a:ea typeface="Trebuchet MS" pitchFamily="34" charset="-122"/>
                 <a:cs typeface="Trebuchet MS" pitchFamily="34" charset="-120"/>
               </a:rPr>
-              <a:t>n</a:t>
+              <a:t>e</a:t>
             </a:r>
             <a:endParaRPr lang="en-US" sz="900" dirty="0"/>
           </a:p>
@@ -22129,8 +22195,8 @@
         </p:nvSpPr>
         <p:spPr>
           <a:xfrm>
-            <a:off x="3403397" y="4169664"/>
-            <a:ext cx="676656" cy="475488"/>
+            <a:off x="3258589" y="4169664"/>
+            <a:ext cx="603504" cy="475488"/>
           </a:xfrm>
           <a:prstGeom prst="rect">
             <a:avLst>
@@ -22156,8 +22222,8 @@
         </p:nvSpPr>
         <p:spPr>
           <a:xfrm>
-            <a:off x="3403397" y="4169664"/>
-            <a:ext cx="676656" cy="475488"/>
+            <a:off x="3258589" y="4169664"/>
+            <a:ext cx="603504" cy="475488"/>
           </a:xfrm>
           <a:prstGeom prst="rect">
             <a:avLst/>
@@ -22181,7 +22247,7 @@
                 <a:ea typeface="Trebuchet MS" pitchFamily="34" charset="-122"/>
                 <a:cs typeface="Trebuchet MS" pitchFamily="34" charset="-120"/>
               </a:rPr>
-              <a:t>h</a:t>
+              <a:t>l</a:t>
             </a:r>
             <a:endParaRPr lang="en-US" sz="900" dirty="0"/>
           </a:p>
@@ -22195,8 +22261,8 @@
         </p:nvSpPr>
         <p:spPr>
           <a:xfrm>
-            <a:off x="4129430" y="4169664"/>
-            <a:ext cx="676656" cy="475488"/>
+            <a:off x="3911969" y="4169664"/>
+            <a:ext cx="603504" cy="475488"/>
           </a:xfrm>
           <a:prstGeom prst="rect">
             <a:avLst>
@@ -22222,8 +22288,8 @@
         </p:nvSpPr>
         <p:spPr>
           <a:xfrm>
-            <a:off x="4129430" y="4169664"/>
-            <a:ext cx="676656" cy="475488"/>
+            <a:off x="3911969" y="4169664"/>
+            <a:ext cx="603504" cy="475488"/>
           </a:xfrm>
           <a:prstGeom prst="rect">
             <a:avLst/>
@@ -22247,7 +22313,7 @@
                 <a:ea typeface="Trebuchet MS" pitchFamily="34" charset="-122"/>
                 <a:cs typeface="Trebuchet MS" pitchFamily="34" charset="-120"/>
               </a:rPr>
-              <a:t>e</a:t>
+              <a:t>p</a:t>
             </a:r>
             <a:endParaRPr lang="en-US" sz="900" dirty="0"/>
           </a:p>
@@ -22261,8 +22327,8 @@
         </p:nvSpPr>
         <p:spPr>
           <a:xfrm>
-            <a:off x="4855464" y="4169664"/>
-            <a:ext cx="676656" cy="475488"/>
+            <a:off x="4565350" y="4169664"/>
+            <a:ext cx="603504" cy="475488"/>
           </a:xfrm>
           <a:prstGeom prst="rect">
             <a:avLst>
@@ -22288,8 +22354,8 @@
         </p:nvSpPr>
         <p:spPr>
           <a:xfrm>
-            <a:off x="4855464" y="4169664"/>
-            <a:ext cx="676656" cy="475488"/>
+            <a:off x="4565350" y="4169664"/>
+            <a:ext cx="603504" cy="475488"/>
           </a:xfrm>
           <a:prstGeom prst="rect">
             <a:avLst/>
@@ -22313,7 +22379,7 @@
                 <a:ea typeface="Trebuchet MS" pitchFamily="34" charset="-122"/>
                 <a:cs typeface="Trebuchet MS" pitchFamily="34" charset="-120"/>
               </a:rPr>
-              <a:t>l</a:t>
+              <a:t>f</a:t>
             </a:r>
             <a:endParaRPr lang="en-US" sz="900" dirty="0"/>
           </a:p>
@@ -22327,8 +22393,8 @@
         </p:nvSpPr>
         <p:spPr>
           <a:xfrm>
-            <a:off x="5581498" y="4169664"/>
-            <a:ext cx="676656" cy="475488"/>
+            <a:off x="5218730" y="4169664"/>
+            <a:ext cx="603504" cy="475488"/>
           </a:xfrm>
           <a:prstGeom prst="rect">
             <a:avLst>
@@ -22354,8 +22420,8 @@
         </p:nvSpPr>
         <p:spPr>
           <a:xfrm>
-            <a:off x="5581498" y="4169664"/>
-            <a:ext cx="676656" cy="475488"/>
+            <a:off x="5218730" y="4169664"/>
+            <a:ext cx="603504" cy="475488"/>
           </a:xfrm>
           <a:prstGeom prst="rect">
             <a:avLst/>
@@ -22379,7 +22445,7 @@
                 <a:ea typeface="Trebuchet MS" pitchFamily="34" charset="-122"/>
                 <a:cs typeface="Trebuchet MS" pitchFamily="34" charset="-120"/>
               </a:rPr>
-              <a:t>p</a:t>
+              <a:t>u</a:t>
             </a:r>
             <a:endParaRPr lang="en-US" sz="900" dirty="0"/>
           </a:p>
@@ -22393,8 +22459,8 @@
         </p:nvSpPr>
         <p:spPr>
           <a:xfrm>
-            <a:off x="6307531" y="4169664"/>
-            <a:ext cx="676656" cy="475488"/>
+            <a:off x="5872111" y="4169664"/>
+            <a:ext cx="603504" cy="475488"/>
           </a:xfrm>
           <a:prstGeom prst="rect">
             <a:avLst>
@@ -22420,8 +22486,8 @@
         </p:nvSpPr>
         <p:spPr>
           <a:xfrm>
-            <a:off x="6307531" y="4169664"/>
-            <a:ext cx="676656" cy="475488"/>
+            <a:off x="5872111" y="4169664"/>
+            <a:ext cx="603504" cy="475488"/>
           </a:xfrm>
           <a:prstGeom prst="rect">
             <a:avLst/>
@@ -22445,7 +22511,7 @@
                 <a:ea typeface="Trebuchet MS" pitchFamily="34" charset="-122"/>
                 <a:cs typeface="Trebuchet MS" pitchFamily="34" charset="-120"/>
               </a:rPr>
-              <a:t>f</a:t>
+              <a:t>l</a:t>
             </a:r>
             <a:endParaRPr lang="en-US" sz="900" dirty="0"/>
           </a:p>
@@ -22459,8 +22525,8 @@
         </p:nvSpPr>
         <p:spPr>
           <a:xfrm>
-            <a:off x="7033565" y="4169664"/>
-            <a:ext cx="676656" cy="475488"/>
+            <a:off x="6525491" y="4169664"/>
+            <a:ext cx="603504" cy="475488"/>
           </a:xfrm>
           <a:prstGeom prst="rect">
             <a:avLst>
@@ -22486,8 +22552,8 @@
         </p:nvSpPr>
         <p:spPr>
           <a:xfrm>
-            <a:off x="7033565" y="4169664"/>
-            <a:ext cx="676656" cy="475488"/>
+            <a:off x="6525491" y="4169664"/>
+            <a:ext cx="603504" cy="475488"/>
           </a:xfrm>
           <a:prstGeom prst="rect">
             <a:avLst/>
@@ -22511,7 +22577,7 @@
                 <a:ea typeface="Trebuchet MS" pitchFamily="34" charset="-122"/>
                 <a:cs typeface="Trebuchet MS" pitchFamily="34" charset="-120"/>
               </a:rPr>
-              <a:t>u</a:t>
+              <a:t>n</a:t>
             </a:r>
             <a:endParaRPr lang="en-US" sz="900" dirty="0"/>
           </a:p>
@@ -22525,8 +22591,8 @@
         </p:nvSpPr>
         <p:spPr>
           <a:xfrm>
-            <a:off x="7759598" y="4169664"/>
-            <a:ext cx="676656" cy="475488"/>
+            <a:off x="7178871" y="4169664"/>
+            <a:ext cx="603504" cy="475488"/>
           </a:xfrm>
           <a:prstGeom prst="rect">
             <a:avLst>
@@ -22552,8 +22618,8 @@
         </p:nvSpPr>
         <p:spPr>
           <a:xfrm>
-            <a:off x="7759598" y="4169664"/>
-            <a:ext cx="676656" cy="475488"/>
+            <a:off x="7178871" y="4169664"/>
+            <a:ext cx="603504" cy="475488"/>
           </a:xfrm>
           <a:prstGeom prst="rect">
             <a:avLst/>
@@ -22577,7 +22643,73 @@
                 <a:ea typeface="Trebuchet MS" pitchFamily="34" charset="-122"/>
                 <a:cs typeface="Trebuchet MS" pitchFamily="34" charset="-120"/>
               </a:rPr>
-              <a:t>l</a:t>
+              <a:t>e</a:t>
+            </a:r>
+            <a:endParaRPr lang="en-US" sz="900" dirty="0"/>
+          </a:p>
+        </p:txBody>
+      </p:sp>
+      <p:sp>
+        <p:nvSpPr>
+          <p:cNvPr id="57" name="Shape 55"/>
+          <p:cNvSpPr/>
+          <p:nvPr/>
+        </p:nvSpPr>
+        <p:spPr>
+          <a:xfrm>
+            <a:off x="7832252" y="4169664"/>
+            <a:ext cx="603504" cy="475488"/>
+          </a:xfrm>
+          <a:prstGeom prst="rect">
+            <a:avLst>
+              <a:gd name="adj" fmla="val 7692"/>
+            </a:avLst>
+          </a:prstGeom>
+          <a:solidFill>
+            <a:srgbClr val="FFFFFF"/>
+          </a:solidFill>
+          <a:ln w="12700">
+            <a:solidFill>
+              <a:srgbClr val="DB2777"/>
+            </a:solidFill>
+            <a:prstDash val="solid"/>
+          </a:ln>
+        </p:spPr>
+      </p:sp>
+      <p:sp>
+        <p:nvSpPr>
+          <p:cNvPr id="58" name="Text 56"/>
+          <p:cNvSpPr/>
+          <p:nvPr/>
+        </p:nvSpPr>
+        <p:spPr>
+          <a:xfrm>
+            <a:off x="7832252" y="4169664"/>
+            <a:ext cx="603504" cy="475488"/>
+          </a:xfrm>
+          <a:prstGeom prst="rect">
+            <a:avLst/>
+          </a:prstGeom>
+          <a:noFill/>
+          <a:ln/>
+        </p:spPr>
+        <p:txBody>
+          <a:bodyPr wrap="square" lIns="0" tIns="0" rIns="0" bIns="0" rtlCol="0" anchor="ctr"/>
+          <a:lstStyle/>
+          <a:p>
+            <a:pPr algn="ctr" indent="0" marL="0">
+              <a:buNone/>
+            </a:pPr>
+            <a:r>
+              <a:rPr lang="en-US" sz="900" b="1" dirty="0">
+                <a:solidFill>
+                  <a:srgbClr val="9D174D"/>
+                </a:solidFill>
+                <a:latin typeface="Trebuchet MS" pitchFamily="34" charset="0"/>
+                <a:ea typeface="Trebuchet MS" pitchFamily="34" charset="-122"/>
+                <a:cs typeface="Trebuchet MS" pitchFamily="34" charset="-120"/>
+              </a:rPr>
+              <a:t>ss</a:t>
             </a:r>
             <a:endParaRPr lang="en-US" sz="900" dirty="0"/>
           </a:p>
@@ -22869,7 +23001,7 @@
                 <a:ea typeface="Calibri" pitchFamily="34" charset="-122"/>
                 <a:cs typeface="Calibri" pitchFamily="34" charset="-120"/>
               </a:rPr>
-              <a:t>Word Labs  •  wordlabs.app  •  Root: 'help' = to assist or support someone</a:t>
+              <a:t>Word Labs  •  wordlabs.app  •  Root: 'help' = assist, support, or aid</a:t>
             </a:r>
             <a:endParaRPr lang="en-US" sz="800" dirty="0"/>
           </a:p>
@@ -23008,7 +23140,7 @@
                 <a:ea typeface="Trebuchet MS" pitchFamily="34" charset="-122"/>
                 <a:cs typeface="Trebuchet MS" pitchFamily="34" charset="-120"/>
               </a:rPr>
-              <a:t>helpers</a:t>
+              <a:t>helper</a:t>
             </a:r>
             <a:endParaRPr lang="en-US" sz="2800" dirty="0"/>
           </a:p>
@@ -23696,7 +23828,7 @@
                 <a:ea typeface="Calibri" pitchFamily="34" charset="-122"/>
                 <a:cs typeface="Calibri" pitchFamily="34" charset="-120"/>
               </a:rPr>
-              <a:t>Word Labs  •  wordlabs.app  •  Root: 'help' = to assist or support someone</a:t>
+              <a:t>Word Labs  •  wordlabs.app  •  Root: 'help' = assist, support, or aid</a:t>
             </a:r>
             <a:endParaRPr lang="en-US" sz="800" dirty="0"/>
           </a:p>
@@ -23835,7 +23967,7 @@
                 <a:ea typeface="Trebuchet MS" pitchFamily="34" charset="-122"/>
                 <a:cs typeface="Trebuchet MS" pitchFamily="34" charset="-120"/>
               </a:rPr>
-              <a:t>helpers</a:t>
+              <a:t>helper</a:t>
             </a:r>
             <a:endParaRPr lang="en-US" sz="2800" dirty="0"/>
           </a:p>
@@ -23915,7 +24047,7 @@
         </p:nvSpPr>
         <p:spPr>
           <a:xfrm>
-            <a:off x="2221992" y="2258568"/>
+            <a:off x="2938272" y="2258568"/>
             <a:ext cx="1828800" cy="292608"/>
           </a:xfrm>
           <a:prstGeom prst="rect">
@@ -23949,7 +24081,7 @@
         </p:nvSpPr>
         <p:spPr>
           <a:xfrm>
-            <a:off x="2221992" y="2258568"/>
+            <a:off x="2938272" y="2258568"/>
             <a:ext cx="1828800" cy="292608"/>
           </a:xfrm>
           <a:prstGeom prst="rect">
@@ -23988,7 +24120,7 @@
         </p:nvSpPr>
         <p:spPr>
           <a:xfrm>
-            <a:off x="2221992" y="2569464"/>
+            <a:off x="2938272" y="2569464"/>
             <a:ext cx="1828800" cy="201168"/>
           </a:xfrm>
           <a:prstGeom prst="rect">
@@ -24027,7 +24159,7 @@
         </p:nvSpPr>
         <p:spPr>
           <a:xfrm>
-            <a:off x="4370832" y="2258568"/>
+            <a:off x="5803392" y="2258568"/>
             <a:ext cx="1828800" cy="292608"/>
           </a:xfrm>
           <a:prstGeom prst="rect">
@@ -24061,7 +24193,7 @@
         </p:nvSpPr>
         <p:spPr>
           <a:xfrm>
-            <a:off x="4370832" y="2258568"/>
+            <a:off x="5803392" y="2258568"/>
             <a:ext cx="1828800" cy="292608"/>
           </a:xfrm>
           <a:prstGeom prst="rect">
@@ -24100,7 +24232,7 @@
         </p:nvSpPr>
         <p:spPr>
           <a:xfrm>
-            <a:off x="4370832" y="2569464"/>
+            <a:off x="5803392" y="2569464"/>
             <a:ext cx="1828800" cy="201168"/>
           </a:xfrm>
           <a:prstGeom prst="rect">
@@ -24139,30 +24271,23 @@
         </p:nvSpPr>
         <p:spPr>
           <a:xfrm>
-            <a:off x="6519672" y="2258568"/>
-            <a:ext cx="1828800" cy="292608"/>
+            <a:off x="365760" y="3273552"/>
+            <a:ext cx="1371600" cy="658368"/>
           </a:xfrm>
           <a:prstGeom prst="rect">
             <a:avLst>
-              <a:gd name="adj" fmla="val 25000"/>
+              <a:gd name="adj" fmla="val 8333"/>
             </a:avLst>
           </a:prstGeom>
           <a:solidFill>
-            <a:srgbClr val="FCE7F3"/>
-          </a:solidFill>
-          <a:ln w="19050">
-            <a:solidFill>
-              <a:srgbClr val="DB2777"/>
-            </a:solidFill>
-            <a:prstDash val="solid"/>
-          </a:ln>
-          <a:effectLst>
-            <a:outerShdw sx="100000" sy="100000" kx="0" ky="0" algn="bl" rotWithShape="0" blurRad="101600" dist="38100" dir="8100000">
-              <a:srgbClr val="000000">
-                <a:alpha val="12000"/>
-              </a:srgbClr>
-            </a:outerShdw>
-          </a:effectLst>
+            <a:srgbClr val="E2E8F0"/>
+          </a:solidFill>
+          <a:ln w="12700">
+            <a:solidFill>
+              <a:srgbClr val="E2E8F0"/>
+            </a:solidFill>
+            <a:prstDash val="solid"/>
+          </a:ln>
         </p:spPr>
       </p:sp>
       <p:sp>
@@ -24173,90 +24298,117 @@
         </p:nvSpPr>
         <p:spPr>
           <a:xfrm>
-            <a:off x="6519672" y="2258568"/>
-            <a:ext cx="1828800" cy="292608"/>
-          </a:xfrm>
-          <a:prstGeom prst="rect">
-            <a:avLst/>
-          </a:prstGeom>
-          <a:noFill/>
-          <a:ln/>
-        </p:spPr>
-        <p:txBody>
-          <a:bodyPr wrap="square" lIns="0" tIns="0" rIns="0" bIns="0" rtlCol="0" anchor="ctr"/>
-          <a:lstStyle/>
-          <a:p>
-            <a:pPr algn="ctr" indent="0" marL="0">
-              <a:buNone/>
-            </a:pPr>
-            <a:r>
-              <a:rPr lang="en-US" sz="1300" b="1" dirty="0">
-                <a:solidFill>
-                  <a:srgbClr val="9D174D"/>
+            <a:off x="365760" y="3273552"/>
+            <a:ext cx="1371600" cy="658368"/>
+          </a:xfrm>
+          <a:prstGeom prst="rect">
+            <a:avLst/>
+          </a:prstGeom>
+          <a:noFill/>
+          <a:ln/>
+        </p:spPr>
+        <p:txBody>
+          <a:bodyPr wrap="square" lIns="0" tIns="0" rIns="0" bIns="0" rtlCol="0" anchor="ctr"/>
+          <a:lstStyle/>
+          <a:p>
+            <a:pPr algn="ctr" indent="0" marL="0">
+              <a:buNone/>
+            </a:pPr>
+            <a:r>
+              <a:rPr lang="en-US" sz="1100" b="1" dirty="0">
+                <a:solidFill>
+                  <a:srgbClr val="475569"/>
                 </a:solidFill>
                 <a:latin typeface="Trebuchet MS" pitchFamily="34" charset="0"/>
                 <a:ea typeface="Trebuchet MS" pitchFamily="34" charset="-122"/>
                 <a:cs typeface="Trebuchet MS" pitchFamily="34" charset="-120"/>
               </a:rPr>
-              <a:t>s</a:t>
-            </a:r>
-            <a:endParaRPr lang="en-US" sz="1300" dirty="0"/>
-          </a:p>
-        </p:txBody>
-      </p:sp>
-      <p:sp>
-        <p:nvSpPr>
-          <p:cNvPr id="24" name="Text 22"/>
-          <p:cNvSpPr/>
-          <p:nvPr/>
-        </p:nvSpPr>
-        <p:spPr>
-          <a:xfrm>
-            <a:off x="6519672" y="2569464"/>
-            <a:ext cx="1828800" cy="201168"/>
-          </a:xfrm>
-          <a:prstGeom prst="rect">
-            <a:avLst/>
-          </a:prstGeom>
-          <a:noFill/>
-          <a:ln/>
-        </p:spPr>
-        <p:txBody>
-          <a:bodyPr wrap="square" lIns="0" tIns="0" rIns="0" bIns="0" rtlCol="0" anchor="t"/>
-          <a:lstStyle/>
-          <a:p>
-            <a:pPr algn="ctr" indent="0" marL="0">
-              <a:buNone/>
-            </a:pPr>
-            <a:r>
-              <a:rPr lang="en-US" sz="850" dirty="0">
-                <a:solidFill>
-                  <a:srgbClr val="475569"/>
+              <a:t>Syllables</a:t>
+            </a:r>
+            <a:endParaRPr lang="en-US" sz="1100" dirty="0"/>
+          </a:p>
+        </p:txBody>
+      </p:sp>
+      <p:sp>
+        <p:nvSpPr>
+          <p:cNvPr id="24" name="Shape 22"/>
+          <p:cNvSpPr/>
+          <p:nvPr/>
+        </p:nvSpPr>
+        <p:spPr>
+          <a:xfrm>
+            <a:off x="1874520" y="3273552"/>
+            <a:ext cx="6903720" cy="658368"/>
+          </a:xfrm>
+          <a:prstGeom prst="rect">
+            <a:avLst>
+              <a:gd name="adj" fmla="val 8333"/>
+            </a:avLst>
+          </a:prstGeom>
+          <a:solidFill>
+            <a:srgbClr val="F8FAFC"/>
+          </a:solidFill>
+          <a:ln w="12700">
+            <a:solidFill>
+              <a:srgbClr val="E2E8F0"/>
+            </a:solidFill>
+            <a:prstDash val="dash"/>
+          </a:ln>
+        </p:spPr>
+      </p:sp>
+      <p:sp>
+        <p:nvSpPr>
+          <p:cNvPr id="25" name="Text 23"/>
+          <p:cNvSpPr/>
+          <p:nvPr/>
+        </p:nvSpPr>
+        <p:spPr>
+          <a:xfrm>
+            <a:off x="1874520" y="3273552"/>
+            <a:ext cx="6903720" cy="658368"/>
+          </a:xfrm>
+          <a:prstGeom prst="rect">
+            <a:avLst/>
+          </a:prstGeom>
+          <a:noFill/>
+          <a:ln/>
+        </p:spPr>
+        <p:txBody>
+          <a:bodyPr wrap="square" rtlCol="0" anchor="ctr"/>
+          <a:lstStyle/>
+          <a:p>
+            <a:pPr algn="ctr" indent="0" marL="0">
+              <a:buNone/>
+            </a:pPr>
+            <a:r>
+              <a:rPr lang="en-US" sz="1100" i="1" dirty="0">
+                <a:solidFill>
+                  <a:srgbClr val="CBD5E1"/>
                 </a:solidFill>
                 <a:latin typeface="Calibri" pitchFamily="34" charset="0"/>
                 <a:ea typeface="Calibri" pitchFamily="34" charset="-122"/>
                 <a:cs typeface="Calibri" pitchFamily="34" charset="-120"/>
               </a:rPr>
-              <a:t>more than one</a:t>
-            </a:r>
-            <a:endParaRPr lang="en-US" sz="850" dirty="0"/>
-          </a:p>
-        </p:txBody>
-      </p:sp>
-      <p:sp>
-        <p:nvSpPr>
-          <p:cNvPr id="25" name="Shape 23"/>
-          <p:cNvSpPr/>
-          <p:nvPr/>
-        </p:nvSpPr>
-        <p:spPr>
-          <a:xfrm>
-            <a:off x="365760" y="3273552"/>
-            <a:ext cx="1371600" cy="658368"/>
+              <a:t>Write here...</a:t>
+            </a:r>
+            <a:endParaRPr lang="en-US" sz="1100" dirty="0"/>
+          </a:p>
+        </p:txBody>
+      </p:sp>
+      <p:sp>
+        <p:nvSpPr>
+          <p:cNvPr id="26" name="Shape 24"/>
+          <p:cNvSpPr/>
+          <p:nvPr/>
+        </p:nvSpPr>
+        <p:spPr>
+          <a:xfrm>
+            <a:off x="365760" y="4096512"/>
+            <a:ext cx="1371600" cy="804672"/>
           </a:xfrm>
           <a:prstGeom prst="rect">
             <a:avLst>
-              <a:gd name="adj" fmla="val 8333"/>
+              <a:gd name="adj" fmla="val 6818"/>
             </a:avLst>
           </a:prstGeom>
           <a:solidFill>
@@ -24272,14 +24424,14 @@
       </p:sp>
       <p:sp>
         <p:nvSpPr>
-          <p:cNvPr id="26" name="Text 24"/>
-          <p:cNvSpPr/>
-          <p:nvPr/>
-        </p:nvSpPr>
-        <p:spPr>
-          <a:xfrm>
-            <a:off x="365760" y="3273552"/>
-            <a:ext cx="1371600" cy="658368"/>
+          <p:cNvPr id="27" name="Text 25"/>
+          <p:cNvSpPr/>
+          <p:nvPr/>
+        </p:nvSpPr>
+        <p:spPr>
+          <a:xfrm>
+            <a:off x="365760" y="4096512"/>
+            <a:ext cx="1371600" cy="804672"/>
           </a:xfrm>
           <a:prstGeom prst="rect">
             <a:avLst/>
@@ -24303,7 +24455,7 @@
                 <a:ea typeface="Trebuchet MS" pitchFamily="34" charset="-122"/>
                 <a:cs typeface="Trebuchet MS" pitchFamily="34" charset="-120"/>
               </a:rPr>
-              <a:t>Syllables</a:t>
+              <a:t>Phonemes</a:t>
             </a:r>
             <a:endParaRPr lang="en-US" sz="1100" dirty="0"/>
           </a:p>
@@ -24311,80 +24463,14 @@
       </p:sp>
       <p:sp>
         <p:nvSpPr>
-          <p:cNvPr id="27" name="Shape 25"/>
-          <p:cNvSpPr/>
-          <p:nvPr/>
-        </p:nvSpPr>
-        <p:spPr>
-          <a:xfrm>
-            <a:off x="1874520" y="3273552"/>
-            <a:ext cx="6903720" cy="658368"/>
-          </a:xfrm>
-          <a:prstGeom prst="rect">
-            <a:avLst>
-              <a:gd name="adj" fmla="val 8333"/>
-            </a:avLst>
-          </a:prstGeom>
-          <a:solidFill>
-            <a:srgbClr val="F8FAFC"/>
-          </a:solidFill>
-          <a:ln w="12700">
-            <a:solidFill>
-              <a:srgbClr val="E2E8F0"/>
-            </a:solidFill>
-            <a:prstDash val="dash"/>
-          </a:ln>
-        </p:spPr>
-      </p:sp>
-      <p:sp>
-        <p:nvSpPr>
-          <p:cNvPr id="28" name="Text 26"/>
-          <p:cNvSpPr/>
-          <p:nvPr/>
-        </p:nvSpPr>
-        <p:spPr>
-          <a:xfrm>
-            <a:off x="1874520" y="3273552"/>
-            <a:ext cx="6903720" cy="658368"/>
-          </a:xfrm>
-          <a:prstGeom prst="rect">
-            <a:avLst/>
-          </a:prstGeom>
-          <a:noFill/>
-          <a:ln/>
-        </p:spPr>
-        <p:txBody>
-          <a:bodyPr wrap="square" rtlCol="0" anchor="ctr"/>
-          <a:lstStyle/>
-          <a:p>
-            <a:pPr algn="ctr" indent="0" marL="0">
-              <a:buNone/>
-            </a:pPr>
-            <a:r>
-              <a:rPr lang="en-US" sz="1100" i="1" dirty="0">
-                <a:solidFill>
-                  <a:srgbClr val="CBD5E1"/>
-                </a:solidFill>
-                <a:latin typeface="Calibri" pitchFamily="34" charset="0"/>
-                <a:ea typeface="Calibri" pitchFamily="34" charset="-122"/>
-                <a:cs typeface="Calibri" pitchFamily="34" charset="-120"/>
-              </a:rPr>
-              <a:t>Write here...</a:t>
-            </a:r>
-            <a:endParaRPr lang="en-US" sz="1100" dirty="0"/>
-          </a:p>
-        </p:txBody>
-      </p:sp>
-      <p:sp>
-        <p:nvSpPr>
-          <p:cNvPr id="29" name="Shape 27"/>
-          <p:cNvSpPr/>
-          <p:nvPr/>
-        </p:nvSpPr>
-        <p:spPr>
-          <a:xfrm>
-            <a:off x="365760" y="4096512"/>
-            <a:ext cx="1371600" cy="804672"/>
+          <p:cNvPr id="28" name="Shape 26"/>
+          <p:cNvSpPr/>
+          <p:nvPr/>
+        </p:nvSpPr>
+        <p:spPr>
+          <a:xfrm>
+            <a:off x="1874520" y="4096512"/>
+            <a:ext cx="6903720" cy="804672"/>
           </a:xfrm>
           <a:prstGeom prst="rect">
             <a:avLst>
@@ -24392,85 +24478,19 @@
             </a:avLst>
           </a:prstGeom>
           <a:solidFill>
-            <a:srgbClr val="E2E8F0"/>
+            <a:srgbClr val="F8FAFC"/>
           </a:solidFill>
           <a:ln w="12700">
             <a:solidFill>
               <a:srgbClr val="E2E8F0"/>
             </a:solidFill>
-            <a:prstDash val="solid"/>
-          </a:ln>
-        </p:spPr>
-      </p:sp>
-      <p:sp>
-        <p:nvSpPr>
-          <p:cNvPr id="30" name="Text 28"/>
-          <p:cNvSpPr/>
-          <p:nvPr/>
-        </p:nvSpPr>
-        <p:spPr>
-          <a:xfrm>
-            <a:off x="365760" y="4096512"/>
-            <a:ext cx="1371600" cy="804672"/>
-          </a:xfrm>
-          <a:prstGeom prst="rect">
-            <a:avLst/>
-          </a:prstGeom>
-          <a:noFill/>
-          <a:ln/>
-        </p:spPr>
-        <p:txBody>
-          <a:bodyPr wrap="square" lIns="0" tIns="0" rIns="0" bIns="0" rtlCol="0" anchor="ctr"/>
-          <a:lstStyle/>
-          <a:p>
-            <a:pPr algn="ctr" indent="0" marL="0">
-              <a:buNone/>
-            </a:pPr>
-            <a:r>
-              <a:rPr lang="en-US" sz="1100" b="1" dirty="0">
-                <a:solidFill>
-                  <a:srgbClr val="475569"/>
-                </a:solidFill>
-                <a:latin typeface="Trebuchet MS" pitchFamily="34" charset="0"/>
-                <a:ea typeface="Trebuchet MS" pitchFamily="34" charset="-122"/>
-                <a:cs typeface="Trebuchet MS" pitchFamily="34" charset="-120"/>
-              </a:rPr>
-              <a:t>Phonemes</a:t>
-            </a:r>
-            <a:endParaRPr lang="en-US" sz="1100" dirty="0"/>
-          </a:p>
-        </p:txBody>
-      </p:sp>
-      <p:sp>
-        <p:nvSpPr>
-          <p:cNvPr id="31" name="Shape 29"/>
-          <p:cNvSpPr/>
-          <p:nvPr/>
-        </p:nvSpPr>
-        <p:spPr>
-          <a:xfrm>
-            <a:off x="1874520" y="4096512"/>
-            <a:ext cx="6903720" cy="804672"/>
-          </a:xfrm>
-          <a:prstGeom prst="rect">
-            <a:avLst>
-              <a:gd name="adj" fmla="val 6818"/>
-            </a:avLst>
-          </a:prstGeom>
-          <a:solidFill>
-            <a:srgbClr val="F8FAFC"/>
-          </a:solidFill>
-          <a:ln w="12700">
-            <a:solidFill>
-              <a:srgbClr val="E2E8F0"/>
-            </a:solidFill>
             <a:prstDash val="dash"/>
           </a:ln>
         </p:spPr>
       </p:sp>
       <p:sp>
         <p:nvSpPr>
-          <p:cNvPr id="32" name="Text 30"/>
+          <p:cNvPr id="29" name="Text 27"/>
           <p:cNvSpPr/>
           <p:nvPr/>
         </p:nvSpPr>
@@ -24793,7 +24813,7 @@
                 <a:ea typeface="Calibri" pitchFamily="34" charset="-122"/>
                 <a:cs typeface="Calibri" pitchFamily="34" charset="-120"/>
               </a:rPr>
-              <a:t>Word Labs  •  wordlabs.app  •  Root: 'help' = to assist or support someone</a:t>
+              <a:t>Word Labs  •  wordlabs.app  •  Root: 'help' = assist, support, or aid</a:t>
             </a:r>
             <a:endParaRPr lang="en-US" sz="800" dirty="0"/>
           </a:p>
@@ -24866,7 +24886,7 @@
                 <a:ea typeface="Trebuchet MS" pitchFamily="34" charset="-122"/>
                 <a:cs typeface="Trebuchet MS" pitchFamily="34" charset="-120"/>
               </a:rPr>
-              <a:t>We are learning that the root 'help' means 'to assist or support someone'.</a:t>
+              <a:t>We are learning that the root 'help' means 'assist, support, or aid'.</a:t>
             </a:r>
             <a:endParaRPr lang="en-US" sz="2000" dirty="0"/>
           </a:p>
@@ -25512,7 +25532,7 @@
                 <a:ea typeface="Calibri" pitchFamily="34" charset="-122"/>
                 <a:cs typeface="Calibri" pitchFamily="34" charset="-120"/>
               </a:rPr>
-              <a:t>Word Labs  •  wordlabs.app  •  Root: 'help' = to assist or support someone</a:t>
+              <a:t>Word Labs  •  wordlabs.app  •  Root: 'help' = assist, support, or aid</a:t>
             </a:r>
             <a:endParaRPr lang="en-US" sz="800" dirty="0"/>
           </a:p>
@@ -25651,7 +25671,7 @@
                 <a:ea typeface="Trebuchet MS" pitchFamily="34" charset="-122"/>
                 <a:cs typeface="Trebuchet MS" pitchFamily="34" charset="-120"/>
               </a:rPr>
-              <a:t>helpers</a:t>
+              <a:t>helper</a:t>
             </a:r>
             <a:endParaRPr lang="en-US" sz="2800" dirty="0"/>
           </a:p>
@@ -25731,7 +25751,7 @@
         </p:nvSpPr>
         <p:spPr>
           <a:xfrm>
-            <a:off x="2221992" y="2258568"/>
+            <a:off x="2938272" y="2258568"/>
             <a:ext cx="1828800" cy="292608"/>
           </a:xfrm>
           <a:prstGeom prst="rect">
@@ -25765,7 +25785,7 @@
         </p:nvSpPr>
         <p:spPr>
           <a:xfrm>
-            <a:off x="2221992" y="2258568"/>
+            <a:off x="2938272" y="2258568"/>
             <a:ext cx="1828800" cy="292608"/>
           </a:xfrm>
           <a:prstGeom prst="rect">
@@ -25804,7 +25824,7 @@
         </p:nvSpPr>
         <p:spPr>
           <a:xfrm>
-            <a:off x="2221992" y="2569464"/>
+            <a:off x="2938272" y="2569464"/>
             <a:ext cx="1828800" cy="201168"/>
           </a:xfrm>
           <a:prstGeom prst="rect">
@@ -25843,7 +25863,7 @@
         </p:nvSpPr>
         <p:spPr>
           <a:xfrm>
-            <a:off x="4370832" y="2258568"/>
+            <a:off x="5803392" y="2258568"/>
             <a:ext cx="1828800" cy="292608"/>
           </a:xfrm>
           <a:prstGeom prst="rect">
@@ -25877,7 +25897,7 @@
         </p:nvSpPr>
         <p:spPr>
           <a:xfrm>
-            <a:off x="4370832" y="2258568"/>
+            <a:off x="5803392" y="2258568"/>
             <a:ext cx="1828800" cy="292608"/>
           </a:xfrm>
           <a:prstGeom prst="rect">
@@ -25916,7 +25936,7 @@
         </p:nvSpPr>
         <p:spPr>
           <a:xfrm>
-            <a:off x="4370832" y="2569464"/>
+            <a:off x="5803392" y="2569464"/>
             <a:ext cx="1828800" cy="201168"/>
           </a:xfrm>
           <a:prstGeom prst="rect">
@@ -25955,30 +25975,23 @@
         </p:nvSpPr>
         <p:spPr>
           <a:xfrm>
-            <a:off x="6519672" y="2258568"/>
-            <a:ext cx="1828800" cy="292608"/>
+            <a:off x="365760" y="3273552"/>
+            <a:ext cx="1371600" cy="658368"/>
           </a:xfrm>
           <a:prstGeom prst="rect">
             <a:avLst>
-              <a:gd name="adj" fmla="val 25000"/>
+              <a:gd name="adj" fmla="val 8333"/>
             </a:avLst>
           </a:prstGeom>
           <a:solidFill>
-            <a:srgbClr val="FCE7F3"/>
-          </a:solidFill>
-          <a:ln w="19050">
-            <a:solidFill>
-              <a:srgbClr val="DB2777"/>
-            </a:solidFill>
-            <a:prstDash val="solid"/>
-          </a:ln>
-          <a:effectLst>
-            <a:outerShdw sx="100000" sy="100000" kx="0" ky="0" algn="bl" rotWithShape="0" blurRad="101600" dist="38100" dir="8100000">
-              <a:srgbClr val="000000">
-                <a:alpha val="12000"/>
-              </a:srgbClr>
-            </a:outerShdw>
-          </a:effectLst>
+            <a:srgbClr val="E2E8F0"/>
+          </a:solidFill>
+          <a:ln w="12700">
+            <a:solidFill>
+              <a:srgbClr val="E2E8F0"/>
+            </a:solidFill>
+            <a:prstDash val="solid"/>
+          </a:ln>
         </p:spPr>
       </p:sp>
       <p:sp>
@@ -25989,86 +26002,47 @@
         </p:nvSpPr>
         <p:spPr>
           <a:xfrm>
-            <a:off x="6519672" y="2258568"/>
-            <a:ext cx="1828800" cy="292608"/>
-          </a:xfrm>
-          <a:prstGeom prst="rect">
-            <a:avLst/>
-          </a:prstGeom>
-          <a:noFill/>
-          <a:ln/>
-        </p:spPr>
-        <p:txBody>
-          <a:bodyPr wrap="square" lIns="0" tIns="0" rIns="0" bIns="0" rtlCol="0" anchor="ctr"/>
-          <a:lstStyle/>
-          <a:p>
-            <a:pPr algn="ctr" indent="0" marL="0">
-              <a:buNone/>
-            </a:pPr>
-            <a:r>
-              <a:rPr lang="en-US" sz="1300" b="1" dirty="0">
-                <a:solidFill>
-                  <a:srgbClr val="9D174D"/>
+            <a:off x="365760" y="3273552"/>
+            <a:ext cx="1371600" cy="658368"/>
+          </a:xfrm>
+          <a:prstGeom prst="rect">
+            <a:avLst/>
+          </a:prstGeom>
+          <a:noFill/>
+          <a:ln/>
+        </p:spPr>
+        <p:txBody>
+          <a:bodyPr wrap="square" lIns="0" tIns="0" rIns="0" bIns="0" rtlCol="0" anchor="ctr"/>
+          <a:lstStyle/>
+          <a:p>
+            <a:pPr algn="ctr" indent="0" marL="0">
+              <a:buNone/>
+            </a:pPr>
+            <a:r>
+              <a:rPr lang="en-US" sz="1100" b="1" dirty="0">
+                <a:solidFill>
+                  <a:srgbClr val="475569"/>
                 </a:solidFill>
                 <a:latin typeface="Trebuchet MS" pitchFamily="34" charset="0"/>
                 <a:ea typeface="Trebuchet MS" pitchFamily="34" charset="-122"/>
                 <a:cs typeface="Trebuchet MS" pitchFamily="34" charset="-120"/>
               </a:rPr>
-              <a:t>s</a:t>
-            </a:r>
-            <a:endParaRPr lang="en-US" sz="1300" dirty="0"/>
-          </a:p>
-        </p:txBody>
-      </p:sp>
-      <p:sp>
-        <p:nvSpPr>
-          <p:cNvPr id="24" name="Text 22"/>
-          <p:cNvSpPr/>
-          <p:nvPr/>
-        </p:nvSpPr>
-        <p:spPr>
-          <a:xfrm>
-            <a:off x="6519672" y="2569464"/>
-            <a:ext cx="1828800" cy="201168"/>
-          </a:xfrm>
-          <a:prstGeom prst="rect">
-            <a:avLst/>
-          </a:prstGeom>
-          <a:noFill/>
-          <a:ln/>
-        </p:spPr>
-        <p:txBody>
-          <a:bodyPr wrap="square" lIns="0" tIns="0" rIns="0" bIns="0" rtlCol="0" anchor="t"/>
-          <a:lstStyle/>
-          <a:p>
-            <a:pPr algn="ctr" indent="0" marL="0">
-              <a:buNone/>
-            </a:pPr>
-            <a:r>
-              <a:rPr lang="en-US" sz="850" dirty="0">
-                <a:solidFill>
-                  <a:srgbClr val="475569"/>
-                </a:solidFill>
-                <a:latin typeface="Calibri" pitchFamily="34" charset="0"/>
-                <a:ea typeface="Calibri" pitchFamily="34" charset="-122"/>
-                <a:cs typeface="Calibri" pitchFamily="34" charset="-120"/>
-              </a:rPr>
-              <a:t>more than one</a:t>
-            </a:r>
-            <a:endParaRPr lang="en-US" sz="850" dirty="0"/>
-          </a:p>
-        </p:txBody>
-      </p:sp>
-      <p:sp>
-        <p:nvSpPr>
-          <p:cNvPr id="25" name="Shape 23"/>
-          <p:cNvSpPr/>
-          <p:nvPr/>
-        </p:nvSpPr>
-        <p:spPr>
-          <a:xfrm>
-            <a:off x="365760" y="3273552"/>
-            <a:ext cx="1371600" cy="658368"/>
+              <a:t>Syllables</a:t>
+            </a:r>
+            <a:endParaRPr lang="en-US" sz="1100" dirty="0"/>
+          </a:p>
+        </p:txBody>
+      </p:sp>
+      <p:sp>
+        <p:nvSpPr>
+          <p:cNvPr id="24" name="Shape 22"/>
+          <p:cNvSpPr/>
+          <p:nvPr/>
+        </p:nvSpPr>
+        <p:spPr>
+          <a:xfrm>
+            <a:off x="1874520" y="3273552"/>
+            <a:ext cx="6903720" cy="658368"/>
           </a:xfrm>
           <a:prstGeom prst="rect">
             <a:avLst>
@@ -26076,11 +26050,38 @@
             </a:avLst>
           </a:prstGeom>
           <a:solidFill>
-            <a:srgbClr val="E2E8F0"/>
-          </a:solidFill>
-          <a:ln w="12700">
-            <a:solidFill>
-              <a:srgbClr val="E2E8F0"/>
+            <a:srgbClr val="CCFBF1"/>
+          </a:solidFill>
+          <a:ln w="12700">
+            <a:solidFill>
+              <a:srgbClr val="0D9488"/>
+            </a:solidFill>
+            <a:prstDash val="solid"/>
+          </a:ln>
+        </p:spPr>
+      </p:sp>
+      <p:sp>
+        <p:nvSpPr>
+          <p:cNvPr id="25" name="Shape 23"/>
+          <p:cNvSpPr/>
+          <p:nvPr/>
+        </p:nvSpPr>
+        <p:spPr>
+          <a:xfrm>
+            <a:off x="2999232" y="3364992"/>
+            <a:ext cx="1645920" cy="475488"/>
+          </a:xfrm>
+          <a:prstGeom prst="rect">
+            <a:avLst>
+              <a:gd name="adj" fmla="val 9615"/>
+            </a:avLst>
+          </a:prstGeom>
+          <a:solidFill>
+            <a:srgbClr val="FFFFFF"/>
+          </a:solidFill>
+          <a:ln w="12700">
+            <a:solidFill>
+              <a:srgbClr val="0D9488"/>
             </a:solidFill>
             <a:prstDash val="solid"/>
           </a:ln>
@@ -26094,63 +26095,75 @@
         </p:nvSpPr>
         <p:spPr>
           <a:xfrm>
-            <a:off x="365760" y="3273552"/>
-            <a:ext cx="1371600" cy="658368"/>
-          </a:xfrm>
-          <a:prstGeom prst="rect">
-            <a:avLst/>
-          </a:prstGeom>
-          <a:noFill/>
-          <a:ln/>
-        </p:spPr>
-        <p:txBody>
-          <a:bodyPr wrap="square" lIns="0" tIns="0" rIns="0" bIns="0" rtlCol="0" anchor="ctr"/>
-          <a:lstStyle/>
-          <a:p>
-            <a:pPr algn="ctr" indent="0" marL="0">
-              <a:buNone/>
-            </a:pPr>
-            <a:r>
-              <a:rPr lang="en-US" sz="1100" b="1" dirty="0">
-                <a:solidFill>
-                  <a:srgbClr val="475569"/>
+            <a:off x="2999232" y="3364992"/>
+            <a:ext cx="1645920" cy="475488"/>
+          </a:xfrm>
+          <a:prstGeom prst="rect">
+            <a:avLst/>
+          </a:prstGeom>
+          <a:noFill/>
+          <a:ln/>
+        </p:spPr>
+        <p:txBody>
+          <a:bodyPr wrap="square" lIns="0" tIns="0" rIns="0" bIns="0" rtlCol="0" anchor="ctr"/>
+          <a:lstStyle/>
+          <a:p>
+            <a:pPr algn="ctr" indent="0" marL="0">
+              <a:buNone/>
+            </a:pPr>
+            <a:r>
+              <a:rPr lang="en-US" sz="1400" b="1" dirty="0">
+                <a:solidFill>
+                  <a:srgbClr val="0D9488"/>
                 </a:solidFill>
                 <a:latin typeface="Trebuchet MS" pitchFamily="34" charset="0"/>
                 <a:ea typeface="Trebuchet MS" pitchFamily="34" charset="-122"/>
                 <a:cs typeface="Trebuchet MS" pitchFamily="34" charset="-120"/>
               </a:rPr>
-              <a:t>Syllables</a:t>
-            </a:r>
-            <a:endParaRPr lang="en-US" sz="1100" dirty="0"/>
-          </a:p>
-        </p:txBody>
-      </p:sp>
-      <p:sp>
-        <p:nvSpPr>
-          <p:cNvPr id="27" name="Shape 25"/>
-          <p:cNvSpPr/>
-          <p:nvPr/>
-        </p:nvSpPr>
-        <p:spPr>
-          <a:xfrm>
-            <a:off x="1874520" y="3273552"/>
-            <a:ext cx="6903720" cy="658368"/>
-          </a:xfrm>
-          <a:prstGeom prst="rect">
-            <a:avLst>
-              <a:gd name="adj" fmla="val 8333"/>
-            </a:avLst>
-          </a:prstGeom>
-          <a:solidFill>
-            <a:srgbClr val="CCFBF1"/>
-          </a:solidFill>
-          <a:ln w="12700">
-            <a:solidFill>
-              <a:srgbClr val="0D9488"/>
-            </a:solidFill>
-            <a:prstDash val="solid"/>
-          </a:ln>
-        </p:spPr>
+              <a:t>help</a:t>
+            </a:r>
+            <a:endParaRPr lang="en-US" sz="1400" dirty="0"/>
+          </a:p>
+        </p:txBody>
+      </p:sp>
+      <p:sp>
+        <p:nvSpPr>
+          <p:cNvPr id="27" name="Text 25"/>
+          <p:cNvSpPr/>
+          <p:nvPr/>
+        </p:nvSpPr>
+        <p:spPr>
+          <a:xfrm>
+            <a:off x="4645152" y="3364992"/>
+            <a:ext cx="1097280" cy="475488"/>
+          </a:xfrm>
+          <a:prstGeom prst="rect">
+            <a:avLst/>
+          </a:prstGeom>
+          <a:noFill/>
+          <a:ln/>
+        </p:spPr>
+        <p:txBody>
+          <a:bodyPr wrap="square" lIns="0" tIns="0" rIns="0" bIns="0" rtlCol="0" anchor="ctr"/>
+          <a:lstStyle/>
+          <a:p>
+            <a:pPr algn="ctr" indent="0" marL="0">
+              <a:buNone/>
+            </a:pPr>
+            <a:r>
+              <a:rPr lang="en-US" sz="1600" b="1" dirty="0">
+                <a:solidFill>
+                  <a:srgbClr val="0D9488"/>
+                </a:solidFill>
+                <a:latin typeface="Trebuchet MS" pitchFamily="34" charset="0"/>
+                <a:ea typeface="Trebuchet MS" pitchFamily="34" charset="-122"/>
+                <a:cs typeface="Trebuchet MS" pitchFamily="34" charset="-120"/>
+              </a:rPr>
+              <a:t>·</a:t>
+            </a:r>
+            <a:endParaRPr lang="en-US" sz="1600" dirty="0"/>
+          </a:p>
+        </p:txBody>
       </p:sp>
       <p:sp>
         <p:nvSpPr>
@@ -26160,7 +26173,7 @@
         </p:nvSpPr>
         <p:spPr>
           <a:xfrm>
-            <a:off x="2999232" y="3364992"/>
+            <a:off x="5742432" y="3364992"/>
             <a:ext cx="1645920" cy="475488"/>
           </a:xfrm>
           <a:prstGeom prst="rect">
@@ -26187,7 +26200,7 @@
         </p:nvSpPr>
         <p:spPr>
           <a:xfrm>
-            <a:off x="2999232" y="3364992"/>
+            <a:off x="5742432" y="3364992"/>
             <a:ext cx="1645920" cy="475488"/>
           </a:xfrm>
           <a:prstGeom prst="rect">
@@ -26212,7 +26225,7 @@
                 <a:ea typeface="Trebuchet MS" pitchFamily="34" charset="-122"/>
                 <a:cs typeface="Trebuchet MS" pitchFamily="34" charset="-120"/>
               </a:rPr>
-              <a:t>help</a:t>
+              <a:t>er</a:t>
             </a:r>
             <a:endParaRPr lang="en-US" sz="1400" dirty="0"/>
           </a:p>
@@ -26220,119 +26233,80 @@
       </p:sp>
       <p:sp>
         <p:nvSpPr>
-          <p:cNvPr id="30" name="Text 28"/>
-          <p:cNvSpPr/>
-          <p:nvPr/>
-        </p:nvSpPr>
-        <p:spPr>
-          <a:xfrm>
-            <a:off x="4645152" y="3364992"/>
-            <a:ext cx="1097280" cy="475488"/>
-          </a:xfrm>
-          <a:prstGeom prst="rect">
-            <a:avLst/>
-          </a:prstGeom>
-          <a:noFill/>
-          <a:ln/>
-        </p:spPr>
-        <p:txBody>
-          <a:bodyPr wrap="square" lIns="0" tIns="0" rIns="0" bIns="0" rtlCol="0" anchor="ctr"/>
-          <a:lstStyle/>
-          <a:p>
-            <a:pPr algn="ctr" indent="0" marL="0">
-              <a:buNone/>
-            </a:pPr>
-            <a:r>
-              <a:rPr lang="en-US" sz="1600" b="1" dirty="0">
-                <a:solidFill>
-                  <a:srgbClr val="0D9488"/>
+          <p:cNvPr id="30" name="Shape 28"/>
+          <p:cNvSpPr/>
+          <p:nvPr/>
+        </p:nvSpPr>
+        <p:spPr>
+          <a:xfrm>
+            <a:off x="365760" y="4096512"/>
+            <a:ext cx="1371600" cy="804672"/>
+          </a:xfrm>
+          <a:prstGeom prst="rect">
+            <a:avLst>
+              <a:gd name="adj" fmla="val 6818"/>
+            </a:avLst>
+          </a:prstGeom>
+          <a:solidFill>
+            <a:srgbClr val="E2E8F0"/>
+          </a:solidFill>
+          <a:ln w="12700">
+            <a:solidFill>
+              <a:srgbClr val="E2E8F0"/>
+            </a:solidFill>
+            <a:prstDash val="solid"/>
+          </a:ln>
+        </p:spPr>
+      </p:sp>
+      <p:sp>
+        <p:nvSpPr>
+          <p:cNvPr id="31" name="Text 29"/>
+          <p:cNvSpPr/>
+          <p:nvPr/>
+        </p:nvSpPr>
+        <p:spPr>
+          <a:xfrm>
+            <a:off x="365760" y="4096512"/>
+            <a:ext cx="1371600" cy="804672"/>
+          </a:xfrm>
+          <a:prstGeom prst="rect">
+            <a:avLst/>
+          </a:prstGeom>
+          <a:noFill/>
+          <a:ln/>
+        </p:spPr>
+        <p:txBody>
+          <a:bodyPr wrap="square" lIns="0" tIns="0" rIns="0" bIns="0" rtlCol="0" anchor="ctr"/>
+          <a:lstStyle/>
+          <a:p>
+            <a:pPr algn="ctr" indent="0" marL="0">
+              <a:buNone/>
+            </a:pPr>
+            <a:r>
+              <a:rPr lang="en-US" sz="1100" b="1" dirty="0">
+                <a:solidFill>
+                  <a:srgbClr val="475569"/>
                 </a:solidFill>
                 <a:latin typeface="Trebuchet MS" pitchFamily="34" charset="0"/>
                 <a:ea typeface="Trebuchet MS" pitchFamily="34" charset="-122"/>
                 <a:cs typeface="Trebuchet MS" pitchFamily="34" charset="-120"/>
               </a:rPr>
-              <a:t>·</a:t>
-            </a:r>
-            <a:endParaRPr lang="en-US" sz="1600" dirty="0"/>
-          </a:p>
-        </p:txBody>
-      </p:sp>
-      <p:sp>
-        <p:nvSpPr>
-          <p:cNvPr id="31" name="Shape 29"/>
-          <p:cNvSpPr/>
-          <p:nvPr/>
-        </p:nvSpPr>
-        <p:spPr>
-          <a:xfrm>
-            <a:off x="5742432" y="3364992"/>
-            <a:ext cx="1645920" cy="475488"/>
-          </a:xfrm>
-          <a:prstGeom prst="rect">
-            <a:avLst>
-              <a:gd name="adj" fmla="val 9615"/>
-            </a:avLst>
-          </a:prstGeom>
-          <a:solidFill>
-            <a:srgbClr val="FFFFFF"/>
-          </a:solidFill>
-          <a:ln w="12700">
-            <a:solidFill>
-              <a:srgbClr val="0D9488"/>
-            </a:solidFill>
-            <a:prstDash val="solid"/>
-          </a:ln>
-        </p:spPr>
-      </p:sp>
-      <p:sp>
-        <p:nvSpPr>
-          <p:cNvPr id="32" name="Text 30"/>
-          <p:cNvSpPr/>
-          <p:nvPr/>
-        </p:nvSpPr>
-        <p:spPr>
-          <a:xfrm>
-            <a:off x="5742432" y="3364992"/>
-            <a:ext cx="1645920" cy="475488"/>
-          </a:xfrm>
-          <a:prstGeom prst="rect">
-            <a:avLst/>
-          </a:prstGeom>
-          <a:noFill/>
-          <a:ln/>
-        </p:spPr>
-        <p:txBody>
-          <a:bodyPr wrap="square" lIns="0" tIns="0" rIns="0" bIns="0" rtlCol="0" anchor="ctr"/>
-          <a:lstStyle/>
-          <a:p>
-            <a:pPr algn="ctr" indent="0" marL="0">
-              <a:buNone/>
-            </a:pPr>
-            <a:r>
-              <a:rPr lang="en-US" sz="1400" b="1" dirty="0">
-                <a:solidFill>
-                  <a:srgbClr val="0D9488"/>
-                </a:solidFill>
-                <a:latin typeface="Trebuchet MS" pitchFamily="34" charset="0"/>
-                <a:ea typeface="Trebuchet MS" pitchFamily="34" charset="-122"/>
-                <a:cs typeface="Trebuchet MS" pitchFamily="34" charset="-120"/>
-              </a:rPr>
-              <a:t>ers</a:t>
-            </a:r>
-            <a:endParaRPr lang="en-US" sz="1400" dirty="0"/>
-          </a:p>
-        </p:txBody>
-      </p:sp>
-      <p:sp>
-        <p:nvSpPr>
-          <p:cNvPr id="33" name="Shape 31"/>
-          <p:cNvSpPr/>
-          <p:nvPr/>
-        </p:nvSpPr>
-        <p:spPr>
-          <a:xfrm>
-            <a:off x="365760" y="4096512"/>
-            <a:ext cx="1371600" cy="804672"/>
+              <a:t>Phonemes</a:t>
+            </a:r>
+            <a:endParaRPr lang="en-US" sz="1100" dirty="0"/>
+          </a:p>
+        </p:txBody>
+      </p:sp>
+      <p:sp>
+        <p:nvSpPr>
+          <p:cNvPr id="32" name="Shape 30"/>
+          <p:cNvSpPr/>
+          <p:nvPr/>
+        </p:nvSpPr>
+        <p:spPr>
+          <a:xfrm>
+            <a:off x="1874520" y="4096512"/>
+            <a:ext cx="6903720" cy="804672"/>
           </a:xfrm>
           <a:prstGeom prst="rect">
             <a:avLst>
@@ -26340,85 +26314,19 @@
             </a:avLst>
           </a:prstGeom>
           <a:solidFill>
-            <a:srgbClr val="E2E8F0"/>
+            <a:srgbClr val="F8FAFC"/>
           </a:solidFill>
           <a:ln w="12700">
             <a:solidFill>
               <a:srgbClr val="E2E8F0"/>
             </a:solidFill>
-            <a:prstDash val="solid"/>
-          </a:ln>
-        </p:spPr>
-      </p:sp>
-      <p:sp>
-        <p:nvSpPr>
-          <p:cNvPr id="34" name="Text 32"/>
-          <p:cNvSpPr/>
-          <p:nvPr/>
-        </p:nvSpPr>
-        <p:spPr>
-          <a:xfrm>
-            <a:off x="365760" y="4096512"/>
-            <a:ext cx="1371600" cy="804672"/>
-          </a:xfrm>
-          <a:prstGeom prst="rect">
-            <a:avLst/>
-          </a:prstGeom>
-          <a:noFill/>
-          <a:ln/>
-        </p:spPr>
-        <p:txBody>
-          <a:bodyPr wrap="square" lIns="0" tIns="0" rIns="0" bIns="0" rtlCol="0" anchor="ctr"/>
-          <a:lstStyle/>
-          <a:p>
-            <a:pPr algn="ctr" indent="0" marL="0">
-              <a:buNone/>
-            </a:pPr>
-            <a:r>
-              <a:rPr lang="en-US" sz="1100" b="1" dirty="0">
-                <a:solidFill>
-                  <a:srgbClr val="475569"/>
-                </a:solidFill>
-                <a:latin typeface="Trebuchet MS" pitchFamily="34" charset="0"/>
-                <a:ea typeface="Trebuchet MS" pitchFamily="34" charset="-122"/>
-                <a:cs typeface="Trebuchet MS" pitchFamily="34" charset="-120"/>
-              </a:rPr>
-              <a:t>Phonemes</a:t>
-            </a:r>
-            <a:endParaRPr lang="en-US" sz="1100" dirty="0"/>
-          </a:p>
-        </p:txBody>
-      </p:sp>
-      <p:sp>
-        <p:nvSpPr>
-          <p:cNvPr id="35" name="Shape 33"/>
-          <p:cNvSpPr/>
-          <p:nvPr/>
-        </p:nvSpPr>
-        <p:spPr>
-          <a:xfrm>
-            <a:off x="1874520" y="4096512"/>
-            <a:ext cx="6903720" cy="804672"/>
-          </a:xfrm>
-          <a:prstGeom prst="rect">
-            <a:avLst>
-              <a:gd name="adj" fmla="val 6818"/>
-            </a:avLst>
-          </a:prstGeom>
-          <a:solidFill>
-            <a:srgbClr val="F8FAFC"/>
-          </a:solidFill>
-          <a:ln w="12700">
-            <a:solidFill>
-              <a:srgbClr val="E2E8F0"/>
-            </a:solidFill>
             <a:prstDash val="dash"/>
           </a:ln>
         </p:spPr>
       </p:sp>
       <p:sp>
         <p:nvSpPr>
-          <p:cNvPr id="36" name="Text 34"/>
+          <p:cNvPr id="33" name="Text 31"/>
           <p:cNvSpPr/>
           <p:nvPr/>
         </p:nvSpPr>
@@ -26741,7 +26649,7 @@
                 <a:ea typeface="Calibri" pitchFamily="34" charset="-122"/>
                 <a:cs typeface="Calibri" pitchFamily="34" charset="-120"/>
               </a:rPr>
-              <a:t>Word Labs  •  wordlabs.app  •  Root: 'help' = to assist or support someone</a:t>
+              <a:t>Word Labs  •  wordlabs.app  •  Root: 'help' = assist, support, or aid</a:t>
             </a:r>
             <a:endParaRPr lang="en-US" sz="800" dirty="0"/>
           </a:p>
@@ -26880,7 +26788,7 @@
                 <a:ea typeface="Trebuchet MS" pitchFamily="34" charset="-122"/>
                 <a:cs typeface="Trebuchet MS" pitchFamily="34" charset="-120"/>
               </a:rPr>
-              <a:t>helpers</a:t>
+              <a:t>helper</a:t>
             </a:r>
             <a:endParaRPr lang="en-US" sz="2800" dirty="0"/>
           </a:p>
@@ -26960,7 +26868,7 @@
         </p:nvSpPr>
         <p:spPr>
           <a:xfrm>
-            <a:off x="2221992" y="2258568"/>
+            <a:off x="2938272" y="2258568"/>
             <a:ext cx="1828800" cy="292608"/>
           </a:xfrm>
           <a:prstGeom prst="rect">
@@ -26994,7 +26902,7 @@
         </p:nvSpPr>
         <p:spPr>
           <a:xfrm>
-            <a:off x="2221992" y="2258568"/>
+            <a:off x="2938272" y="2258568"/>
             <a:ext cx="1828800" cy="292608"/>
           </a:xfrm>
           <a:prstGeom prst="rect">
@@ -27033,7 +26941,7 @@
         </p:nvSpPr>
         <p:spPr>
           <a:xfrm>
-            <a:off x="2221992" y="2569464"/>
+            <a:off x="2938272" y="2569464"/>
             <a:ext cx="1828800" cy="201168"/>
           </a:xfrm>
           <a:prstGeom prst="rect">
@@ -27072,7 +26980,7 @@
         </p:nvSpPr>
         <p:spPr>
           <a:xfrm>
-            <a:off x="4370832" y="2258568"/>
+            <a:off x="5803392" y="2258568"/>
             <a:ext cx="1828800" cy="292608"/>
           </a:xfrm>
           <a:prstGeom prst="rect">
@@ -27106,7 +27014,7 @@
         </p:nvSpPr>
         <p:spPr>
           <a:xfrm>
-            <a:off x="4370832" y="2258568"/>
+            <a:off x="5803392" y="2258568"/>
             <a:ext cx="1828800" cy="292608"/>
           </a:xfrm>
           <a:prstGeom prst="rect">
@@ -27145,7 +27053,7 @@
         </p:nvSpPr>
         <p:spPr>
           <a:xfrm>
-            <a:off x="4370832" y="2569464"/>
+            <a:off x="5803392" y="2569464"/>
             <a:ext cx="1828800" cy="201168"/>
           </a:xfrm>
           <a:prstGeom prst="rect">
@@ -27184,30 +27092,23 @@
         </p:nvSpPr>
         <p:spPr>
           <a:xfrm>
-            <a:off x="6519672" y="2258568"/>
-            <a:ext cx="1828800" cy="292608"/>
+            <a:off x="365760" y="3273552"/>
+            <a:ext cx="1371600" cy="658368"/>
           </a:xfrm>
           <a:prstGeom prst="rect">
             <a:avLst>
-              <a:gd name="adj" fmla="val 25000"/>
+              <a:gd name="adj" fmla="val 8333"/>
             </a:avLst>
           </a:prstGeom>
           <a:solidFill>
-            <a:srgbClr val="FCE7F3"/>
-          </a:solidFill>
-          <a:ln w="19050">
-            <a:solidFill>
-              <a:srgbClr val="DB2777"/>
-            </a:solidFill>
-            <a:prstDash val="solid"/>
-          </a:ln>
-          <a:effectLst>
-            <a:outerShdw sx="100000" sy="100000" kx="0" ky="0" algn="bl" rotWithShape="0" blurRad="101600" dist="38100" dir="8100000">
-              <a:srgbClr val="000000">
-                <a:alpha val="12000"/>
-              </a:srgbClr>
-            </a:outerShdw>
-          </a:effectLst>
+            <a:srgbClr val="E2E8F0"/>
+          </a:solidFill>
+          <a:ln w="12700">
+            <a:solidFill>
+              <a:srgbClr val="E2E8F0"/>
+            </a:solidFill>
+            <a:prstDash val="solid"/>
+          </a:ln>
         </p:spPr>
       </p:sp>
       <p:sp>
@@ -27218,86 +27119,47 @@
         </p:nvSpPr>
         <p:spPr>
           <a:xfrm>
-            <a:off x="6519672" y="2258568"/>
-            <a:ext cx="1828800" cy="292608"/>
-          </a:xfrm>
-          <a:prstGeom prst="rect">
-            <a:avLst/>
-          </a:prstGeom>
-          <a:noFill/>
-          <a:ln/>
-        </p:spPr>
-        <p:txBody>
-          <a:bodyPr wrap="square" lIns="0" tIns="0" rIns="0" bIns="0" rtlCol="0" anchor="ctr"/>
-          <a:lstStyle/>
-          <a:p>
-            <a:pPr algn="ctr" indent="0" marL="0">
-              <a:buNone/>
-            </a:pPr>
-            <a:r>
-              <a:rPr lang="en-US" sz="1300" b="1" dirty="0">
-                <a:solidFill>
-                  <a:srgbClr val="9D174D"/>
+            <a:off x="365760" y="3273552"/>
+            <a:ext cx="1371600" cy="658368"/>
+          </a:xfrm>
+          <a:prstGeom prst="rect">
+            <a:avLst/>
+          </a:prstGeom>
+          <a:noFill/>
+          <a:ln/>
+        </p:spPr>
+        <p:txBody>
+          <a:bodyPr wrap="square" lIns="0" tIns="0" rIns="0" bIns="0" rtlCol="0" anchor="ctr"/>
+          <a:lstStyle/>
+          <a:p>
+            <a:pPr algn="ctr" indent="0" marL="0">
+              <a:buNone/>
+            </a:pPr>
+            <a:r>
+              <a:rPr lang="en-US" sz="1100" b="1" dirty="0">
+                <a:solidFill>
+                  <a:srgbClr val="475569"/>
                 </a:solidFill>
                 <a:latin typeface="Trebuchet MS" pitchFamily="34" charset="0"/>
                 <a:ea typeface="Trebuchet MS" pitchFamily="34" charset="-122"/>
                 <a:cs typeface="Trebuchet MS" pitchFamily="34" charset="-120"/>
               </a:rPr>
-              <a:t>s</a:t>
-            </a:r>
-            <a:endParaRPr lang="en-US" sz="1300" dirty="0"/>
-          </a:p>
-        </p:txBody>
-      </p:sp>
-      <p:sp>
-        <p:nvSpPr>
-          <p:cNvPr id="24" name="Text 22"/>
-          <p:cNvSpPr/>
-          <p:nvPr/>
-        </p:nvSpPr>
-        <p:spPr>
-          <a:xfrm>
-            <a:off x="6519672" y="2569464"/>
-            <a:ext cx="1828800" cy="201168"/>
-          </a:xfrm>
-          <a:prstGeom prst="rect">
-            <a:avLst/>
-          </a:prstGeom>
-          <a:noFill/>
-          <a:ln/>
-        </p:spPr>
-        <p:txBody>
-          <a:bodyPr wrap="square" lIns="0" tIns="0" rIns="0" bIns="0" rtlCol="0" anchor="t"/>
-          <a:lstStyle/>
-          <a:p>
-            <a:pPr algn="ctr" indent="0" marL="0">
-              <a:buNone/>
-            </a:pPr>
-            <a:r>
-              <a:rPr lang="en-US" sz="850" dirty="0">
-                <a:solidFill>
-                  <a:srgbClr val="475569"/>
-                </a:solidFill>
-                <a:latin typeface="Calibri" pitchFamily="34" charset="0"/>
-                <a:ea typeface="Calibri" pitchFamily="34" charset="-122"/>
-                <a:cs typeface="Calibri" pitchFamily="34" charset="-120"/>
-              </a:rPr>
-              <a:t>more than one</a:t>
-            </a:r>
-            <a:endParaRPr lang="en-US" sz="850" dirty="0"/>
-          </a:p>
-        </p:txBody>
-      </p:sp>
-      <p:sp>
-        <p:nvSpPr>
-          <p:cNvPr id="25" name="Shape 23"/>
-          <p:cNvSpPr/>
-          <p:nvPr/>
-        </p:nvSpPr>
-        <p:spPr>
-          <a:xfrm>
-            <a:off x="365760" y="3273552"/>
-            <a:ext cx="1371600" cy="658368"/>
+              <a:t>Syllables</a:t>
+            </a:r>
+            <a:endParaRPr lang="en-US" sz="1100" dirty="0"/>
+          </a:p>
+        </p:txBody>
+      </p:sp>
+      <p:sp>
+        <p:nvSpPr>
+          <p:cNvPr id="24" name="Shape 22"/>
+          <p:cNvSpPr/>
+          <p:nvPr/>
+        </p:nvSpPr>
+        <p:spPr>
+          <a:xfrm>
+            <a:off x="1874520" y="3273552"/>
+            <a:ext cx="6903720" cy="658368"/>
           </a:xfrm>
           <a:prstGeom prst="rect">
             <a:avLst>
@@ -27305,11 +27167,38 @@
             </a:avLst>
           </a:prstGeom>
           <a:solidFill>
-            <a:srgbClr val="E2E8F0"/>
-          </a:solidFill>
-          <a:ln w="12700">
-            <a:solidFill>
-              <a:srgbClr val="E2E8F0"/>
+            <a:srgbClr val="CCFBF1"/>
+          </a:solidFill>
+          <a:ln w="12700">
+            <a:solidFill>
+              <a:srgbClr val="0D9488"/>
+            </a:solidFill>
+            <a:prstDash val="solid"/>
+          </a:ln>
+        </p:spPr>
+      </p:sp>
+      <p:sp>
+        <p:nvSpPr>
+          <p:cNvPr id="25" name="Shape 23"/>
+          <p:cNvSpPr/>
+          <p:nvPr/>
+        </p:nvSpPr>
+        <p:spPr>
+          <a:xfrm>
+            <a:off x="2999232" y="3364992"/>
+            <a:ext cx="1645920" cy="475488"/>
+          </a:xfrm>
+          <a:prstGeom prst="rect">
+            <a:avLst>
+              <a:gd name="adj" fmla="val 9615"/>
+            </a:avLst>
+          </a:prstGeom>
+          <a:solidFill>
+            <a:srgbClr val="FFFFFF"/>
+          </a:solidFill>
+          <a:ln w="12700">
+            <a:solidFill>
+              <a:srgbClr val="0D9488"/>
             </a:solidFill>
             <a:prstDash val="solid"/>
           </a:ln>
@@ -27323,32 +27212,203 @@
         </p:nvSpPr>
         <p:spPr>
           <a:xfrm>
-            <a:off x="365760" y="3273552"/>
-            <a:ext cx="1371600" cy="658368"/>
-          </a:xfrm>
-          <a:prstGeom prst="rect">
-            <a:avLst/>
-          </a:prstGeom>
-          <a:noFill/>
-          <a:ln/>
-        </p:spPr>
-        <p:txBody>
-          <a:bodyPr wrap="square" lIns="0" tIns="0" rIns="0" bIns="0" rtlCol="0" anchor="ctr"/>
-          <a:lstStyle/>
-          <a:p>
-            <a:pPr algn="ctr" indent="0" marL="0">
-              <a:buNone/>
-            </a:pPr>
-            <a:r>
-              <a:rPr lang="en-US" sz="1100" b="1" dirty="0">
-                <a:solidFill>
-                  <a:srgbClr val="475569"/>
+            <a:off x="2999232" y="3364992"/>
+            <a:ext cx="1645920" cy="475488"/>
+          </a:xfrm>
+          <a:prstGeom prst="rect">
+            <a:avLst/>
+          </a:prstGeom>
+          <a:noFill/>
+          <a:ln/>
+        </p:spPr>
+        <p:txBody>
+          <a:bodyPr wrap="square" lIns="0" tIns="0" rIns="0" bIns="0" rtlCol="0" anchor="ctr"/>
+          <a:lstStyle/>
+          <a:p>
+            <a:pPr algn="ctr" indent="0" marL="0">
+              <a:buNone/>
+            </a:pPr>
+            <a:r>
+              <a:rPr lang="en-US" sz="1400" b="1" dirty="0">
+                <a:solidFill>
+                  <a:srgbClr val="0D9488"/>
                 </a:solidFill>
                 <a:latin typeface="Trebuchet MS" pitchFamily="34" charset="0"/>
                 <a:ea typeface="Trebuchet MS" pitchFamily="34" charset="-122"/>
                 <a:cs typeface="Trebuchet MS" pitchFamily="34" charset="-120"/>
               </a:rPr>
-              <a:t>Syllables</a:t>
+              <a:t>help</a:t>
+            </a:r>
+            <a:endParaRPr lang="en-US" sz="1400" dirty="0"/>
+          </a:p>
+        </p:txBody>
+      </p:sp>
+      <p:sp>
+        <p:nvSpPr>
+          <p:cNvPr id="27" name="Text 25"/>
+          <p:cNvSpPr/>
+          <p:nvPr/>
+        </p:nvSpPr>
+        <p:spPr>
+          <a:xfrm>
+            <a:off x="4645152" y="3364992"/>
+            <a:ext cx="1097280" cy="475488"/>
+          </a:xfrm>
+          <a:prstGeom prst="rect">
+            <a:avLst/>
+          </a:prstGeom>
+          <a:noFill/>
+          <a:ln/>
+        </p:spPr>
+        <p:txBody>
+          <a:bodyPr wrap="square" lIns="0" tIns="0" rIns="0" bIns="0" rtlCol="0" anchor="ctr"/>
+          <a:lstStyle/>
+          <a:p>
+            <a:pPr algn="ctr" indent="0" marL="0">
+              <a:buNone/>
+            </a:pPr>
+            <a:r>
+              <a:rPr lang="en-US" sz="1600" b="1" dirty="0">
+                <a:solidFill>
+                  <a:srgbClr val="0D9488"/>
+                </a:solidFill>
+                <a:latin typeface="Trebuchet MS" pitchFamily="34" charset="0"/>
+                <a:ea typeface="Trebuchet MS" pitchFamily="34" charset="-122"/>
+                <a:cs typeface="Trebuchet MS" pitchFamily="34" charset="-120"/>
+              </a:rPr>
+              <a:t>·</a:t>
+            </a:r>
+            <a:endParaRPr lang="en-US" sz="1600" dirty="0"/>
+          </a:p>
+        </p:txBody>
+      </p:sp>
+      <p:sp>
+        <p:nvSpPr>
+          <p:cNvPr id="28" name="Shape 26"/>
+          <p:cNvSpPr/>
+          <p:nvPr/>
+        </p:nvSpPr>
+        <p:spPr>
+          <a:xfrm>
+            <a:off x="5742432" y="3364992"/>
+            <a:ext cx="1645920" cy="475488"/>
+          </a:xfrm>
+          <a:prstGeom prst="rect">
+            <a:avLst>
+              <a:gd name="adj" fmla="val 9615"/>
+            </a:avLst>
+          </a:prstGeom>
+          <a:solidFill>
+            <a:srgbClr val="FFFFFF"/>
+          </a:solidFill>
+          <a:ln w="12700">
+            <a:solidFill>
+              <a:srgbClr val="0D9488"/>
+            </a:solidFill>
+            <a:prstDash val="solid"/>
+          </a:ln>
+        </p:spPr>
+      </p:sp>
+      <p:sp>
+        <p:nvSpPr>
+          <p:cNvPr id="29" name="Text 27"/>
+          <p:cNvSpPr/>
+          <p:nvPr/>
+        </p:nvSpPr>
+        <p:spPr>
+          <a:xfrm>
+            <a:off x="5742432" y="3364992"/>
+            <a:ext cx="1645920" cy="475488"/>
+          </a:xfrm>
+          <a:prstGeom prst="rect">
+            <a:avLst/>
+          </a:prstGeom>
+          <a:noFill/>
+          <a:ln/>
+        </p:spPr>
+        <p:txBody>
+          <a:bodyPr wrap="square" lIns="0" tIns="0" rIns="0" bIns="0" rtlCol="0" anchor="ctr"/>
+          <a:lstStyle/>
+          <a:p>
+            <a:pPr algn="ctr" indent="0" marL="0">
+              <a:buNone/>
+            </a:pPr>
+            <a:r>
+              <a:rPr lang="en-US" sz="1400" b="1" dirty="0">
+                <a:solidFill>
+                  <a:srgbClr val="0D9488"/>
+                </a:solidFill>
+                <a:latin typeface="Trebuchet MS" pitchFamily="34" charset="0"/>
+                <a:ea typeface="Trebuchet MS" pitchFamily="34" charset="-122"/>
+                <a:cs typeface="Trebuchet MS" pitchFamily="34" charset="-120"/>
+              </a:rPr>
+              <a:t>er</a:t>
+            </a:r>
+            <a:endParaRPr lang="en-US" sz="1400" dirty="0"/>
+          </a:p>
+        </p:txBody>
+      </p:sp>
+      <p:sp>
+        <p:nvSpPr>
+          <p:cNvPr id="30" name="Shape 28"/>
+          <p:cNvSpPr/>
+          <p:nvPr/>
+        </p:nvSpPr>
+        <p:spPr>
+          <a:xfrm>
+            <a:off x="365760" y="4096512"/>
+            <a:ext cx="1371600" cy="804672"/>
+          </a:xfrm>
+          <a:prstGeom prst="rect">
+            <a:avLst>
+              <a:gd name="adj" fmla="val 6818"/>
+            </a:avLst>
+          </a:prstGeom>
+          <a:solidFill>
+            <a:srgbClr val="E2E8F0"/>
+          </a:solidFill>
+          <a:ln w="12700">
+            <a:solidFill>
+              <a:srgbClr val="E2E8F0"/>
+            </a:solidFill>
+            <a:prstDash val="solid"/>
+          </a:ln>
+        </p:spPr>
+      </p:sp>
+      <p:sp>
+        <p:nvSpPr>
+          <p:cNvPr id="31" name="Text 29"/>
+          <p:cNvSpPr/>
+          <p:nvPr/>
+        </p:nvSpPr>
+        <p:spPr>
+          <a:xfrm>
+            <a:off x="365760" y="4096512"/>
+            <a:ext cx="1371600" cy="804672"/>
+          </a:xfrm>
+          <a:prstGeom prst="rect">
+            <a:avLst/>
+          </a:prstGeom>
+          <a:noFill/>
+          <a:ln/>
+        </p:spPr>
+        <p:txBody>
+          <a:bodyPr wrap="square" lIns="0" tIns="0" rIns="0" bIns="0" rtlCol="0" anchor="ctr"/>
+          <a:lstStyle/>
+          <a:p>
+            <a:pPr algn="ctr" indent="0" marL="0">
+              <a:buNone/>
+            </a:pPr>
+            <a:r>
+              <a:rPr lang="en-US" sz="1100" b="1" dirty="0">
+                <a:solidFill>
+                  <a:srgbClr val="475569"/>
+                </a:solidFill>
+                <a:latin typeface="Trebuchet MS" pitchFamily="34" charset="0"/>
+                <a:ea typeface="Trebuchet MS" pitchFamily="34" charset="-122"/>
+                <a:cs typeface="Trebuchet MS" pitchFamily="34" charset="-120"/>
+              </a:rPr>
+              <a:t>Phonemes</a:t>
             </a:r>
             <a:endParaRPr lang="en-US" sz="1100" dirty="0"/>
           </a:p>
@@ -27356,13 +27416,13 @@
       </p:sp>
       <p:sp>
         <p:nvSpPr>
-          <p:cNvPr id="27" name="Shape 25"/>
-          <p:cNvSpPr/>
-          <p:nvPr/>
-        </p:nvSpPr>
-        <p:spPr>
-          <a:xfrm>
-            <a:off x="1874520" y="3273552"/>
+          <p:cNvPr id="32" name="Shape 30"/>
+          <p:cNvSpPr/>
+          <p:nvPr/>
+        </p:nvSpPr>
+        <p:spPr>
+          <a:xfrm>
+            <a:off x="1874520" y="4096512"/>
             <a:ext cx="6903720" cy="658368"/>
           </a:xfrm>
           <a:prstGeom prst="rect">
@@ -27371,30 +27431,30 @@
             </a:avLst>
           </a:prstGeom>
           <a:solidFill>
-            <a:srgbClr val="CCFBF1"/>
-          </a:solidFill>
-          <a:ln w="12700">
-            <a:solidFill>
-              <a:srgbClr val="0D9488"/>
-            </a:solidFill>
-            <a:prstDash val="solid"/>
-          </a:ln>
-        </p:spPr>
-      </p:sp>
-      <p:sp>
-        <p:nvSpPr>
-          <p:cNvPr id="28" name="Shape 26"/>
-          <p:cNvSpPr/>
-          <p:nvPr/>
-        </p:nvSpPr>
-        <p:spPr>
-          <a:xfrm>
-            <a:off x="2999232" y="3364992"/>
-            <a:ext cx="1645920" cy="475488"/>
+            <a:srgbClr val="FCE7F3"/>
+          </a:solidFill>
+          <a:ln w="12700">
+            <a:solidFill>
+              <a:srgbClr val="DB2777"/>
+            </a:solidFill>
+            <a:prstDash val="solid"/>
+          </a:ln>
+        </p:spPr>
+      </p:sp>
+      <p:sp>
+        <p:nvSpPr>
+          <p:cNvPr id="33" name="Shape 31"/>
+          <p:cNvSpPr/>
+          <p:nvPr/>
+        </p:nvSpPr>
+        <p:spPr>
+          <a:xfrm>
+            <a:off x="2427732" y="4169664"/>
+            <a:ext cx="685800" cy="475488"/>
           </a:xfrm>
           <a:prstGeom prst="rect">
             <a:avLst>
-              <a:gd name="adj" fmla="val 9615"/>
+              <a:gd name="adj" fmla="val 7692"/>
             </a:avLst>
           </a:prstGeom>
           <a:solidFill>
@@ -27402,104 +27462,131 @@
           </a:solidFill>
           <a:ln w="12700">
             <a:solidFill>
-              <a:srgbClr val="0D9488"/>
-            </a:solidFill>
-            <a:prstDash val="solid"/>
-          </a:ln>
-        </p:spPr>
-      </p:sp>
-      <p:sp>
-        <p:nvSpPr>
-          <p:cNvPr id="29" name="Text 27"/>
-          <p:cNvSpPr/>
-          <p:nvPr/>
-        </p:nvSpPr>
-        <p:spPr>
-          <a:xfrm>
-            <a:off x="2999232" y="3364992"/>
-            <a:ext cx="1645920" cy="475488"/>
-          </a:xfrm>
-          <a:prstGeom prst="rect">
-            <a:avLst/>
-          </a:prstGeom>
-          <a:noFill/>
-          <a:ln/>
-        </p:spPr>
-        <p:txBody>
-          <a:bodyPr wrap="square" lIns="0" tIns="0" rIns="0" bIns="0" rtlCol="0" anchor="ctr"/>
-          <a:lstStyle/>
-          <a:p>
-            <a:pPr algn="ctr" indent="0" marL="0">
-              <a:buNone/>
-            </a:pPr>
-            <a:r>
-              <a:rPr lang="en-US" sz="1400" b="1" dirty="0">
-                <a:solidFill>
-                  <a:srgbClr val="0D9488"/>
+              <a:srgbClr val="DB2777"/>
+            </a:solidFill>
+            <a:prstDash val="solid"/>
+          </a:ln>
+        </p:spPr>
+      </p:sp>
+      <p:sp>
+        <p:nvSpPr>
+          <p:cNvPr id="34" name="Text 32"/>
+          <p:cNvSpPr/>
+          <p:nvPr/>
+        </p:nvSpPr>
+        <p:spPr>
+          <a:xfrm>
+            <a:off x="2427732" y="4169664"/>
+            <a:ext cx="685800" cy="475488"/>
+          </a:xfrm>
+          <a:prstGeom prst="rect">
+            <a:avLst/>
+          </a:prstGeom>
+          <a:noFill/>
+          <a:ln/>
+        </p:spPr>
+        <p:txBody>
+          <a:bodyPr wrap="square" lIns="0" tIns="0" rIns="0" bIns="0" rtlCol="0" anchor="ctr"/>
+          <a:lstStyle/>
+          <a:p>
+            <a:pPr algn="ctr" indent="0" marL="0">
+              <a:buNone/>
+            </a:pPr>
+            <a:r>
+              <a:rPr lang="en-US" sz="900" b="1" dirty="0">
+                <a:solidFill>
+                  <a:srgbClr val="9D174D"/>
                 </a:solidFill>
                 <a:latin typeface="Trebuchet MS" pitchFamily="34" charset="0"/>
                 <a:ea typeface="Trebuchet MS" pitchFamily="34" charset="-122"/>
                 <a:cs typeface="Trebuchet MS" pitchFamily="34" charset="-120"/>
               </a:rPr>
-              <a:t>help</a:t>
-            </a:r>
-            <a:endParaRPr lang="en-US" sz="1400" dirty="0"/>
-          </a:p>
-        </p:txBody>
-      </p:sp>
-      <p:sp>
-        <p:nvSpPr>
-          <p:cNvPr id="30" name="Text 28"/>
-          <p:cNvSpPr/>
-          <p:nvPr/>
-        </p:nvSpPr>
-        <p:spPr>
-          <a:xfrm>
-            <a:off x="4645152" y="3364992"/>
-            <a:ext cx="1097280" cy="475488"/>
-          </a:xfrm>
-          <a:prstGeom prst="rect">
-            <a:avLst/>
-          </a:prstGeom>
-          <a:noFill/>
-          <a:ln/>
-        </p:spPr>
-        <p:txBody>
-          <a:bodyPr wrap="square" lIns="0" tIns="0" rIns="0" bIns="0" rtlCol="0" anchor="ctr"/>
-          <a:lstStyle/>
-          <a:p>
-            <a:pPr algn="ctr" indent="0" marL="0">
-              <a:buNone/>
-            </a:pPr>
-            <a:r>
-              <a:rPr lang="en-US" sz="1600" b="1" dirty="0">
-                <a:solidFill>
-                  <a:srgbClr val="0D9488"/>
+              <a:t>h</a:t>
+            </a:r>
+            <a:endParaRPr lang="en-US" sz="900" dirty="0"/>
+          </a:p>
+        </p:txBody>
+      </p:sp>
+      <p:sp>
+        <p:nvSpPr>
+          <p:cNvPr id="35" name="Shape 33"/>
+          <p:cNvSpPr/>
+          <p:nvPr/>
+        </p:nvSpPr>
+        <p:spPr>
+          <a:xfrm>
+            <a:off x="3639312" y="4169664"/>
+            <a:ext cx="685800" cy="475488"/>
+          </a:xfrm>
+          <a:prstGeom prst="rect">
+            <a:avLst>
+              <a:gd name="adj" fmla="val 7692"/>
+            </a:avLst>
+          </a:prstGeom>
+          <a:solidFill>
+            <a:srgbClr val="FFFFFF"/>
+          </a:solidFill>
+          <a:ln w="12700">
+            <a:solidFill>
+              <a:srgbClr val="DB2777"/>
+            </a:solidFill>
+            <a:prstDash val="solid"/>
+          </a:ln>
+        </p:spPr>
+      </p:sp>
+      <p:sp>
+        <p:nvSpPr>
+          <p:cNvPr id="36" name="Text 34"/>
+          <p:cNvSpPr/>
+          <p:nvPr/>
+        </p:nvSpPr>
+        <p:spPr>
+          <a:xfrm>
+            <a:off x="3639312" y="4169664"/>
+            <a:ext cx="685800" cy="475488"/>
+          </a:xfrm>
+          <a:prstGeom prst="rect">
+            <a:avLst/>
+          </a:prstGeom>
+          <a:noFill/>
+          <a:ln/>
+        </p:spPr>
+        <p:txBody>
+          <a:bodyPr wrap="square" lIns="0" tIns="0" rIns="0" bIns="0" rtlCol="0" anchor="ctr"/>
+          <a:lstStyle/>
+          <a:p>
+            <a:pPr algn="ctr" indent="0" marL="0">
+              <a:buNone/>
+            </a:pPr>
+            <a:r>
+              <a:rPr lang="en-US" sz="900" b="1" dirty="0">
+                <a:solidFill>
+                  <a:srgbClr val="9D174D"/>
                 </a:solidFill>
                 <a:latin typeface="Trebuchet MS" pitchFamily="34" charset="0"/>
                 <a:ea typeface="Trebuchet MS" pitchFamily="34" charset="-122"/>
                 <a:cs typeface="Trebuchet MS" pitchFamily="34" charset="-120"/>
               </a:rPr>
-              <a:t>·</a:t>
-            </a:r>
-            <a:endParaRPr lang="en-US" sz="1600" dirty="0"/>
-          </a:p>
-        </p:txBody>
-      </p:sp>
-      <p:sp>
-        <p:nvSpPr>
-          <p:cNvPr id="31" name="Shape 29"/>
-          <p:cNvSpPr/>
-          <p:nvPr/>
-        </p:nvSpPr>
-        <p:spPr>
-          <a:xfrm>
-            <a:off x="5742432" y="3364992"/>
-            <a:ext cx="1645920" cy="475488"/>
+              <a:t>e</a:t>
+            </a:r>
+            <a:endParaRPr lang="en-US" sz="900" dirty="0"/>
+          </a:p>
+        </p:txBody>
+      </p:sp>
+      <p:sp>
+        <p:nvSpPr>
+          <p:cNvPr id="37" name="Shape 35"/>
+          <p:cNvSpPr/>
+          <p:nvPr/>
+        </p:nvSpPr>
+        <p:spPr>
+          <a:xfrm>
+            <a:off x="4850892" y="4169664"/>
+            <a:ext cx="685800" cy="475488"/>
           </a:xfrm>
           <a:prstGeom prst="rect">
             <a:avLst>
-              <a:gd name="adj" fmla="val 9615"/>
+              <a:gd name="adj" fmla="val 7692"/>
             </a:avLst>
           </a:prstGeom>
           <a:solidFill>
@@ -27507,153 +27594,126 @@
           </a:solidFill>
           <a:ln w="12700">
             <a:solidFill>
-              <a:srgbClr val="0D9488"/>
-            </a:solidFill>
-            <a:prstDash val="solid"/>
-          </a:ln>
-        </p:spPr>
-      </p:sp>
-      <p:sp>
-        <p:nvSpPr>
-          <p:cNvPr id="32" name="Text 30"/>
-          <p:cNvSpPr/>
-          <p:nvPr/>
-        </p:nvSpPr>
-        <p:spPr>
-          <a:xfrm>
-            <a:off x="5742432" y="3364992"/>
-            <a:ext cx="1645920" cy="475488"/>
-          </a:xfrm>
-          <a:prstGeom prst="rect">
-            <a:avLst/>
-          </a:prstGeom>
-          <a:noFill/>
-          <a:ln/>
-        </p:spPr>
-        <p:txBody>
-          <a:bodyPr wrap="square" lIns="0" tIns="0" rIns="0" bIns="0" rtlCol="0" anchor="ctr"/>
-          <a:lstStyle/>
-          <a:p>
-            <a:pPr algn="ctr" indent="0" marL="0">
-              <a:buNone/>
-            </a:pPr>
-            <a:r>
-              <a:rPr lang="en-US" sz="1400" b="1" dirty="0">
-                <a:solidFill>
-                  <a:srgbClr val="0D9488"/>
+              <a:srgbClr val="DB2777"/>
+            </a:solidFill>
+            <a:prstDash val="solid"/>
+          </a:ln>
+        </p:spPr>
+      </p:sp>
+      <p:sp>
+        <p:nvSpPr>
+          <p:cNvPr id="38" name="Text 36"/>
+          <p:cNvSpPr/>
+          <p:nvPr/>
+        </p:nvSpPr>
+        <p:spPr>
+          <a:xfrm>
+            <a:off x="4850892" y="4169664"/>
+            <a:ext cx="685800" cy="475488"/>
+          </a:xfrm>
+          <a:prstGeom prst="rect">
+            <a:avLst/>
+          </a:prstGeom>
+          <a:noFill/>
+          <a:ln/>
+        </p:spPr>
+        <p:txBody>
+          <a:bodyPr wrap="square" lIns="0" tIns="0" rIns="0" bIns="0" rtlCol="0" anchor="ctr"/>
+          <a:lstStyle/>
+          <a:p>
+            <a:pPr algn="ctr" indent="0" marL="0">
+              <a:buNone/>
+            </a:pPr>
+            <a:r>
+              <a:rPr lang="en-US" sz="900" b="1" dirty="0">
+                <a:solidFill>
+                  <a:srgbClr val="9D174D"/>
                 </a:solidFill>
                 <a:latin typeface="Trebuchet MS" pitchFamily="34" charset="0"/>
                 <a:ea typeface="Trebuchet MS" pitchFamily="34" charset="-122"/>
                 <a:cs typeface="Trebuchet MS" pitchFamily="34" charset="-120"/>
               </a:rPr>
-              <a:t>ers</a:t>
-            </a:r>
-            <a:endParaRPr lang="en-US" sz="1400" dirty="0"/>
-          </a:p>
-        </p:txBody>
-      </p:sp>
-      <p:sp>
-        <p:nvSpPr>
-          <p:cNvPr id="33" name="Shape 31"/>
-          <p:cNvSpPr/>
-          <p:nvPr/>
-        </p:nvSpPr>
-        <p:spPr>
-          <a:xfrm>
-            <a:off x="365760" y="4096512"/>
-            <a:ext cx="1371600" cy="804672"/>
+              <a:t>l</a:t>
+            </a:r>
+            <a:endParaRPr lang="en-US" sz="900" dirty="0"/>
+          </a:p>
+        </p:txBody>
+      </p:sp>
+      <p:sp>
+        <p:nvSpPr>
+          <p:cNvPr id="39" name="Shape 37"/>
+          <p:cNvSpPr/>
+          <p:nvPr/>
+        </p:nvSpPr>
+        <p:spPr>
+          <a:xfrm>
+            <a:off x="6062472" y="4169664"/>
+            <a:ext cx="685800" cy="475488"/>
           </a:xfrm>
           <a:prstGeom prst="rect">
             <a:avLst>
-              <a:gd name="adj" fmla="val 6818"/>
+              <a:gd name="adj" fmla="val 7692"/>
             </a:avLst>
           </a:prstGeom>
           <a:solidFill>
-            <a:srgbClr val="E2E8F0"/>
-          </a:solidFill>
-          <a:ln w="12700">
-            <a:solidFill>
-              <a:srgbClr val="E2E8F0"/>
-            </a:solidFill>
-            <a:prstDash val="solid"/>
-          </a:ln>
-        </p:spPr>
-      </p:sp>
-      <p:sp>
-        <p:nvSpPr>
-          <p:cNvPr id="34" name="Text 32"/>
-          <p:cNvSpPr/>
-          <p:nvPr/>
-        </p:nvSpPr>
-        <p:spPr>
-          <a:xfrm>
-            <a:off x="365760" y="4096512"/>
-            <a:ext cx="1371600" cy="804672"/>
-          </a:xfrm>
-          <a:prstGeom prst="rect">
-            <a:avLst/>
-          </a:prstGeom>
-          <a:noFill/>
-          <a:ln/>
-        </p:spPr>
-        <p:txBody>
-          <a:bodyPr wrap="square" lIns="0" tIns="0" rIns="0" bIns="0" rtlCol="0" anchor="ctr"/>
-          <a:lstStyle/>
-          <a:p>
-            <a:pPr algn="ctr" indent="0" marL="0">
-              <a:buNone/>
-            </a:pPr>
-            <a:r>
-              <a:rPr lang="en-US" sz="1100" b="1" dirty="0">
-                <a:solidFill>
-                  <a:srgbClr val="475569"/>
+            <a:srgbClr val="FFFFFF"/>
+          </a:solidFill>
+          <a:ln w="12700">
+            <a:solidFill>
+              <a:srgbClr val="DB2777"/>
+            </a:solidFill>
+            <a:prstDash val="solid"/>
+          </a:ln>
+        </p:spPr>
+      </p:sp>
+      <p:sp>
+        <p:nvSpPr>
+          <p:cNvPr id="40" name="Text 38"/>
+          <p:cNvSpPr/>
+          <p:nvPr/>
+        </p:nvSpPr>
+        <p:spPr>
+          <a:xfrm>
+            <a:off x="6062472" y="4169664"/>
+            <a:ext cx="685800" cy="475488"/>
+          </a:xfrm>
+          <a:prstGeom prst="rect">
+            <a:avLst/>
+          </a:prstGeom>
+          <a:noFill/>
+          <a:ln/>
+        </p:spPr>
+        <p:txBody>
+          <a:bodyPr wrap="square" lIns="0" tIns="0" rIns="0" bIns="0" rtlCol="0" anchor="ctr"/>
+          <a:lstStyle/>
+          <a:p>
+            <a:pPr algn="ctr" indent="0" marL="0">
+              <a:buNone/>
+            </a:pPr>
+            <a:r>
+              <a:rPr lang="en-US" sz="900" b="1" dirty="0">
+                <a:solidFill>
+                  <a:srgbClr val="9D174D"/>
                 </a:solidFill>
                 <a:latin typeface="Trebuchet MS" pitchFamily="34" charset="0"/>
                 <a:ea typeface="Trebuchet MS" pitchFamily="34" charset="-122"/>
                 <a:cs typeface="Trebuchet MS" pitchFamily="34" charset="-120"/>
               </a:rPr>
-              <a:t>Phonemes</a:t>
-            </a:r>
-            <a:endParaRPr lang="en-US" sz="1100" dirty="0"/>
-          </a:p>
-        </p:txBody>
-      </p:sp>
-      <p:sp>
-        <p:nvSpPr>
-          <p:cNvPr id="35" name="Shape 33"/>
-          <p:cNvSpPr/>
-          <p:nvPr/>
-        </p:nvSpPr>
-        <p:spPr>
-          <a:xfrm>
-            <a:off x="1874520" y="4096512"/>
-            <a:ext cx="6903720" cy="658368"/>
-          </a:xfrm>
-          <a:prstGeom prst="rect">
-            <a:avLst>
-              <a:gd name="adj" fmla="val 8333"/>
-            </a:avLst>
-          </a:prstGeom>
-          <a:solidFill>
-            <a:srgbClr val="FCE7F3"/>
-          </a:solidFill>
-          <a:ln w="12700">
-            <a:solidFill>
-              <a:srgbClr val="DB2777"/>
-            </a:solidFill>
-            <a:prstDash val="solid"/>
-          </a:ln>
-        </p:spPr>
-      </p:sp>
-      <p:sp>
-        <p:nvSpPr>
-          <p:cNvPr id="36" name="Shape 34"/>
-          <p:cNvSpPr/>
-          <p:nvPr/>
-        </p:nvSpPr>
-        <p:spPr>
-          <a:xfrm>
-            <a:off x="2254649" y="4169664"/>
+              <a:t>p</a:t>
+            </a:r>
+            <a:endParaRPr lang="en-US" sz="900" dirty="0"/>
+          </a:p>
+        </p:txBody>
+      </p:sp>
+      <p:sp>
+        <p:nvSpPr>
+          <p:cNvPr id="41" name="Shape 39"/>
+          <p:cNvSpPr/>
+          <p:nvPr/>
+        </p:nvSpPr>
+        <p:spPr>
+          <a:xfrm>
+            <a:off x="7274052" y="4169664"/>
             <a:ext cx="685800" cy="475488"/>
           </a:xfrm>
           <a:prstGeom prst="rect">
@@ -27674,13 +27734,13 @@
       </p:sp>
       <p:sp>
         <p:nvSpPr>
-          <p:cNvPr id="37" name="Text 35"/>
-          <p:cNvSpPr/>
-          <p:nvPr/>
-        </p:nvSpPr>
-        <p:spPr>
-          <a:xfrm>
-            <a:off x="2254649" y="4169664"/>
+          <p:cNvPr id="42" name="Text 40"/>
+          <p:cNvSpPr/>
+          <p:nvPr/>
+        </p:nvSpPr>
+        <p:spPr>
+          <a:xfrm>
+            <a:off x="7274052" y="4169664"/>
             <a:ext cx="685800" cy="475488"/>
           </a:xfrm>
           <a:prstGeom prst="rect">
@@ -27705,337 +27765,7 @@
                 <a:ea typeface="Trebuchet MS" pitchFamily="34" charset="-122"/>
                 <a:cs typeface="Trebuchet MS" pitchFamily="34" charset="-120"/>
               </a:rPr>
-              <a:t>h</a:t>
-            </a:r>
-            <a:endParaRPr lang="en-US" sz="900" dirty="0"/>
-          </a:p>
-        </p:txBody>
-      </p:sp>
-      <p:sp>
-        <p:nvSpPr>
-          <p:cNvPr id="38" name="Shape 36"/>
-          <p:cNvSpPr/>
-          <p:nvPr/>
-        </p:nvSpPr>
-        <p:spPr>
-          <a:xfrm>
-            <a:off x="3293146" y="4169664"/>
-            <a:ext cx="685800" cy="475488"/>
-          </a:xfrm>
-          <a:prstGeom prst="rect">
-            <a:avLst>
-              <a:gd name="adj" fmla="val 7692"/>
-            </a:avLst>
-          </a:prstGeom>
-          <a:solidFill>
-            <a:srgbClr val="FFFFFF"/>
-          </a:solidFill>
-          <a:ln w="12700">
-            <a:solidFill>
-              <a:srgbClr val="DB2777"/>
-            </a:solidFill>
-            <a:prstDash val="solid"/>
-          </a:ln>
-        </p:spPr>
-      </p:sp>
-      <p:sp>
-        <p:nvSpPr>
-          <p:cNvPr id="39" name="Text 37"/>
-          <p:cNvSpPr/>
-          <p:nvPr/>
-        </p:nvSpPr>
-        <p:spPr>
-          <a:xfrm>
-            <a:off x="3293146" y="4169664"/>
-            <a:ext cx="685800" cy="475488"/>
-          </a:xfrm>
-          <a:prstGeom prst="rect">
-            <a:avLst/>
-          </a:prstGeom>
-          <a:noFill/>
-          <a:ln/>
-        </p:spPr>
-        <p:txBody>
-          <a:bodyPr wrap="square" lIns="0" tIns="0" rIns="0" bIns="0" rtlCol="0" anchor="ctr"/>
-          <a:lstStyle/>
-          <a:p>
-            <a:pPr algn="ctr" indent="0" marL="0">
-              <a:buNone/>
-            </a:pPr>
-            <a:r>
-              <a:rPr lang="en-US" sz="900" b="1" dirty="0">
-                <a:solidFill>
-                  <a:srgbClr val="9D174D"/>
-                </a:solidFill>
-                <a:latin typeface="Trebuchet MS" pitchFamily="34" charset="0"/>
-                <a:ea typeface="Trebuchet MS" pitchFamily="34" charset="-122"/>
-                <a:cs typeface="Trebuchet MS" pitchFamily="34" charset="-120"/>
-              </a:rPr>
-              <a:t>e</a:t>
-            </a:r>
-            <a:endParaRPr lang="en-US" sz="900" dirty="0"/>
-          </a:p>
-        </p:txBody>
-      </p:sp>
-      <p:sp>
-        <p:nvSpPr>
-          <p:cNvPr id="40" name="Shape 38"/>
-          <p:cNvSpPr/>
-          <p:nvPr/>
-        </p:nvSpPr>
-        <p:spPr>
-          <a:xfrm>
-            <a:off x="4331643" y="4169664"/>
-            <a:ext cx="685800" cy="475488"/>
-          </a:xfrm>
-          <a:prstGeom prst="rect">
-            <a:avLst>
-              <a:gd name="adj" fmla="val 7692"/>
-            </a:avLst>
-          </a:prstGeom>
-          <a:solidFill>
-            <a:srgbClr val="FFFFFF"/>
-          </a:solidFill>
-          <a:ln w="12700">
-            <a:solidFill>
-              <a:srgbClr val="DB2777"/>
-            </a:solidFill>
-            <a:prstDash val="solid"/>
-          </a:ln>
-        </p:spPr>
-      </p:sp>
-      <p:sp>
-        <p:nvSpPr>
-          <p:cNvPr id="41" name="Text 39"/>
-          <p:cNvSpPr/>
-          <p:nvPr/>
-        </p:nvSpPr>
-        <p:spPr>
-          <a:xfrm>
-            <a:off x="4331643" y="4169664"/>
-            <a:ext cx="685800" cy="475488"/>
-          </a:xfrm>
-          <a:prstGeom prst="rect">
-            <a:avLst/>
-          </a:prstGeom>
-          <a:noFill/>
-          <a:ln/>
-        </p:spPr>
-        <p:txBody>
-          <a:bodyPr wrap="square" lIns="0" tIns="0" rIns="0" bIns="0" rtlCol="0" anchor="ctr"/>
-          <a:lstStyle/>
-          <a:p>
-            <a:pPr algn="ctr" indent="0" marL="0">
-              <a:buNone/>
-            </a:pPr>
-            <a:r>
-              <a:rPr lang="en-US" sz="900" b="1" dirty="0">
-                <a:solidFill>
-                  <a:srgbClr val="9D174D"/>
-                </a:solidFill>
-                <a:latin typeface="Trebuchet MS" pitchFamily="34" charset="0"/>
-                <a:ea typeface="Trebuchet MS" pitchFamily="34" charset="-122"/>
-                <a:cs typeface="Trebuchet MS" pitchFamily="34" charset="-120"/>
-              </a:rPr>
-              <a:t>l</a:t>
-            </a:r>
-            <a:endParaRPr lang="en-US" sz="900" dirty="0"/>
-          </a:p>
-        </p:txBody>
-      </p:sp>
-      <p:sp>
-        <p:nvSpPr>
-          <p:cNvPr id="42" name="Shape 40"/>
-          <p:cNvSpPr/>
-          <p:nvPr/>
-        </p:nvSpPr>
-        <p:spPr>
-          <a:xfrm>
-            <a:off x="5370141" y="4169664"/>
-            <a:ext cx="685800" cy="475488"/>
-          </a:xfrm>
-          <a:prstGeom prst="rect">
-            <a:avLst>
-              <a:gd name="adj" fmla="val 7692"/>
-            </a:avLst>
-          </a:prstGeom>
-          <a:solidFill>
-            <a:srgbClr val="FFFFFF"/>
-          </a:solidFill>
-          <a:ln w="12700">
-            <a:solidFill>
-              <a:srgbClr val="DB2777"/>
-            </a:solidFill>
-            <a:prstDash val="solid"/>
-          </a:ln>
-        </p:spPr>
-      </p:sp>
-      <p:sp>
-        <p:nvSpPr>
-          <p:cNvPr id="43" name="Text 41"/>
-          <p:cNvSpPr/>
-          <p:nvPr/>
-        </p:nvSpPr>
-        <p:spPr>
-          <a:xfrm>
-            <a:off x="5370141" y="4169664"/>
-            <a:ext cx="685800" cy="475488"/>
-          </a:xfrm>
-          <a:prstGeom prst="rect">
-            <a:avLst/>
-          </a:prstGeom>
-          <a:noFill/>
-          <a:ln/>
-        </p:spPr>
-        <p:txBody>
-          <a:bodyPr wrap="square" lIns="0" tIns="0" rIns="0" bIns="0" rtlCol="0" anchor="ctr"/>
-          <a:lstStyle/>
-          <a:p>
-            <a:pPr algn="ctr" indent="0" marL="0">
-              <a:buNone/>
-            </a:pPr>
-            <a:r>
-              <a:rPr lang="en-US" sz="900" b="1" dirty="0">
-                <a:solidFill>
-                  <a:srgbClr val="9D174D"/>
-                </a:solidFill>
-                <a:latin typeface="Trebuchet MS" pitchFamily="34" charset="0"/>
-                <a:ea typeface="Trebuchet MS" pitchFamily="34" charset="-122"/>
-                <a:cs typeface="Trebuchet MS" pitchFamily="34" charset="-120"/>
-              </a:rPr>
-              <a:t>p</a:t>
-            </a:r>
-            <a:endParaRPr lang="en-US" sz="900" dirty="0"/>
-          </a:p>
-        </p:txBody>
-      </p:sp>
-      <p:sp>
-        <p:nvSpPr>
-          <p:cNvPr id="44" name="Shape 42"/>
-          <p:cNvSpPr/>
-          <p:nvPr/>
-        </p:nvSpPr>
-        <p:spPr>
-          <a:xfrm>
-            <a:off x="6408638" y="4169664"/>
-            <a:ext cx="685800" cy="475488"/>
-          </a:xfrm>
-          <a:prstGeom prst="rect">
-            <a:avLst>
-              <a:gd name="adj" fmla="val 7692"/>
-            </a:avLst>
-          </a:prstGeom>
-          <a:solidFill>
-            <a:srgbClr val="FFFFFF"/>
-          </a:solidFill>
-          <a:ln w="12700">
-            <a:solidFill>
-              <a:srgbClr val="DB2777"/>
-            </a:solidFill>
-            <a:prstDash val="solid"/>
-          </a:ln>
-        </p:spPr>
-      </p:sp>
-      <p:sp>
-        <p:nvSpPr>
-          <p:cNvPr id="45" name="Text 43"/>
-          <p:cNvSpPr/>
-          <p:nvPr/>
-        </p:nvSpPr>
-        <p:spPr>
-          <a:xfrm>
-            <a:off x="6408638" y="4169664"/>
-            <a:ext cx="685800" cy="475488"/>
-          </a:xfrm>
-          <a:prstGeom prst="rect">
-            <a:avLst/>
-          </a:prstGeom>
-          <a:noFill/>
-          <a:ln/>
-        </p:spPr>
-        <p:txBody>
-          <a:bodyPr wrap="square" lIns="0" tIns="0" rIns="0" bIns="0" rtlCol="0" anchor="ctr"/>
-          <a:lstStyle/>
-          <a:p>
-            <a:pPr algn="ctr" indent="0" marL="0">
-              <a:buNone/>
-            </a:pPr>
-            <a:r>
-              <a:rPr lang="en-US" sz="900" b="1" dirty="0">
-                <a:solidFill>
-                  <a:srgbClr val="9D174D"/>
-                </a:solidFill>
-                <a:latin typeface="Trebuchet MS" pitchFamily="34" charset="0"/>
-                <a:ea typeface="Trebuchet MS" pitchFamily="34" charset="-122"/>
-                <a:cs typeface="Trebuchet MS" pitchFamily="34" charset="-120"/>
-              </a:rPr>
               <a:t>er</a:t>
-            </a:r>
-            <a:endParaRPr lang="en-US" sz="900" dirty="0"/>
-          </a:p>
-        </p:txBody>
-      </p:sp>
-      <p:sp>
-        <p:nvSpPr>
-          <p:cNvPr id="46" name="Shape 44"/>
-          <p:cNvSpPr/>
-          <p:nvPr/>
-        </p:nvSpPr>
-        <p:spPr>
-          <a:xfrm>
-            <a:off x="7447135" y="4169664"/>
-            <a:ext cx="685800" cy="475488"/>
-          </a:xfrm>
-          <a:prstGeom prst="rect">
-            <a:avLst>
-              <a:gd name="adj" fmla="val 7692"/>
-            </a:avLst>
-          </a:prstGeom>
-          <a:solidFill>
-            <a:srgbClr val="FFFFFF"/>
-          </a:solidFill>
-          <a:ln w="12700">
-            <a:solidFill>
-              <a:srgbClr val="DB2777"/>
-            </a:solidFill>
-            <a:prstDash val="solid"/>
-          </a:ln>
-        </p:spPr>
-      </p:sp>
-      <p:sp>
-        <p:nvSpPr>
-          <p:cNvPr id="47" name="Text 45"/>
-          <p:cNvSpPr/>
-          <p:nvPr/>
-        </p:nvSpPr>
-        <p:spPr>
-          <a:xfrm>
-            <a:off x="7447135" y="4169664"/>
-            <a:ext cx="685800" cy="475488"/>
-          </a:xfrm>
-          <a:prstGeom prst="rect">
-            <a:avLst/>
-          </a:prstGeom>
-          <a:noFill/>
-          <a:ln/>
-        </p:spPr>
-        <p:txBody>
-          <a:bodyPr wrap="square" lIns="0" tIns="0" rIns="0" bIns="0" rtlCol="0" anchor="ctr"/>
-          <a:lstStyle/>
-          <a:p>
-            <a:pPr algn="ctr" indent="0" marL="0">
-              <a:buNone/>
-            </a:pPr>
-            <a:r>
-              <a:rPr lang="en-US" sz="900" b="1" dirty="0">
-                <a:solidFill>
-                  <a:srgbClr val="9D174D"/>
-                </a:solidFill>
-                <a:latin typeface="Trebuchet MS" pitchFamily="34" charset="0"/>
-                <a:ea typeface="Trebuchet MS" pitchFamily="34" charset="-122"/>
-                <a:cs typeface="Trebuchet MS" pitchFamily="34" charset="-120"/>
-              </a:rPr>
-              <a:t>s</a:t>
             </a:r>
             <a:endParaRPr lang="en-US" sz="900" dirty="0"/>
           </a:p>
@@ -28327,7 +28057,7 @@
                 <a:ea typeface="Calibri" pitchFamily="34" charset="-122"/>
                 <a:cs typeface="Calibri" pitchFamily="34" charset="-120"/>
               </a:rPr>
-              <a:t>Word Labs  •  wordlabs.app  •  Root: 'help' = to assist or support someone</a:t>
+              <a:t>Word Labs  •  wordlabs.app  •  Root: 'help' = assist, support, or aid</a:t>
             </a:r>
             <a:endParaRPr lang="en-US" sz="800" dirty="0"/>
           </a:p>
@@ -28466,7 +28196,7 @@
                 <a:ea typeface="Trebuchet MS" pitchFamily="34" charset="-122"/>
                 <a:cs typeface="Trebuchet MS" pitchFamily="34" charset="-120"/>
               </a:rPr>
-              <a:t>helpfully</a:t>
+              <a:t>unhelpful</a:t>
             </a:r>
             <a:endParaRPr lang="en-US" sz="2800" dirty="0"/>
           </a:p>
@@ -29154,7 +28884,7 @@
                 <a:ea typeface="Calibri" pitchFamily="34" charset="-122"/>
                 <a:cs typeface="Calibri" pitchFamily="34" charset="-120"/>
               </a:rPr>
-              <a:t>Word Labs  •  wordlabs.app  •  Root: 'help' = to assist or support someone</a:t>
+              <a:t>Word Labs  •  wordlabs.app  •  Root: 'help' = assist, support, or aid</a:t>
             </a:r>
             <a:endParaRPr lang="en-US" sz="800" dirty="0"/>
           </a:p>
@@ -29293,7 +29023,7 @@
                 <a:ea typeface="Trebuchet MS" pitchFamily="34" charset="-122"/>
                 <a:cs typeface="Trebuchet MS" pitchFamily="34" charset="-120"/>
               </a:rPr>
-              <a:t>helpfully</a:t>
+              <a:t>unhelpful</a:t>
             </a:r>
             <a:endParaRPr lang="en-US" sz="2800" dirty="0"/>
           </a:p>
@@ -29382,11 +29112,11 @@
             </a:avLst>
           </a:prstGeom>
           <a:solidFill>
-            <a:srgbClr val="CCFBF1"/>
+            <a:srgbClr val="DDD6FE"/>
           </a:solidFill>
           <a:ln w="19050">
             <a:solidFill>
-              <a:srgbClr val="0D9488"/>
+              <a:srgbClr val="7C3AED"/>
             </a:solidFill>
             <a:prstDash val="solid"/>
           </a:ln>
@@ -29426,13 +29156,13 @@
             <a:r>
               <a:rPr lang="en-US" sz="1300" b="1" dirty="0">
                 <a:solidFill>
-                  <a:srgbClr val="0F766E"/>
+                  <a:srgbClr val="4C1D95"/>
                 </a:solidFill>
                 <a:latin typeface="Trebuchet MS" pitchFamily="34" charset="0"/>
                 <a:ea typeface="Trebuchet MS" pitchFamily="34" charset="-122"/>
                 <a:cs typeface="Trebuchet MS" pitchFamily="34" charset="-120"/>
               </a:rPr>
-              <a:t>help</a:t>
+              <a:t>un</a:t>
             </a:r>
             <a:endParaRPr lang="en-US" sz="1300" dirty="0"/>
           </a:p>
@@ -29471,7 +29201,7 @@
                 <a:ea typeface="Calibri" pitchFamily="34" charset="-122"/>
                 <a:cs typeface="Calibri" pitchFamily="34" charset="-120"/>
               </a:rPr>
-              <a:t>to assist or support</a:t>
+              <a:t>not, the opposite of</a:t>
             </a:r>
             <a:endParaRPr lang="en-US" sz="850" dirty="0"/>
           </a:p>
@@ -29494,11 +29224,11 @@
             </a:avLst>
           </a:prstGeom>
           <a:solidFill>
-            <a:srgbClr val="FCE7F3"/>
+            <a:srgbClr val="CCFBF1"/>
           </a:solidFill>
           <a:ln w="19050">
             <a:solidFill>
-              <a:srgbClr val="DB2777"/>
+              <a:srgbClr val="0D9488"/>
             </a:solidFill>
             <a:prstDash val="solid"/>
           </a:ln>
@@ -29538,13 +29268,13 @@
             <a:r>
               <a:rPr lang="en-US" sz="1300" b="1" dirty="0">
                 <a:solidFill>
-                  <a:srgbClr val="9D174D"/>
+                  <a:srgbClr val="0F766E"/>
                 </a:solidFill>
                 <a:latin typeface="Trebuchet MS" pitchFamily="34" charset="0"/>
                 <a:ea typeface="Trebuchet MS" pitchFamily="34" charset="-122"/>
                 <a:cs typeface="Trebuchet MS" pitchFamily="34" charset="-120"/>
               </a:rPr>
-              <a:t>ful</a:t>
+              <a:t>help</a:t>
             </a:r>
             <a:endParaRPr lang="en-US" sz="1300" dirty="0"/>
           </a:p>
@@ -29583,7 +29313,7 @@
                 <a:ea typeface="Calibri" pitchFamily="34" charset="-122"/>
                 <a:cs typeface="Calibri" pitchFamily="34" charset="-120"/>
               </a:rPr>
-              <a:t>full of, having the quality of</a:t>
+              <a:t>to assist or support</a:t>
             </a:r>
             <a:endParaRPr lang="en-US" sz="850" dirty="0"/>
           </a:p>
@@ -29656,7 +29386,7 @@
                 <a:ea typeface="Trebuchet MS" pitchFamily="34" charset="-122"/>
                 <a:cs typeface="Trebuchet MS" pitchFamily="34" charset="-120"/>
               </a:rPr>
-              <a:t>ly</a:t>
+              <a:t>ful</a:t>
             </a:r>
             <a:endParaRPr lang="en-US" sz="1300" dirty="0"/>
           </a:p>
@@ -29695,7 +29425,7 @@
                 <a:ea typeface="Calibri" pitchFamily="34" charset="-122"/>
                 <a:cs typeface="Calibri" pitchFamily="34" charset="-120"/>
               </a:rPr>
-              <a:t>in a certain way</a:t>
+              <a:t>full of, having the quality of</a:t>
             </a:r>
             <a:endParaRPr lang="en-US" sz="850" dirty="0"/>
           </a:p>
@@ -30251,7 +29981,7 @@
                 <a:ea typeface="Calibri" pitchFamily="34" charset="-122"/>
                 <a:cs typeface="Calibri" pitchFamily="34" charset="-120"/>
               </a:rPr>
-              <a:t>Word Labs  •  wordlabs.app  •  Root: 'help' = to assist or support someone</a:t>
+              <a:t>Word Labs  •  wordlabs.app  •  Root: 'help' = assist, support, or aid</a:t>
             </a:r>
             <a:endParaRPr lang="en-US" sz="800" dirty="0"/>
           </a:p>
@@ -30390,7 +30120,7 @@
                 <a:ea typeface="Trebuchet MS" pitchFamily="34" charset="-122"/>
                 <a:cs typeface="Trebuchet MS" pitchFamily="34" charset="-120"/>
               </a:rPr>
-              <a:t>helpfully</a:t>
+              <a:t>unhelpful</a:t>
             </a:r>
             <a:endParaRPr lang="en-US" sz="2800" dirty="0"/>
           </a:p>
@@ -30479,11 +30209,11 @@
             </a:avLst>
           </a:prstGeom>
           <a:solidFill>
-            <a:srgbClr val="CCFBF1"/>
+            <a:srgbClr val="DDD6FE"/>
           </a:solidFill>
           <a:ln w="19050">
             <a:solidFill>
-              <a:srgbClr val="0D9488"/>
+              <a:srgbClr val="7C3AED"/>
             </a:solidFill>
             <a:prstDash val="solid"/>
           </a:ln>
@@ -30523,13 +30253,13 @@
             <a:r>
               <a:rPr lang="en-US" sz="1300" b="1" dirty="0">
                 <a:solidFill>
-                  <a:srgbClr val="0F766E"/>
+                  <a:srgbClr val="4C1D95"/>
                 </a:solidFill>
                 <a:latin typeface="Trebuchet MS" pitchFamily="34" charset="0"/>
                 <a:ea typeface="Trebuchet MS" pitchFamily="34" charset="-122"/>
                 <a:cs typeface="Trebuchet MS" pitchFamily="34" charset="-120"/>
               </a:rPr>
-              <a:t>help</a:t>
+              <a:t>un</a:t>
             </a:r>
             <a:endParaRPr lang="en-US" sz="1300" dirty="0"/>
           </a:p>
@@ -30568,7 +30298,7 @@
                 <a:ea typeface="Calibri" pitchFamily="34" charset="-122"/>
                 <a:cs typeface="Calibri" pitchFamily="34" charset="-120"/>
               </a:rPr>
-              <a:t>to assist or support</a:t>
+              <a:t>not, the opposite of</a:t>
             </a:r>
             <a:endParaRPr lang="en-US" sz="850" dirty="0"/>
           </a:p>
@@ -30591,11 +30321,11 @@
             </a:avLst>
           </a:prstGeom>
           <a:solidFill>
-            <a:srgbClr val="FCE7F3"/>
+            <a:srgbClr val="CCFBF1"/>
           </a:solidFill>
           <a:ln w="19050">
             <a:solidFill>
-              <a:srgbClr val="DB2777"/>
+              <a:srgbClr val="0D9488"/>
             </a:solidFill>
             <a:prstDash val="solid"/>
           </a:ln>
@@ -30635,13 +30365,13 @@
             <a:r>
               <a:rPr lang="en-US" sz="1300" b="1" dirty="0">
                 <a:solidFill>
-                  <a:srgbClr val="9D174D"/>
+                  <a:srgbClr val="0F766E"/>
                 </a:solidFill>
                 <a:latin typeface="Trebuchet MS" pitchFamily="34" charset="0"/>
                 <a:ea typeface="Trebuchet MS" pitchFamily="34" charset="-122"/>
                 <a:cs typeface="Trebuchet MS" pitchFamily="34" charset="-120"/>
               </a:rPr>
-              <a:t>ful</a:t>
+              <a:t>help</a:t>
             </a:r>
             <a:endParaRPr lang="en-US" sz="1300" dirty="0"/>
           </a:p>
@@ -30680,7 +30410,7 @@
                 <a:ea typeface="Calibri" pitchFamily="34" charset="-122"/>
                 <a:cs typeface="Calibri" pitchFamily="34" charset="-120"/>
               </a:rPr>
-              <a:t>full of, having the quality of</a:t>
+              <a:t>to assist or support</a:t>
             </a:r>
             <a:endParaRPr lang="en-US" sz="850" dirty="0"/>
           </a:p>
@@ -30753,7 +30483,7 @@
                 <a:ea typeface="Trebuchet MS" pitchFamily="34" charset="-122"/>
                 <a:cs typeface="Trebuchet MS" pitchFamily="34" charset="-120"/>
               </a:rPr>
-              <a:t>ly</a:t>
+              <a:t>ful</a:t>
             </a:r>
             <a:endParaRPr lang="en-US" sz="1300" dirty="0"/>
           </a:p>
@@ -30792,7 +30522,7 @@
                 <a:ea typeface="Calibri" pitchFamily="34" charset="-122"/>
                 <a:cs typeface="Calibri" pitchFamily="34" charset="-120"/>
               </a:rPr>
-              <a:t>in a certain way</a:t>
+              <a:t>full of, having the quality of</a:t>
             </a:r>
             <a:endParaRPr lang="en-US" sz="850" dirty="0"/>
           </a:p>
@@ -30951,7 +30681,7 @@
                 <a:ea typeface="Trebuchet MS" pitchFamily="34" charset="-122"/>
                 <a:cs typeface="Trebuchet MS" pitchFamily="34" charset="-120"/>
               </a:rPr>
-              <a:t>help</a:t>
+              <a:t>un</a:t>
             </a:r>
             <a:endParaRPr lang="en-US" sz="1400" dirty="0"/>
           </a:p>
@@ -31056,7 +30786,7 @@
                 <a:ea typeface="Trebuchet MS" pitchFamily="34" charset="-122"/>
                 <a:cs typeface="Trebuchet MS" pitchFamily="34" charset="-120"/>
               </a:rPr>
-              <a:t>ful</a:t>
+              <a:t>help</a:t>
             </a:r>
             <a:endParaRPr lang="en-US" sz="1400" dirty="0"/>
           </a:p>
@@ -31161,7 +30891,7 @@
                 <a:ea typeface="Trebuchet MS" pitchFamily="34" charset="-122"/>
                 <a:cs typeface="Trebuchet MS" pitchFamily="34" charset="-120"/>
               </a:rPr>
-              <a:t>ly</a:t>
+              <a:t>ful</a:t>
             </a:r>
             <a:endParaRPr lang="en-US" sz="1400" dirty="0"/>
           </a:p>
@@ -31585,7 +31315,7 @@
                 <a:ea typeface="Calibri" pitchFamily="34" charset="-122"/>
                 <a:cs typeface="Calibri" pitchFamily="34" charset="-120"/>
               </a:rPr>
-              <a:t>Word Labs  •  wordlabs.app  •  Root: 'help' = to assist or support someone</a:t>
+              <a:t>Word Labs  •  wordlabs.app  •  Root: 'help' = assist, support, or aid</a:t>
             </a:r>
             <a:endParaRPr lang="en-US" sz="800" dirty="0"/>
           </a:p>
@@ -31724,7 +31454,7 @@
                 <a:ea typeface="Trebuchet MS" pitchFamily="34" charset="-122"/>
                 <a:cs typeface="Trebuchet MS" pitchFamily="34" charset="-120"/>
               </a:rPr>
-              <a:t>helpfully</a:t>
+              <a:t>unhelpful</a:t>
             </a:r>
             <a:endParaRPr lang="en-US" sz="2800" dirty="0"/>
           </a:p>
@@ -31813,11 +31543,11 @@
             </a:avLst>
           </a:prstGeom>
           <a:solidFill>
-            <a:srgbClr val="CCFBF1"/>
+            <a:srgbClr val="DDD6FE"/>
           </a:solidFill>
           <a:ln w="19050">
             <a:solidFill>
-              <a:srgbClr val="0D9488"/>
+              <a:srgbClr val="7C3AED"/>
             </a:solidFill>
             <a:prstDash val="solid"/>
           </a:ln>
@@ -31857,13 +31587,13 @@
             <a:r>
               <a:rPr lang="en-US" sz="1300" b="1" dirty="0">
                 <a:solidFill>
-                  <a:srgbClr val="0F766E"/>
+                  <a:srgbClr val="4C1D95"/>
                 </a:solidFill>
                 <a:latin typeface="Trebuchet MS" pitchFamily="34" charset="0"/>
                 <a:ea typeface="Trebuchet MS" pitchFamily="34" charset="-122"/>
                 <a:cs typeface="Trebuchet MS" pitchFamily="34" charset="-120"/>
               </a:rPr>
-              <a:t>help</a:t>
+              <a:t>un</a:t>
             </a:r>
             <a:endParaRPr lang="en-US" sz="1300" dirty="0"/>
           </a:p>
@@ -31902,7 +31632,7 @@
                 <a:ea typeface="Calibri" pitchFamily="34" charset="-122"/>
                 <a:cs typeface="Calibri" pitchFamily="34" charset="-120"/>
               </a:rPr>
-              <a:t>to assist or support</a:t>
+              <a:t>not, the opposite of</a:t>
             </a:r>
             <a:endParaRPr lang="en-US" sz="850" dirty="0"/>
           </a:p>
@@ -31925,11 +31655,11 @@
             </a:avLst>
           </a:prstGeom>
           <a:solidFill>
-            <a:srgbClr val="FCE7F3"/>
+            <a:srgbClr val="CCFBF1"/>
           </a:solidFill>
           <a:ln w="19050">
             <a:solidFill>
-              <a:srgbClr val="DB2777"/>
+              <a:srgbClr val="0D9488"/>
             </a:solidFill>
             <a:prstDash val="solid"/>
           </a:ln>
@@ -31969,13 +31699,13 @@
             <a:r>
               <a:rPr lang="en-US" sz="1300" b="1" dirty="0">
                 <a:solidFill>
-                  <a:srgbClr val="9D174D"/>
+                  <a:srgbClr val="0F766E"/>
                 </a:solidFill>
                 <a:latin typeface="Trebuchet MS" pitchFamily="34" charset="0"/>
                 <a:ea typeface="Trebuchet MS" pitchFamily="34" charset="-122"/>
                 <a:cs typeface="Trebuchet MS" pitchFamily="34" charset="-120"/>
               </a:rPr>
-              <a:t>ful</a:t>
+              <a:t>help</a:t>
             </a:r>
             <a:endParaRPr lang="en-US" sz="1300" dirty="0"/>
           </a:p>
@@ -32014,7 +31744,7 @@
                 <a:ea typeface="Calibri" pitchFamily="34" charset="-122"/>
                 <a:cs typeface="Calibri" pitchFamily="34" charset="-120"/>
               </a:rPr>
-              <a:t>full of, having the quality of</a:t>
+              <a:t>to assist or support</a:t>
             </a:r>
             <a:endParaRPr lang="en-US" sz="850" dirty="0"/>
           </a:p>
@@ -32087,7 +31817,7 @@
                 <a:ea typeface="Trebuchet MS" pitchFamily="34" charset="-122"/>
                 <a:cs typeface="Trebuchet MS" pitchFamily="34" charset="-120"/>
               </a:rPr>
-              <a:t>ly</a:t>
+              <a:t>ful</a:t>
             </a:r>
             <a:endParaRPr lang="en-US" sz="1300" dirty="0"/>
           </a:p>
@@ -32126,7 +31856,7 @@
                 <a:ea typeface="Calibri" pitchFamily="34" charset="-122"/>
                 <a:cs typeface="Calibri" pitchFamily="34" charset="-120"/>
               </a:rPr>
-              <a:t>in a certain way</a:t>
+              <a:t>full of, having the quality of</a:t>
             </a:r>
             <a:endParaRPr lang="en-US" sz="850" dirty="0"/>
           </a:p>
@@ -32285,7 +32015,7 @@
                 <a:ea typeface="Trebuchet MS" pitchFamily="34" charset="-122"/>
                 <a:cs typeface="Trebuchet MS" pitchFamily="34" charset="-120"/>
               </a:rPr>
-              <a:t>help</a:t>
+              <a:t>un</a:t>
             </a:r>
             <a:endParaRPr lang="en-US" sz="1400" dirty="0"/>
           </a:p>
@@ -32390,7 +32120,7 @@
                 <a:ea typeface="Trebuchet MS" pitchFamily="34" charset="-122"/>
                 <a:cs typeface="Trebuchet MS" pitchFamily="34" charset="-120"/>
               </a:rPr>
-              <a:t>ful</a:t>
+              <a:t>help</a:t>
             </a:r>
             <a:endParaRPr lang="en-US" sz="1400" dirty="0"/>
           </a:p>
@@ -32495,7 +32225,7 @@
                 <a:ea typeface="Trebuchet MS" pitchFamily="34" charset="-122"/>
                 <a:cs typeface="Trebuchet MS" pitchFamily="34" charset="-120"/>
               </a:rPr>
-              <a:t>ly</a:t>
+              <a:t>ful</a:t>
             </a:r>
             <a:endParaRPr lang="en-US" sz="1400" dirty="0"/>
           </a:p>
@@ -32602,8 +32332,8 @@
         </p:nvSpPr>
         <p:spPr>
           <a:xfrm>
-            <a:off x="2023872" y="4169664"/>
-            <a:ext cx="685800" cy="475488"/>
+            <a:off x="1951330" y="4169664"/>
+            <a:ext cx="676656" cy="475488"/>
           </a:xfrm>
           <a:prstGeom prst="rect">
             <a:avLst>
@@ -32629,8 +32359,8 @@
         </p:nvSpPr>
         <p:spPr>
           <a:xfrm>
-            <a:off x="2023872" y="4169664"/>
-            <a:ext cx="685800" cy="475488"/>
+            <a:off x="1951330" y="4169664"/>
+            <a:ext cx="676656" cy="475488"/>
           </a:xfrm>
           <a:prstGeom prst="rect">
             <a:avLst/>
@@ -32654,7 +32384,7 @@
                 <a:ea typeface="Trebuchet MS" pitchFamily="34" charset="-122"/>
                 <a:cs typeface="Trebuchet MS" pitchFamily="34" charset="-120"/>
               </a:rPr>
-              <a:t>h</a:t>
+              <a:t>u</a:t>
             </a:r>
             <a:endParaRPr lang="en-US" sz="900" dirty="0"/>
           </a:p>
@@ -32668,8 +32398,8 @@
         </p:nvSpPr>
         <p:spPr>
           <a:xfrm>
-            <a:off x="2831592" y="4169664"/>
-            <a:ext cx="685800" cy="475488"/>
+            <a:off x="2677363" y="4169664"/>
+            <a:ext cx="676656" cy="475488"/>
           </a:xfrm>
           <a:prstGeom prst="rect">
             <a:avLst>
@@ -32695,8 +32425,8 @@
         </p:nvSpPr>
         <p:spPr>
           <a:xfrm>
-            <a:off x="2831592" y="4169664"/>
-            <a:ext cx="685800" cy="475488"/>
+            <a:off x="2677363" y="4169664"/>
+            <a:ext cx="676656" cy="475488"/>
           </a:xfrm>
           <a:prstGeom prst="rect">
             <a:avLst/>
@@ -32720,7 +32450,7 @@
                 <a:ea typeface="Trebuchet MS" pitchFamily="34" charset="-122"/>
                 <a:cs typeface="Trebuchet MS" pitchFamily="34" charset="-120"/>
               </a:rPr>
-              <a:t>e</a:t>
+              <a:t>n</a:t>
             </a:r>
             <a:endParaRPr lang="en-US" sz="900" dirty="0"/>
           </a:p>
@@ -32734,8 +32464,8 @@
         </p:nvSpPr>
         <p:spPr>
           <a:xfrm>
-            <a:off x="3639312" y="4169664"/>
-            <a:ext cx="685800" cy="475488"/>
+            <a:off x="3403397" y="4169664"/>
+            <a:ext cx="676656" cy="475488"/>
           </a:xfrm>
           <a:prstGeom prst="rect">
             <a:avLst>
@@ -32761,8 +32491,8 @@
         </p:nvSpPr>
         <p:spPr>
           <a:xfrm>
-            <a:off x="3639312" y="4169664"/>
-            <a:ext cx="685800" cy="475488"/>
+            <a:off x="3403397" y="4169664"/>
+            <a:ext cx="676656" cy="475488"/>
           </a:xfrm>
           <a:prstGeom prst="rect">
             <a:avLst/>
@@ -32786,7 +32516,7 @@
                 <a:ea typeface="Trebuchet MS" pitchFamily="34" charset="-122"/>
                 <a:cs typeface="Trebuchet MS" pitchFamily="34" charset="-120"/>
               </a:rPr>
-              <a:t>l</a:t>
+              <a:t>h</a:t>
             </a:r>
             <a:endParaRPr lang="en-US" sz="900" dirty="0"/>
           </a:p>
@@ -32800,8 +32530,8 @@
         </p:nvSpPr>
         <p:spPr>
           <a:xfrm>
-            <a:off x="4447032" y="4169664"/>
-            <a:ext cx="685800" cy="475488"/>
+            <a:off x="4129430" y="4169664"/>
+            <a:ext cx="676656" cy="475488"/>
           </a:xfrm>
           <a:prstGeom prst="rect">
             <a:avLst>
@@ -32827,8 +32557,8 @@
         </p:nvSpPr>
         <p:spPr>
           <a:xfrm>
-            <a:off x="4447032" y="4169664"/>
-            <a:ext cx="685800" cy="475488"/>
+            <a:off x="4129430" y="4169664"/>
+            <a:ext cx="676656" cy="475488"/>
           </a:xfrm>
           <a:prstGeom prst="rect">
             <a:avLst/>
@@ -32852,7 +32582,7 @@
                 <a:ea typeface="Trebuchet MS" pitchFamily="34" charset="-122"/>
                 <a:cs typeface="Trebuchet MS" pitchFamily="34" charset="-120"/>
               </a:rPr>
-              <a:t>p</a:t>
+              <a:t>e</a:t>
             </a:r>
             <a:endParaRPr lang="en-US" sz="900" dirty="0"/>
           </a:p>
@@ -32866,8 +32596,8 @@
         </p:nvSpPr>
         <p:spPr>
           <a:xfrm>
-            <a:off x="5254752" y="4169664"/>
-            <a:ext cx="685800" cy="475488"/>
+            <a:off x="4855464" y="4169664"/>
+            <a:ext cx="676656" cy="475488"/>
           </a:xfrm>
           <a:prstGeom prst="rect">
             <a:avLst>
@@ -32893,8 +32623,8 @@
         </p:nvSpPr>
         <p:spPr>
           <a:xfrm>
-            <a:off x="5254752" y="4169664"/>
-            <a:ext cx="685800" cy="475488"/>
+            <a:off x="4855464" y="4169664"/>
+            <a:ext cx="676656" cy="475488"/>
           </a:xfrm>
           <a:prstGeom prst="rect">
             <a:avLst/>
@@ -32918,7 +32648,7 @@
                 <a:ea typeface="Trebuchet MS" pitchFamily="34" charset="-122"/>
                 <a:cs typeface="Trebuchet MS" pitchFamily="34" charset="-120"/>
               </a:rPr>
-              <a:t>f</a:t>
+              <a:t>l</a:t>
             </a:r>
             <a:endParaRPr lang="en-US" sz="900" dirty="0"/>
           </a:p>
@@ -32932,8 +32662,8 @@
         </p:nvSpPr>
         <p:spPr>
           <a:xfrm>
-            <a:off x="6062472" y="4169664"/>
-            <a:ext cx="685800" cy="475488"/>
+            <a:off x="5581498" y="4169664"/>
+            <a:ext cx="676656" cy="475488"/>
           </a:xfrm>
           <a:prstGeom prst="rect">
             <a:avLst>
@@ -32959,8 +32689,8 @@
         </p:nvSpPr>
         <p:spPr>
           <a:xfrm>
-            <a:off x="6062472" y="4169664"/>
-            <a:ext cx="685800" cy="475488"/>
+            <a:off x="5581498" y="4169664"/>
+            <a:ext cx="676656" cy="475488"/>
           </a:xfrm>
           <a:prstGeom prst="rect">
             <a:avLst/>
@@ -32984,7 +32714,7 @@
                 <a:ea typeface="Trebuchet MS" pitchFamily="34" charset="-122"/>
                 <a:cs typeface="Trebuchet MS" pitchFamily="34" charset="-120"/>
               </a:rPr>
-              <a:t>u</a:t>
+              <a:t>p</a:t>
             </a:r>
             <a:endParaRPr lang="en-US" sz="900" dirty="0"/>
           </a:p>
@@ -32998,8 +32728,8 @@
         </p:nvSpPr>
         <p:spPr>
           <a:xfrm>
-            <a:off x="6870192" y="4169664"/>
-            <a:ext cx="685800" cy="475488"/>
+            <a:off x="6307531" y="4169664"/>
+            <a:ext cx="676656" cy="475488"/>
           </a:xfrm>
           <a:prstGeom prst="rect">
             <a:avLst>
@@ -33025,8 +32755,8 @@
         </p:nvSpPr>
         <p:spPr>
           <a:xfrm>
-            <a:off x="6870192" y="4169664"/>
-            <a:ext cx="685800" cy="475488"/>
+            <a:off x="6307531" y="4169664"/>
+            <a:ext cx="676656" cy="475488"/>
           </a:xfrm>
           <a:prstGeom prst="rect">
             <a:avLst/>
@@ -33050,7 +32780,7 @@
                 <a:ea typeface="Trebuchet MS" pitchFamily="34" charset="-122"/>
                 <a:cs typeface="Trebuchet MS" pitchFamily="34" charset="-120"/>
               </a:rPr>
-              <a:t>ll</a:t>
+              <a:t>f</a:t>
             </a:r>
             <a:endParaRPr lang="en-US" sz="900" dirty="0"/>
           </a:p>
@@ -33064,8 +32794,8 @@
         </p:nvSpPr>
         <p:spPr>
           <a:xfrm>
-            <a:off x="7677912" y="4169664"/>
-            <a:ext cx="685800" cy="475488"/>
+            <a:off x="7033565" y="4169664"/>
+            <a:ext cx="676656" cy="475488"/>
           </a:xfrm>
           <a:prstGeom prst="rect">
             <a:avLst>
@@ -33091,8 +32821,8 @@
         </p:nvSpPr>
         <p:spPr>
           <a:xfrm>
-            <a:off x="7677912" y="4169664"/>
-            <a:ext cx="685800" cy="475488"/>
+            <a:off x="7033565" y="4169664"/>
+            <a:ext cx="676656" cy="475488"/>
           </a:xfrm>
           <a:prstGeom prst="rect">
             <a:avLst/>
@@ -33116,7 +32846,73 @@
                 <a:ea typeface="Trebuchet MS" pitchFamily="34" charset="-122"/>
                 <a:cs typeface="Trebuchet MS" pitchFamily="34" charset="-120"/>
               </a:rPr>
-              <a:t>y</a:t>
+              <a:t>u</a:t>
+            </a:r>
+            <a:endParaRPr lang="en-US" sz="900" dirty="0"/>
+          </a:p>
+        </p:txBody>
+      </p:sp>
+      <p:sp>
+        <p:nvSpPr>
+          <p:cNvPr id="55" name="Shape 53"/>
+          <p:cNvSpPr/>
+          <p:nvPr/>
+        </p:nvSpPr>
+        <p:spPr>
+          <a:xfrm>
+            <a:off x="7759598" y="4169664"/>
+            <a:ext cx="676656" cy="475488"/>
+          </a:xfrm>
+          <a:prstGeom prst="rect">
+            <a:avLst>
+              <a:gd name="adj" fmla="val 7692"/>
+            </a:avLst>
+          </a:prstGeom>
+          <a:solidFill>
+            <a:srgbClr val="FFFFFF"/>
+          </a:solidFill>
+          <a:ln w="12700">
+            <a:solidFill>
+              <a:srgbClr val="DB2777"/>
+            </a:solidFill>
+            <a:prstDash val="solid"/>
+          </a:ln>
+        </p:spPr>
+      </p:sp>
+      <p:sp>
+        <p:nvSpPr>
+          <p:cNvPr id="56" name="Text 54"/>
+          <p:cNvSpPr/>
+          <p:nvPr/>
+        </p:nvSpPr>
+        <p:spPr>
+          <a:xfrm>
+            <a:off x="7759598" y="4169664"/>
+            <a:ext cx="676656" cy="475488"/>
+          </a:xfrm>
+          <a:prstGeom prst="rect">
+            <a:avLst/>
+          </a:prstGeom>
+          <a:noFill/>
+          <a:ln/>
+        </p:spPr>
+        <p:txBody>
+          <a:bodyPr wrap="square" lIns="0" tIns="0" rIns="0" bIns="0" rtlCol="0" anchor="ctr"/>
+          <a:lstStyle/>
+          <a:p>
+            <a:pPr algn="ctr" indent="0" marL="0">
+              <a:buNone/>
+            </a:pPr>
+            <a:r>
+              <a:rPr lang="en-US" sz="900" b="1" dirty="0">
+                <a:solidFill>
+                  <a:srgbClr val="9D174D"/>
+                </a:solidFill>
+                <a:latin typeface="Trebuchet MS" pitchFamily="34" charset="0"/>
+                <a:ea typeface="Trebuchet MS" pitchFamily="34" charset="-122"/>
+                <a:cs typeface="Trebuchet MS" pitchFamily="34" charset="-120"/>
+              </a:rPr>
+              <a:t>l</a:t>
             </a:r>
             <a:endParaRPr lang="en-US" sz="900" dirty="0"/>
           </a:p>
@@ -33408,7 +33204,7 @@
                 <a:ea typeface="Calibri" pitchFamily="34" charset="-122"/>
                 <a:cs typeface="Calibri" pitchFamily="34" charset="-120"/>
               </a:rPr>
-              <a:t>Word Labs  •  wordlabs.app  •  Root: 'help' = to assist or support someone</a:t>
+              <a:t>Word Labs  •  wordlabs.app  •  Root: 'help' = assist, support, or aid</a:t>
             </a:r>
             <a:endParaRPr lang="en-US" sz="800" dirty="0"/>
           </a:p>
@@ -34577,7 +34373,7 @@
                 <a:ea typeface="Calibri" pitchFamily="34" charset="-122"/>
                 <a:cs typeface="Calibri" pitchFamily="34" charset="-120"/>
               </a:rPr>
-              <a:t>Word Labs  •  wordlabs.app  •  Root: 'help' = to assist or support someone</a:t>
+              <a:t>Word Labs  •  wordlabs.app  •  Root: 'help' = assist, support, or aid</a:t>
             </a:r>
             <a:endParaRPr lang="en-US" sz="800" dirty="0"/>
           </a:p>
@@ -35006,7 +34802,7 @@
                 <a:ea typeface="Trebuchet MS" pitchFamily="34" charset="-122"/>
                 <a:cs typeface="Trebuchet MS" pitchFamily="34" charset="-120"/>
               </a:rPr>
-              <a:t>-ed</a:t>
+              <a:t>-er</a:t>
             </a:r>
             <a:endParaRPr lang="en-US" sz="1300" dirty="0"/>
           </a:p>
@@ -35159,7 +34955,7 @@
                 <a:ea typeface="Trebuchet MS" pitchFamily="34" charset="-122"/>
                 <a:cs typeface="Trebuchet MS" pitchFamily="34" charset="-120"/>
               </a:rPr>
-              <a:t>-ing</a:t>
+              <a:t>-ful</a:t>
             </a:r>
             <a:endParaRPr lang="en-US" sz="1300" dirty="0"/>
           </a:p>
@@ -35223,7 +35019,7 @@
                 <a:ea typeface="Trebuchet MS" pitchFamily="34" charset="-122"/>
                 <a:cs typeface="Trebuchet MS" pitchFamily="34" charset="-120"/>
               </a:rPr>
-              <a:t>out-</a:t>
+              <a:t>over-</a:t>
             </a:r>
             <a:endParaRPr lang="en-US" sz="1300" dirty="0"/>
           </a:p>
@@ -35312,7 +35108,7 @@
                 <a:ea typeface="Trebuchet MS" pitchFamily="34" charset="-122"/>
                 <a:cs typeface="Trebuchet MS" pitchFamily="34" charset="-120"/>
               </a:rPr>
-              <a:t>-er</a:t>
+              <a:t>-less</a:t>
             </a:r>
             <a:endParaRPr lang="en-US" sz="1300" dirty="0"/>
           </a:p>
@@ -35376,7 +35172,7 @@
                 <a:ea typeface="Trebuchet MS" pitchFamily="34" charset="-122"/>
                 <a:cs typeface="Trebuchet MS" pitchFamily="34" charset="-120"/>
               </a:rPr>
-              <a:t>over-</a:t>
+              <a:t>out-</a:t>
             </a:r>
             <a:endParaRPr lang="en-US" sz="1300" dirty="0"/>
           </a:p>
@@ -35465,7 +35261,7 @@
                 <a:ea typeface="Trebuchet MS" pitchFamily="34" charset="-122"/>
                 <a:cs typeface="Trebuchet MS" pitchFamily="34" charset="-120"/>
               </a:rPr>
-              <a:t>-ful</a:t>
+              <a:t>-ing</a:t>
             </a:r>
             <a:endParaRPr lang="en-US" sz="1300" dirty="0"/>
           </a:p>
@@ -35529,7 +35325,7 @@
                 <a:ea typeface="Trebuchet MS" pitchFamily="34" charset="-122"/>
                 <a:cs typeface="Trebuchet MS" pitchFamily="34" charset="-120"/>
               </a:rPr>
-              <a:t>co-</a:t>
+              <a:t>inter-</a:t>
             </a:r>
             <a:endParaRPr lang="en-US" sz="1300" dirty="0"/>
           </a:p>
@@ -35618,7 +35414,7 @@
                 <a:ea typeface="Trebuchet MS" pitchFamily="34" charset="-122"/>
                 <a:cs typeface="Trebuchet MS" pitchFamily="34" charset="-120"/>
               </a:rPr>
-              <a:t>-less</a:t>
+              <a:t>-fulness</a:t>
             </a:r>
             <a:endParaRPr lang="en-US" sz="1300" dirty="0"/>
           </a:p>
@@ -35723,7 +35519,7 @@
                 <a:ea typeface="Trebuchet MS" pitchFamily="34" charset="-122"/>
                 <a:cs typeface="Trebuchet MS" pitchFamily="34" charset="-120"/>
               </a:rPr>
-              <a:t>helper</a:t>
+              <a:t>helpful</a:t>
             </a:r>
             <a:endParaRPr lang="en-US" sz="1200" dirty="0"/>
           </a:p>
@@ -35789,7 +35585,7 @@
                 <a:ea typeface="Trebuchet MS" pitchFamily="34" charset="-122"/>
                 <a:cs typeface="Trebuchet MS" pitchFamily="34" charset="-120"/>
               </a:rPr>
-              <a:t>helpful</a:t>
+              <a:t>helpless</a:t>
             </a:r>
             <a:endParaRPr lang="en-US" sz="1200" dirty="0"/>
           </a:p>
@@ -35855,7 +35651,7 @@
                 <a:ea typeface="Trebuchet MS" pitchFamily="34" charset="-122"/>
                 <a:cs typeface="Trebuchet MS" pitchFamily="34" charset="-120"/>
               </a:rPr>
-              <a:t>helpless</a:t>
+              <a:t>helper</a:t>
             </a:r>
             <a:endParaRPr lang="en-US" sz="1200" dirty="0"/>
           </a:p>
@@ -35987,7 +35783,7 @@
                 <a:ea typeface="Trebuchet MS" pitchFamily="34" charset="-122"/>
                 <a:cs typeface="Trebuchet MS" pitchFamily="34" charset="-120"/>
               </a:rPr>
-              <a:t>helpfully</a:t>
+              <a:t>helpfulness</a:t>
             </a:r>
             <a:endParaRPr lang="en-US" sz="1200" dirty="0"/>
           </a:p>
@@ -36053,7 +35849,7 @@
                 <a:ea typeface="Trebuchet MS" pitchFamily="34" charset="-122"/>
                 <a:cs typeface="Trebuchet MS" pitchFamily="34" charset="-120"/>
               </a:rPr>
-              <a:t>helplessness</a:t>
+              <a:t>unhelpful</a:t>
             </a:r>
             <a:endParaRPr lang="en-US" sz="1200" dirty="0"/>
           </a:p>
@@ -36119,7 +35915,7 @@
                 <a:ea typeface="Trebuchet MS" pitchFamily="34" charset="-122"/>
                 <a:cs typeface="Trebuchet MS" pitchFamily="34" charset="-120"/>
               </a:rPr>
-              <a:t>selfless</a:t>
+              <a:t>self-help</a:t>
             </a:r>
             <a:endParaRPr lang="en-US" sz="1200" dirty="0"/>
           </a:p>
@@ -36185,7 +35981,7 @@
                 <a:ea typeface="Trebuchet MS" pitchFamily="34" charset="-122"/>
                 <a:cs typeface="Trebuchet MS" pitchFamily="34" charset="-120"/>
               </a:rPr>
-              <a:t>unhelpful</a:t>
+              <a:t>helplessly</a:t>
             </a:r>
             <a:endParaRPr lang="en-US" sz="1200" dirty="0"/>
           </a:p>
@@ -36477,7 +36273,7 @@
                 <a:ea typeface="Calibri" pitchFamily="34" charset="-122"/>
                 <a:cs typeface="Calibri" pitchFamily="34" charset="-120"/>
               </a:rPr>
-              <a:t>Word Labs  •  wordlabs.app  •  Root: 'help' = to assist or support someone</a:t>
+              <a:t>Word Labs  •  wordlabs.app  •  Root: 'help' = assist, support, or aid</a:t>
             </a:r>
             <a:endParaRPr lang="en-US" sz="800" dirty="0"/>
           </a:p>
@@ -36641,7 +36437,7 @@
                 <a:ea typeface="Calibri" pitchFamily="34" charset="-122"/>
                 <a:cs typeface="Calibri" pitchFamily="34" charset="-120"/>
               </a:rPr>
-              <a:t>The core part of a word carrying its basic meaning. For example, 'help' means 'to assist or support someone'.</a:t>
+              <a:t>The core part of a word carrying its basic meaning. For example, 'help' means 'assist, support, or aid'.</a:t>
             </a:r>
             <a:endParaRPr lang="en-US" sz="1350" dirty="0"/>
           </a:p>
@@ -37261,7 +37057,7 @@
                 <a:ea typeface="Calibri" pitchFamily="34" charset="-122"/>
                 <a:cs typeface="Calibri" pitchFamily="34" charset="-120"/>
               </a:rPr>
-              <a:t>Word Labs  •  wordlabs.app  •  Root: 'help' = to assist or support someone</a:t>
+              <a:t>Word Labs  •  wordlabs.app  •  Root: 'help' = assist, support, or aid</a:t>
             </a:r>
             <a:endParaRPr lang="en-US" sz="800" dirty="0"/>
           </a:p>
@@ -37373,7 +37169,7 @@
                 <a:ea typeface="Calibri" pitchFamily="34" charset="-122"/>
                 <a:cs typeface="Calibri" pitchFamily="34" charset="-120"/>
               </a:rPr>
-              <a:t>1.  The word 'helpful' contains the root 'help' and the suffix '-ful'.</a:t>
+              <a:t>1.  The suffix '-ful' in 'helpful' means without or lacking something.</a:t>
             </a:r>
             <a:endParaRPr lang="en-US" sz="1300" dirty="0"/>
           </a:p>
@@ -37396,11 +37192,11 @@
             </a:avLst>
           </a:prstGeom>
           <a:solidFill>
-            <a:srgbClr val="DCFCE7"/>
-          </a:solidFill>
-          <a:ln w="12700">
-            <a:solidFill>
-              <a:srgbClr val="16A34A"/>
+            <a:srgbClr val="FEE2E2"/>
+          </a:solidFill>
+          <a:ln w="12700">
+            <a:solidFill>
+              <a:srgbClr val="DC2626"/>
             </a:solidFill>
             <a:prstDash val="solid"/>
           </a:ln>
@@ -37433,13 +37229,13 @@
             <a:r>
               <a:rPr lang="en-US" sz="1100" b="1" dirty="0">
                 <a:solidFill>
-                  <a:srgbClr val="16A34A"/>
+                  <a:srgbClr val="DC2626"/>
                 </a:solidFill>
                 <a:latin typeface="Trebuchet MS" pitchFamily="34" charset="0"/>
                 <a:ea typeface="Trebuchet MS" pitchFamily="34" charset="-122"/>
                 <a:cs typeface="Trebuchet MS" pitchFamily="34" charset="-120"/>
               </a:rPr>
-              <a:t>TRUE</a:t>
+              <a:t>FALSE</a:t>
             </a:r>
             <a:endParaRPr lang="en-US" sz="1100" dirty="0"/>
           </a:p>
@@ -37512,7 +37308,7 @@
                 <a:ea typeface="Calibri" pitchFamily="34" charset="-122"/>
                 <a:cs typeface="Calibri" pitchFamily="34" charset="-120"/>
               </a:rPr>
-              <a:t>2.  The word 'helpless' means the same thing as 'helpful'.</a:t>
+              <a:t>2.  The word 'helpless' contains the root 'help' and means without help.</a:t>
             </a:r>
             <a:endParaRPr lang="en-US" sz="1300" dirty="0"/>
           </a:p>
@@ -37535,11 +37331,11 @@
             </a:avLst>
           </a:prstGeom>
           <a:solidFill>
-            <a:srgbClr val="FEE2E2"/>
-          </a:solidFill>
-          <a:ln w="12700">
-            <a:solidFill>
-              <a:srgbClr val="DC2626"/>
+            <a:srgbClr val="DCFCE7"/>
+          </a:solidFill>
+          <a:ln w="12700">
+            <a:solidFill>
+              <a:srgbClr val="16A34A"/>
             </a:solidFill>
             <a:prstDash val="solid"/>
           </a:ln>
@@ -37572,13 +37368,13 @@
             <a:r>
               <a:rPr lang="en-US" sz="1100" b="1" dirty="0">
                 <a:solidFill>
-                  <a:srgbClr val="DC2626"/>
+                  <a:srgbClr val="16A34A"/>
                 </a:solidFill>
                 <a:latin typeface="Trebuchet MS" pitchFamily="34" charset="0"/>
                 <a:ea typeface="Trebuchet MS" pitchFamily="34" charset="-122"/>
                 <a:cs typeface="Trebuchet MS" pitchFamily="34" charset="-120"/>
               </a:rPr>
-              <a:t>FALSE</a:t>
+              <a:t>TRUE</a:t>
             </a:r>
             <a:endParaRPr lang="en-US" sz="1100" dirty="0"/>
           </a:p>
@@ -37651,7 +37447,7 @@
                 <a:ea typeface="Calibri" pitchFamily="34" charset="-122"/>
                 <a:cs typeface="Calibri" pitchFamily="34" charset="-120"/>
               </a:rPr>
-              <a:t>3.  Adding the suffix '-er' to 'help' makes a word that means a person who helps.</a:t>
+              <a:t>3.  Adding 'un-' to 'helpful' makes a word that means the opposite.</a:t>
             </a:r>
             <a:endParaRPr lang="en-US" sz="1300" dirty="0"/>
           </a:p>
@@ -37790,7 +37586,7 @@
                 <a:ea typeface="Calibri" pitchFamily="34" charset="-122"/>
                 <a:cs typeface="Calibri" pitchFamily="34" charset="-120"/>
               </a:rPr>
-              <a:t>4.  The root 'help' comes from Old English and means to assist or support.</a:t>
+              <a:t>4.  A 'helper' is a person who assists or supports others.</a:t>
             </a:r>
             <a:endParaRPr lang="en-US" sz="1300" dirty="0"/>
           </a:p>
@@ -37929,7 +37725,7 @@
                 <a:ea typeface="Calibri" pitchFamily="34" charset="-122"/>
                 <a:cs typeface="Calibri" pitchFamily="34" charset="-120"/>
               </a:rPr>
-              <a:t>5.  The prefix 'un-' in 'unhelpful' means the same as the suffix '-ful'.</a:t>
+              <a:t>5.  The word 'helping' can only be used as a noun, never as a verb.</a:t>
             </a:r>
             <a:endParaRPr lang="en-US" sz="1300" dirty="0"/>
           </a:p>
@@ -38287,7 +38083,7 @@
                 <a:ea typeface="Calibri" pitchFamily="34" charset="-122"/>
                 <a:cs typeface="Calibri" pitchFamily="34" charset="-120"/>
               </a:rPr>
-              <a:t>Word Labs  •  wordlabs.app  •  Root: 'help' = to assist or support someone</a:t>
+              <a:t>Word Labs  •  wordlabs.app  •  Root: 'help' = assist, support, or aid</a:t>
             </a:r>
             <a:endParaRPr lang="en-US" sz="800" dirty="0"/>
           </a:p>
@@ -38424,7 +38220,7 @@
                 <a:ea typeface="Trebuchet MS" pitchFamily="34" charset="-122"/>
                 <a:cs typeface="Trebuchet MS" pitchFamily="34" charset="-120"/>
               </a:rPr>
-              <a:t>to assist or support someone</a:t>
+              <a:t>assist, support, or aid</a:t>
             </a:r>
             <a:endParaRPr lang="en-US" sz="2000" dirty="0"/>
           </a:p>
@@ -38463,7 +38259,7 @@
                 <a:ea typeface="Calibri" pitchFamily="34" charset="-122"/>
                 <a:cs typeface="Calibri" pitchFamily="34" charset="-120"/>
               </a:rPr>
-              <a:t>Origin: Old English: helpan</a:t>
+              <a:t>Origin: Latin: helpan</a:t>
             </a:r>
             <a:endParaRPr lang="en-US" sz="1100" dirty="0"/>
           </a:p>
@@ -38568,7 +38364,7 @@
                 <a:ea typeface="Trebuchet MS" pitchFamily="34" charset="-122"/>
                 <a:cs typeface="Trebuchet MS" pitchFamily="34" charset="-120"/>
               </a:rPr>
-              <a:t>helper</a:t>
+              <a:t>helpful</a:t>
             </a:r>
             <a:endParaRPr lang="en-US" sz="1300" dirty="0"/>
           </a:p>
@@ -38634,7 +38430,7 @@
                 <a:ea typeface="Trebuchet MS" pitchFamily="34" charset="-122"/>
                 <a:cs typeface="Trebuchet MS" pitchFamily="34" charset="-120"/>
               </a:rPr>
-              <a:t>helpful</a:t>
+              <a:t>helpless</a:t>
             </a:r>
             <a:endParaRPr lang="en-US" sz="1300" dirty="0"/>
           </a:p>
@@ -38700,7 +38496,7 @@
                 <a:ea typeface="Trebuchet MS" pitchFamily="34" charset="-122"/>
                 <a:cs typeface="Trebuchet MS" pitchFamily="34" charset="-120"/>
               </a:rPr>
-              <a:t>helpless</a:t>
+              <a:t>helper</a:t>
             </a:r>
             <a:endParaRPr lang="en-US" sz="1300" dirty="0"/>
           </a:p>
@@ -38832,7 +38628,7 @@
                 <a:ea typeface="Trebuchet MS" pitchFamily="34" charset="-122"/>
                 <a:cs typeface="Trebuchet MS" pitchFamily="34" charset="-120"/>
               </a:rPr>
-              <a:t>helpfully</a:t>
+              <a:t>helpfulness</a:t>
             </a:r>
             <a:endParaRPr lang="en-US" sz="1300" dirty="0"/>
           </a:p>
@@ -38898,7 +38694,7 @@
                 <a:ea typeface="Trebuchet MS" pitchFamily="34" charset="-122"/>
                 <a:cs typeface="Trebuchet MS" pitchFamily="34" charset="-120"/>
               </a:rPr>
-              <a:t>helplessness</a:t>
+              <a:t>unhelpful</a:t>
             </a:r>
             <a:endParaRPr lang="en-US" sz="1300" dirty="0"/>
           </a:p>
@@ -38964,7 +38760,7 @@
                 <a:ea typeface="Trebuchet MS" pitchFamily="34" charset="-122"/>
                 <a:cs typeface="Trebuchet MS" pitchFamily="34" charset="-120"/>
               </a:rPr>
-              <a:t>selfless</a:t>
+              <a:t>self-help</a:t>
             </a:r>
             <a:endParaRPr lang="en-US" sz="1300" dirty="0"/>
           </a:p>
@@ -39256,7 +39052,7 @@
                 <a:ea typeface="Calibri" pitchFamily="34" charset="-122"/>
                 <a:cs typeface="Calibri" pitchFamily="34" charset="-120"/>
               </a:rPr>
-              <a:t>Word Labs  •  wordlabs.app  •  Root: 'help' = to assist or support someone</a:t>
+              <a:t>Word Labs  •  wordlabs.app  •  Root: 'help' = assist, support, or aid</a:t>
             </a:r>
             <a:endParaRPr lang="en-US" sz="800" dirty="0"/>
           </a:p>
@@ -39685,7 +39481,7 @@
                 <a:ea typeface="Trebuchet MS" pitchFamily="34" charset="-122"/>
                 <a:cs typeface="Trebuchet MS" pitchFamily="34" charset="-120"/>
               </a:rPr>
-              <a:t>-ed</a:t>
+              <a:t>-er</a:t>
             </a:r>
             <a:endParaRPr lang="en-US" sz="1300" dirty="0"/>
           </a:p>
@@ -39838,7 +39634,7 @@
                 <a:ea typeface="Trebuchet MS" pitchFamily="34" charset="-122"/>
                 <a:cs typeface="Trebuchet MS" pitchFamily="34" charset="-120"/>
               </a:rPr>
-              <a:t>-ing</a:t>
+              <a:t>-ful</a:t>
             </a:r>
             <a:endParaRPr lang="en-US" sz="1300" dirty="0"/>
           </a:p>
@@ -39902,7 +39698,7 @@
                 <a:ea typeface="Trebuchet MS" pitchFamily="34" charset="-122"/>
                 <a:cs typeface="Trebuchet MS" pitchFamily="34" charset="-120"/>
               </a:rPr>
-              <a:t>out-</a:t>
+              <a:t>over-</a:t>
             </a:r>
             <a:endParaRPr lang="en-US" sz="1300" dirty="0"/>
           </a:p>
@@ -39991,7 +39787,7 @@
                 <a:ea typeface="Trebuchet MS" pitchFamily="34" charset="-122"/>
                 <a:cs typeface="Trebuchet MS" pitchFamily="34" charset="-120"/>
               </a:rPr>
-              <a:t>-er</a:t>
+              <a:t>-less</a:t>
             </a:r>
             <a:endParaRPr lang="en-US" sz="1300" dirty="0"/>
           </a:p>
@@ -40055,7 +39851,7 @@
                 <a:ea typeface="Trebuchet MS" pitchFamily="34" charset="-122"/>
                 <a:cs typeface="Trebuchet MS" pitchFamily="34" charset="-120"/>
               </a:rPr>
-              <a:t>over-</a:t>
+              <a:t>out-</a:t>
             </a:r>
             <a:endParaRPr lang="en-US" sz="1300" dirty="0"/>
           </a:p>
@@ -40144,7 +39940,7 @@
                 <a:ea typeface="Trebuchet MS" pitchFamily="34" charset="-122"/>
                 <a:cs typeface="Trebuchet MS" pitchFamily="34" charset="-120"/>
               </a:rPr>
-              <a:t>-ful</a:t>
+              <a:t>-ing</a:t>
             </a:r>
             <a:endParaRPr lang="en-US" sz="1300" dirty="0"/>
           </a:p>
@@ -40208,7 +40004,7 @@
                 <a:ea typeface="Trebuchet MS" pitchFamily="34" charset="-122"/>
                 <a:cs typeface="Trebuchet MS" pitchFamily="34" charset="-120"/>
               </a:rPr>
-              <a:t>co-</a:t>
+              <a:t>inter-</a:t>
             </a:r>
             <a:endParaRPr lang="en-US" sz="1300" dirty="0"/>
           </a:p>
@@ -40297,7 +40093,7 @@
                 <a:ea typeface="Trebuchet MS" pitchFamily="34" charset="-122"/>
                 <a:cs typeface="Trebuchet MS" pitchFamily="34" charset="-120"/>
               </a:rPr>
-              <a:t>-less</a:t>
+              <a:t>-fulness</a:t>
             </a:r>
             <a:endParaRPr lang="en-US" sz="1300" dirty="0"/>
           </a:p>
@@ -40633,7 +40429,7 @@
                 <a:ea typeface="Trebuchet MS" pitchFamily="34" charset="-122"/>
                 <a:cs typeface="Trebuchet MS" pitchFamily="34" charset="-120"/>
               </a:rPr>
-              <a:t>-ed</a:t>
+              <a:t>-er</a:t>
             </a:r>
             <a:endParaRPr lang="en-US" sz="1300" dirty="0"/>
           </a:p>
@@ -40738,7 +40534,7 @@
                 <a:ea typeface="Trebuchet MS" pitchFamily="34" charset="-122"/>
                 <a:cs typeface="Trebuchet MS" pitchFamily="34" charset="-120"/>
               </a:rPr>
-              <a:t>helper</a:t>
+              <a:t>helpful</a:t>
             </a:r>
             <a:endParaRPr lang="en-US" sz="1400" dirty="0"/>
           </a:p>
@@ -41030,7 +40826,7 @@
                 <a:ea typeface="Calibri" pitchFamily="34" charset="-122"/>
                 <a:cs typeface="Calibri" pitchFamily="34" charset="-120"/>
               </a:rPr>
-              <a:t>Word Labs  •  wordlabs.app  •  Root: 'help' = to assist or support someone</a:t>
+              <a:t>Word Labs  •  wordlabs.app  •  Root: 'help' = assist, support, or aid</a:t>
             </a:r>
             <a:endParaRPr lang="en-US" sz="800" dirty="0"/>
           </a:p>
@@ -41142,7 +40938,7 @@
                 <a:ea typeface="Trebuchet MS" pitchFamily="34" charset="-122"/>
                 <a:cs typeface="Trebuchet MS" pitchFamily="34" charset="-120"/>
               </a:rPr>
-              <a:t>helper</a:t>
+              <a:t>helpful</a:t>
             </a:r>
             <a:endParaRPr lang="en-US" sz="1200" dirty="0"/>
           </a:p>
@@ -41208,7 +41004,7 @@
                 <a:ea typeface="Calibri" pitchFamily="34" charset="-122"/>
                 <a:cs typeface="Calibri" pitchFamily="34" charset="-120"/>
               </a:rPr>
-              <a:t>Doing something in a way that is useful or supportive.</a:t>
+              <a:t>The quality of being willing and able to help others.</a:t>
             </a:r>
             <a:endParaRPr lang="en-US" sz="1200" dirty="0"/>
           </a:p>
@@ -41281,7 +41077,7 @@
                 <a:ea typeface="Trebuchet MS" pitchFamily="34" charset="-122"/>
                 <a:cs typeface="Trebuchet MS" pitchFamily="34" charset="-120"/>
               </a:rPr>
-              <a:t>helpful</a:t>
+              <a:t>helpless</a:t>
             </a:r>
             <a:endParaRPr lang="en-US" sz="1200" dirty="0"/>
           </a:p>
@@ -41347,7 +41143,7 @@
                 <a:ea typeface="Calibri" pitchFamily="34" charset="-122"/>
                 <a:cs typeface="Calibri" pitchFamily="34" charset="-120"/>
               </a:rPr>
-              <a:t>Unable to do things for yourself or unable to be helped.</a:t>
+              <a:t>A person who assists or supports someone else.</a:t>
             </a:r>
             <a:endParaRPr lang="en-US" sz="1200" dirty="0"/>
           </a:p>
@@ -41420,7 +41216,7 @@
                 <a:ea typeface="Trebuchet MS" pitchFamily="34" charset="-122"/>
                 <a:cs typeface="Trebuchet MS" pitchFamily="34" charset="-120"/>
               </a:rPr>
-              <a:t>helpless</a:t>
+              <a:t>helper</a:t>
             </a:r>
             <a:endParaRPr lang="en-US" sz="1200" dirty="0"/>
           </a:p>
@@ -41486,7 +41282,7 @@
                 <a:ea typeface="Calibri" pitchFamily="34" charset="-122"/>
                 <a:cs typeface="Calibri" pitchFamily="34" charset="-120"/>
               </a:rPr>
-              <a:t>The feeling of being completely unable to help yourself.</a:t>
+              <a:t>Not giving any useful help or support to someone.</a:t>
             </a:r>
             <a:endParaRPr lang="en-US" sz="1200" dirty="0"/>
           </a:p>
@@ -41698,7 +41494,7 @@
                 <a:ea typeface="Trebuchet MS" pitchFamily="34" charset="-122"/>
                 <a:cs typeface="Trebuchet MS" pitchFamily="34" charset="-120"/>
               </a:rPr>
-              <a:t>helpfully</a:t>
+              <a:t>helpfulness</a:t>
             </a:r>
             <a:endParaRPr lang="en-US" sz="1200" dirty="0"/>
           </a:p>
@@ -41764,7 +41560,7 @@
                 <a:ea typeface="Calibri" pitchFamily="34" charset="-122"/>
                 <a:cs typeface="Calibri" pitchFamily="34" charset="-120"/>
               </a:rPr>
-              <a:t>A person who helps someone else do something.</a:t>
+              <a:t>When someone is willing to give assistance to others.</a:t>
             </a:r>
             <a:endParaRPr lang="en-US" sz="1200" dirty="0"/>
           </a:p>
@@ -41837,7 +41633,7 @@
                 <a:ea typeface="Trebuchet MS" pitchFamily="34" charset="-122"/>
                 <a:cs typeface="Trebuchet MS" pitchFamily="34" charset="-120"/>
               </a:rPr>
-              <a:t>helplessness</a:t>
+              <a:t>unhelpful</a:t>
             </a:r>
             <a:endParaRPr lang="en-US" sz="1200" dirty="0"/>
           </a:p>
@@ -41903,7 +41699,7 @@
                 <a:ea typeface="Calibri" pitchFamily="34" charset="-122"/>
                 <a:cs typeface="Calibri" pitchFamily="34" charset="-120"/>
               </a:rPr>
-              <a:t>Caring more about others than about yourself.</a:t>
+              <a:t>When you do things to improve yourself without needing others to assist you.</a:t>
             </a:r>
             <a:endParaRPr lang="en-US" sz="1200" dirty="0"/>
           </a:p>
@@ -41976,7 +41772,7 @@
                 <a:ea typeface="Trebuchet MS" pitchFamily="34" charset="-122"/>
                 <a:cs typeface="Trebuchet MS" pitchFamily="34" charset="-120"/>
               </a:rPr>
-              <a:t>selfless</a:t>
+              <a:t>self-help</a:t>
             </a:r>
             <a:endParaRPr lang="en-US" sz="1200" dirty="0"/>
           </a:p>
@@ -42042,7 +41838,7 @@
                 <a:ea typeface="Calibri" pitchFamily="34" charset="-122"/>
                 <a:cs typeface="Calibri" pitchFamily="34" charset="-120"/>
               </a:rPr>
-              <a:t>Useful or willing to give assistance to others.</a:t>
+              <a:t>When someone is unable to do anything for themselves or needs a lot of support.</a:t>
             </a:r>
             <a:endParaRPr lang="en-US" sz="1200" dirty="0"/>
           </a:p>
@@ -42334,7 +42130,7 @@
                 <a:ea typeface="Calibri" pitchFamily="34" charset="-122"/>
                 <a:cs typeface="Calibri" pitchFamily="34" charset="-120"/>
               </a:rPr>
-              <a:t>Word Labs  •  wordlabs.app  •  Root: 'help' = to assist or support someone</a:t>
+              <a:t>Word Labs  •  wordlabs.app  •  Root: 'help' = assist, support, or aid</a:t>
             </a:r>
             <a:endParaRPr lang="en-US" sz="800" dirty="0"/>
           </a:p>
@@ -42537,7 +42333,7 @@
                 <a:ea typeface="Calibri" pitchFamily="34" charset="-122"/>
                 <a:cs typeface="Calibri" pitchFamily="34" charset="-120"/>
               </a:rPr>
-              <a:t>The helpful librarian showed us where to find books about Australian animals.</a:t>
+              <a:t>The helpful volunteer stayed after school to assist students with their projects.</a:t>
             </a:r>
             <a:endParaRPr lang="en-US" sz="1500" dirty="0"/>
           </a:p>
@@ -42701,7 +42497,7 @@
                 <a:ea typeface="Calibri" pitchFamily="34" charset="-122"/>
                 <a:cs typeface="Calibri" pitchFamily="34" charset="-120"/>
               </a:rPr>
-              <a:t>It is important to be a good helper when someone in your class is struggling with their work.</a:t>
+              <a:t>After the storm, many people felt helpless until emergency workers arrived to support them.</a:t>
             </a:r>
             <a:endParaRPr lang="en-US" sz="1500" dirty="0"/>
           </a:p>
@@ -42865,7 +42661,7 @@
                 <a:ea typeface="Calibri" pitchFamily="34" charset="-122"/>
                 <a:cs typeface="Calibri" pitchFamily="34" charset="-120"/>
               </a:rPr>
-              <a:t>The young child felt helpless when she could not reach the top shelf on her own.</a:t>
+              <a:t>Our class helper handed out the books and collected all the finished worksheets.</a:t>
             </a:r>
             <a:endParaRPr lang="en-US" sz="1500" dirty="0"/>
           </a:p>
